--- a/SMART_MATARAM_Karya_Inovasi.pptx
+++ b/SMART_MATARAM_Karya_Inovasi.pptx
@@ -3962,7 +3962,7 @@
         <p:spPr>
           <a:xfrm>
             <a:off x="914400" y="2286000"/>
-            <a:ext cx="10332720" cy="2560320"/>
+            <a:ext cx="10332720" cy="2194560"/>
           </a:xfrm>
           <a:prstGeom prst="rect">
             <a:avLst/>
@@ -3999,8 +3999,8 @@
         </p:nvSpPr>
         <p:spPr>
           <a:xfrm>
-            <a:off x="274320" y="4846320"/>
-            <a:ext cx="11612880" cy="731520"/>
+            <a:off x="434340" y="4617720"/>
+            <a:ext cx="2103120" cy="868680"/>
           </a:xfrm>
           <a:prstGeom prst="rect">
             <a:avLst/>
@@ -4008,8 +4008,10 @@
           <a:solidFill>
             <a:srgbClr val="00897B"/>
           </a:solidFill>
-          <a:ln>
-            <a:noFill/>
+          <a:ln w="6350">
+            <a:solidFill>
+              <a:srgbClr val="FFFFFF"/>
+            </a:solidFill>
           </a:ln>
         </p:spPr>
         <p:style>
@@ -4042,8 +4044,8 @@
         </p:nvSpPr>
         <p:spPr>
           <a:xfrm>
-            <a:off x="457200" y="4892040"/>
-            <a:ext cx="11247120" cy="640080"/>
+            <a:off x="434340" y="4663440"/>
+            <a:ext cx="2103120" cy="457200"/>
           </a:xfrm>
           <a:prstGeom prst="rect">
             <a:avLst/>
@@ -4058,6 +4060,569 @@
           <a:p>
             <a:pPr algn="ctr"/>
             <a:r>
+              <a:rPr sz="2000" b="1" i="0">
+                <a:solidFill>
+                  <a:srgbClr val="FFFFFF"/>
+                </a:solidFill>
+              </a:rPr>
+              <a:t>4 ULP</a:t>
+            </a:r>
+          </a:p>
+        </p:txBody>
+      </p:sp>
+      <p:sp>
+        <p:nvSpPr>
+          <p:cNvPr id="11" name="TextBox 10"/>
+          <p:cNvSpPr txBox="1"/>
+          <p:nvPr/>
+        </p:nvSpPr>
+        <p:spPr>
+          <a:xfrm>
+            <a:off x="434340" y="5074920"/>
+            <a:ext cx="2103120" cy="411480"/>
+          </a:xfrm>
+          <a:prstGeom prst="rect">
+            <a:avLst/>
+          </a:prstGeom>
+          <a:noFill/>
+        </p:spPr>
+        <p:txBody>
+          <a:bodyPr wrap="square">
+            <a:spAutoFit/>
+          </a:bodyPr>
+          <a:lstStyle/>
+          <a:p>
+            <a:pPr algn="ctr"/>
+            <a:r>
+              <a:rPr sz="900" b="0" i="0">
+                <a:solidFill>
+                  <a:srgbClr val="B2DFDB"/>
+                </a:solidFill>
+              </a:rPr>
+              <a:t>Unit Aktif</a:t>
+            </a:r>
+          </a:p>
+        </p:txBody>
+      </p:sp>
+      <p:sp>
+        <p:nvSpPr>
+          <p:cNvPr id="12" name="Rectangle 11"/>
+          <p:cNvSpPr/>
+          <p:nvPr/>
+        </p:nvSpPr>
+        <p:spPr>
+          <a:xfrm>
+            <a:off x="2738628" y="4617720"/>
+            <a:ext cx="2103120" cy="868680"/>
+          </a:xfrm>
+          <a:prstGeom prst="rect">
+            <a:avLst/>
+          </a:prstGeom>
+          <a:solidFill>
+            <a:srgbClr val="00897B"/>
+          </a:solidFill>
+          <a:ln w="6350">
+            <a:solidFill>
+              <a:srgbClr val="FFFFFF"/>
+            </a:solidFill>
+          </a:ln>
+        </p:spPr>
+        <p:style>
+          <a:lnRef idx="1">
+            <a:schemeClr val="accent1"/>
+          </a:lnRef>
+          <a:fillRef idx="3">
+            <a:schemeClr val="accent1"/>
+          </a:fillRef>
+          <a:effectRef idx="2">
+            <a:schemeClr val="accent1"/>
+          </a:effectRef>
+          <a:fontRef idx="minor">
+            <a:schemeClr val="lt1"/>
+          </a:fontRef>
+        </p:style>
+        <p:txBody>
+          <a:bodyPr rtlCol="0" anchor="ctr"/>
+          <a:lstStyle/>
+          <a:p>
+            <a:pPr algn="ctr"/>
+          </a:p>
+        </p:txBody>
+      </p:sp>
+      <p:sp>
+        <p:nvSpPr>
+          <p:cNvPr id="13" name="TextBox 12"/>
+          <p:cNvSpPr txBox="1"/>
+          <p:nvPr/>
+        </p:nvSpPr>
+        <p:spPr>
+          <a:xfrm>
+            <a:off x="2738628" y="4663440"/>
+            <a:ext cx="2103120" cy="457200"/>
+          </a:xfrm>
+          <a:prstGeom prst="rect">
+            <a:avLst/>
+          </a:prstGeom>
+          <a:noFill/>
+        </p:spPr>
+        <p:txBody>
+          <a:bodyPr wrap="square">
+            <a:spAutoFit/>
+          </a:bodyPr>
+          <a:lstStyle/>
+          <a:p>
+            <a:pPr algn="ctr"/>
+            <a:r>
+              <a:rPr sz="2000" b="1" i="0">
+                <a:solidFill>
+                  <a:srgbClr val="FFFFFF"/>
+                </a:solidFill>
+              </a:rPr>
+              <a:t>100%</a:t>
+            </a:r>
+          </a:p>
+        </p:txBody>
+      </p:sp>
+      <p:sp>
+        <p:nvSpPr>
+          <p:cNvPr id="14" name="TextBox 13"/>
+          <p:cNvSpPr txBox="1"/>
+          <p:nvPr/>
+        </p:nvSpPr>
+        <p:spPr>
+          <a:xfrm>
+            <a:off x="2738628" y="5074920"/>
+            <a:ext cx="2103120" cy="411480"/>
+          </a:xfrm>
+          <a:prstGeom prst="rect">
+            <a:avLst/>
+          </a:prstGeom>
+          <a:noFill/>
+        </p:spPr>
+        <p:txBody>
+          <a:bodyPr wrap="square">
+            <a:spAutoFit/>
+          </a:bodyPr>
+          <a:lstStyle/>
+          <a:p>
+            <a:pPr algn="ctr"/>
+            <a:r>
+              <a:rPr sz="900" b="0" i="0">
+                <a:solidFill>
+                  <a:srgbClr val="B2DFDB"/>
+                </a:solidFill>
+              </a:rPr>
+              <a:t>Temuan Tercatat</a:t>
+            </a:r>
+          </a:p>
+        </p:txBody>
+      </p:sp>
+      <p:sp>
+        <p:nvSpPr>
+          <p:cNvPr id="15" name="Rectangle 14"/>
+          <p:cNvSpPr/>
+          <p:nvPr/>
+        </p:nvSpPr>
+        <p:spPr>
+          <a:xfrm>
+            <a:off x="5042916" y="4617720"/>
+            <a:ext cx="2103120" cy="868680"/>
+          </a:xfrm>
+          <a:prstGeom prst="rect">
+            <a:avLst/>
+          </a:prstGeom>
+          <a:solidFill>
+            <a:srgbClr val="00897B"/>
+          </a:solidFill>
+          <a:ln w="6350">
+            <a:solidFill>
+              <a:srgbClr val="FFFFFF"/>
+            </a:solidFill>
+          </a:ln>
+        </p:spPr>
+        <p:style>
+          <a:lnRef idx="1">
+            <a:schemeClr val="accent1"/>
+          </a:lnRef>
+          <a:fillRef idx="3">
+            <a:schemeClr val="accent1"/>
+          </a:fillRef>
+          <a:effectRef idx="2">
+            <a:schemeClr val="accent1"/>
+          </a:effectRef>
+          <a:fontRef idx="minor">
+            <a:schemeClr val="lt1"/>
+          </a:fontRef>
+        </p:style>
+        <p:txBody>
+          <a:bodyPr rtlCol="0" anchor="ctr"/>
+          <a:lstStyle/>
+          <a:p>
+            <a:pPr algn="ctr"/>
+          </a:p>
+        </p:txBody>
+      </p:sp>
+      <p:sp>
+        <p:nvSpPr>
+          <p:cNvPr id="16" name="TextBox 15"/>
+          <p:cNvSpPr txBox="1"/>
+          <p:nvPr/>
+        </p:nvSpPr>
+        <p:spPr>
+          <a:xfrm>
+            <a:off x="5042916" y="4663440"/>
+            <a:ext cx="2103120" cy="457200"/>
+          </a:xfrm>
+          <a:prstGeom prst="rect">
+            <a:avLst/>
+          </a:prstGeom>
+          <a:noFill/>
+        </p:spPr>
+        <p:txBody>
+          <a:bodyPr wrap="square">
+            <a:spAutoFit/>
+          </a:bodyPr>
+          <a:lstStyle/>
+          <a:p>
+            <a:pPr algn="ctr"/>
+            <a:r>
+              <a:rPr sz="2000" b="1" i="0">
+                <a:solidFill>
+                  <a:srgbClr val="FFFFFF"/>
+                </a:solidFill>
+              </a:rPr>
+              <a:t>4 Modul</a:t>
+            </a:r>
+          </a:p>
+        </p:txBody>
+      </p:sp>
+      <p:sp>
+        <p:nvSpPr>
+          <p:cNvPr id="17" name="TextBox 16"/>
+          <p:cNvSpPr txBox="1"/>
+          <p:nvPr/>
+        </p:nvSpPr>
+        <p:spPr>
+          <a:xfrm>
+            <a:off x="5042916" y="5074920"/>
+            <a:ext cx="2103120" cy="411480"/>
+          </a:xfrm>
+          <a:prstGeom prst="rect">
+            <a:avLst/>
+          </a:prstGeom>
+          <a:noFill/>
+        </p:spPr>
+        <p:txBody>
+          <a:bodyPr wrap="square">
+            <a:spAutoFit/>
+          </a:bodyPr>
+          <a:lstStyle/>
+          <a:p>
+            <a:pPr algn="ctr"/>
+            <a:r>
+              <a:rPr sz="900" b="0" i="0">
+                <a:solidFill>
+                  <a:srgbClr val="B2DFDB"/>
+                </a:solidFill>
+              </a:rPr>
+              <a:t>Terintegrasi</a:t>
+            </a:r>
+          </a:p>
+        </p:txBody>
+      </p:sp>
+      <p:sp>
+        <p:nvSpPr>
+          <p:cNvPr id="18" name="Rectangle 17"/>
+          <p:cNvSpPr/>
+          <p:nvPr/>
+        </p:nvSpPr>
+        <p:spPr>
+          <a:xfrm>
+            <a:off x="7347204" y="4617720"/>
+            <a:ext cx="2103120" cy="868680"/>
+          </a:xfrm>
+          <a:prstGeom prst="rect">
+            <a:avLst/>
+          </a:prstGeom>
+          <a:solidFill>
+            <a:srgbClr val="00897B"/>
+          </a:solidFill>
+          <a:ln w="6350">
+            <a:solidFill>
+              <a:srgbClr val="FFFFFF"/>
+            </a:solidFill>
+          </a:ln>
+        </p:spPr>
+        <p:style>
+          <a:lnRef idx="1">
+            <a:schemeClr val="accent1"/>
+          </a:lnRef>
+          <a:fillRef idx="3">
+            <a:schemeClr val="accent1"/>
+          </a:fillRef>
+          <a:effectRef idx="2">
+            <a:schemeClr val="accent1"/>
+          </a:effectRef>
+          <a:fontRef idx="minor">
+            <a:schemeClr val="lt1"/>
+          </a:fontRef>
+        </p:style>
+        <p:txBody>
+          <a:bodyPr rtlCol="0" anchor="ctr"/>
+          <a:lstStyle/>
+          <a:p>
+            <a:pPr algn="ctr"/>
+          </a:p>
+        </p:txBody>
+      </p:sp>
+      <p:sp>
+        <p:nvSpPr>
+          <p:cNvPr id="19" name="TextBox 18"/>
+          <p:cNvSpPr txBox="1"/>
+          <p:nvPr/>
+        </p:nvSpPr>
+        <p:spPr>
+          <a:xfrm>
+            <a:off x="7347204" y="4663440"/>
+            <a:ext cx="2103120" cy="457200"/>
+          </a:xfrm>
+          <a:prstGeom prst="rect">
+            <a:avLst/>
+          </a:prstGeom>
+          <a:noFill/>
+        </p:spPr>
+        <p:txBody>
+          <a:bodyPr wrap="square">
+            <a:spAutoFit/>
+          </a:bodyPr>
+          <a:lstStyle/>
+          <a:p>
+            <a:pPr algn="ctr"/>
+            <a:r>
+              <a:rPr sz="2000" b="1" i="0">
+                <a:solidFill>
+                  <a:srgbClr val="FFFFFF"/>
+                </a:solidFill>
+              </a:rPr>
+              <a:t>08.00</a:t>
+            </a:r>
+          </a:p>
+        </p:txBody>
+      </p:sp>
+      <p:sp>
+        <p:nvSpPr>
+          <p:cNvPr id="20" name="TextBox 19"/>
+          <p:cNvSpPr txBox="1"/>
+          <p:nvPr/>
+        </p:nvSpPr>
+        <p:spPr>
+          <a:xfrm>
+            <a:off x="7347204" y="5074920"/>
+            <a:ext cx="2103120" cy="411480"/>
+          </a:xfrm>
+          <a:prstGeom prst="rect">
+            <a:avLst/>
+          </a:prstGeom>
+          <a:noFill/>
+        </p:spPr>
+        <p:txBody>
+          <a:bodyPr wrap="square">
+            <a:spAutoFit/>
+          </a:bodyPr>
+          <a:lstStyle/>
+          <a:p>
+            <a:pPr algn="ctr"/>
+            <a:r>
+              <a:rPr sz="900" b="0" i="0">
+                <a:solidFill>
+                  <a:srgbClr val="B2DFDB"/>
+                </a:solidFill>
+              </a:rPr>
+              <a:t>Brief Otomatis</a:t>
+            </a:r>
+          </a:p>
+        </p:txBody>
+      </p:sp>
+      <p:sp>
+        <p:nvSpPr>
+          <p:cNvPr id="21" name="Rectangle 20"/>
+          <p:cNvSpPr/>
+          <p:nvPr/>
+        </p:nvSpPr>
+        <p:spPr>
+          <a:xfrm>
+            <a:off x="9651492" y="4617720"/>
+            <a:ext cx="2103120" cy="868680"/>
+          </a:xfrm>
+          <a:prstGeom prst="rect">
+            <a:avLst/>
+          </a:prstGeom>
+          <a:solidFill>
+            <a:srgbClr val="00897B"/>
+          </a:solidFill>
+          <a:ln w="6350">
+            <a:solidFill>
+              <a:srgbClr val="FFFFFF"/>
+            </a:solidFill>
+          </a:ln>
+        </p:spPr>
+        <p:style>
+          <a:lnRef idx="1">
+            <a:schemeClr val="accent1"/>
+          </a:lnRef>
+          <a:fillRef idx="3">
+            <a:schemeClr val="accent1"/>
+          </a:fillRef>
+          <a:effectRef idx="2">
+            <a:schemeClr val="accent1"/>
+          </a:effectRef>
+          <a:fontRef idx="minor">
+            <a:schemeClr val="lt1"/>
+          </a:fontRef>
+        </p:style>
+        <p:txBody>
+          <a:bodyPr rtlCol="0" anchor="ctr"/>
+          <a:lstStyle/>
+          <a:p>
+            <a:pPr algn="ctr"/>
+          </a:p>
+        </p:txBody>
+      </p:sp>
+      <p:sp>
+        <p:nvSpPr>
+          <p:cNvPr id="22" name="TextBox 21"/>
+          <p:cNvSpPr txBox="1"/>
+          <p:nvPr/>
+        </p:nvSpPr>
+        <p:spPr>
+          <a:xfrm>
+            <a:off x="9651492" y="4663440"/>
+            <a:ext cx="2103120" cy="457200"/>
+          </a:xfrm>
+          <a:prstGeom prst="rect">
+            <a:avLst/>
+          </a:prstGeom>
+          <a:noFill/>
+        </p:spPr>
+        <p:txBody>
+          <a:bodyPr wrap="square">
+            <a:spAutoFit/>
+          </a:bodyPr>
+          <a:lstStyle/>
+          <a:p>
+            <a:pPr algn="ctr"/>
+            <a:r>
+              <a:rPr sz="2000" b="1" i="0">
+                <a:solidFill>
+                  <a:srgbClr val="FFFFFF"/>
+                </a:solidFill>
+              </a:rPr>
+              <a:t>Cloud</a:t>
+            </a:r>
+          </a:p>
+        </p:txBody>
+      </p:sp>
+      <p:sp>
+        <p:nvSpPr>
+          <p:cNvPr id="23" name="TextBox 22"/>
+          <p:cNvSpPr txBox="1"/>
+          <p:nvPr/>
+        </p:nvSpPr>
+        <p:spPr>
+          <a:xfrm>
+            <a:off x="9651492" y="5074920"/>
+            <a:ext cx="2103120" cy="411480"/>
+          </a:xfrm>
+          <a:prstGeom prst="rect">
+            <a:avLst/>
+          </a:prstGeom>
+          <a:noFill/>
+        </p:spPr>
+        <p:txBody>
+          <a:bodyPr wrap="square">
+            <a:spAutoFit/>
+          </a:bodyPr>
+          <a:lstStyle/>
+          <a:p>
+            <a:pPr algn="ctr"/>
+            <a:r>
+              <a:rPr sz="900" b="0" i="0">
+                <a:solidFill>
+                  <a:srgbClr val="B2DFDB"/>
+                </a:solidFill>
+              </a:rPr>
+              <a:t>Tanpa Server</a:t>
+            </a:r>
+          </a:p>
+        </p:txBody>
+      </p:sp>
+      <p:sp>
+        <p:nvSpPr>
+          <p:cNvPr id="24" name="Rectangle 23"/>
+          <p:cNvSpPr/>
+          <p:nvPr/>
+        </p:nvSpPr>
+        <p:spPr>
+          <a:xfrm>
+            <a:off x="274320" y="5577840"/>
+            <a:ext cx="11612880" cy="640080"/>
+          </a:xfrm>
+          <a:prstGeom prst="rect">
+            <a:avLst/>
+          </a:prstGeom>
+          <a:solidFill>
+            <a:srgbClr val="00897B"/>
+          </a:solidFill>
+          <a:ln>
+            <a:noFill/>
+          </a:ln>
+        </p:spPr>
+        <p:style>
+          <a:lnRef idx="1">
+            <a:schemeClr val="accent1"/>
+          </a:lnRef>
+          <a:fillRef idx="3">
+            <a:schemeClr val="accent1"/>
+          </a:fillRef>
+          <a:effectRef idx="2">
+            <a:schemeClr val="accent1"/>
+          </a:effectRef>
+          <a:fontRef idx="minor">
+            <a:schemeClr val="lt1"/>
+          </a:fontRef>
+        </p:style>
+        <p:txBody>
+          <a:bodyPr rtlCol="0" anchor="ctr"/>
+          <a:lstStyle/>
+          <a:p>
+            <a:pPr algn="ctr"/>
+          </a:p>
+        </p:txBody>
+      </p:sp>
+      <p:sp>
+        <p:nvSpPr>
+          <p:cNvPr id="25" name="TextBox 24"/>
+          <p:cNvSpPr txBox="1"/>
+          <p:nvPr/>
+        </p:nvSpPr>
+        <p:spPr>
+          <a:xfrm>
+            <a:off x="457200" y="5623560"/>
+            <a:ext cx="11247120" cy="548640"/>
+          </a:xfrm>
+          <a:prstGeom prst="rect">
+            <a:avLst/>
+          </a:prstGeom>
+          <a:noFill/>
+        </p:spPr>
+        <p:txBody>
+          <a:bodyPr wrap="square">
+            <a:spAutoFit/>
+          </a:bodyPr>
+          <a:lstStyle/>
+          <a:p>
+            <a:pPr algn="ctr"/>
+            <a:r>
               <a:rPr sz="1200" b="1" i="0">
                 <a:solidFill>
                   <a:srgbClr val="FFFFFF"/>
@@ -4070,14 +4635,14 @@
       </p:sp>
       <p:sp>
         <p:nvSpPr>
-          <p:cNvPr id="11" name="TextBox 10"/>
+          <p:cNvPr id="26" name="TextBox 25"/>
           <p:cNvSpPr txBox="1"/>
           <p:nvPr/>
         </p:nvSpPr>
         <p:spPr>
           <a:xfrm>
-            <a:off x="274320" y="5760720"/>
-            <a:ext cx="11612880" cy="457200"/>
+            <a:off x="274320" y="6309360"/>
+            <a:ext cx="11612880" cy="411480"/>
           </a:xfrm>
           <a:prstGeom prst="rect">
             <a:avLst/>
@@ -4360,7 +4925,7 @@
         <p:spPr>
           <a:xfrm>
             <a:off x="274320" y="1755648"/>
-            <a:ext cx="5760720" cy="1901952"/>
+            <a:ext cx="5760720" cy="1810512"/>
           </a:xfrm>
           <a:prstGeom prst="rect">
             <a:avLst/>
@@ -4405,7 +4970,7 @@
         <p:spPr>
           <a:xfrm>
             <a:off x="384048" y="1828800"/>
-            <a:ext cx="5541264" cy="1737360"/>
+            <a:ext cx="5541264" cy="1645920"/>
           </a:xfrm>
           <a:prstGeom prst="rect">
             <a:avLst/>
@@ -4519,7 +5084,7 @@
         <p:spPr>
           <a:xfrm>
             <a:off x="6263640" y="1755648"/>
-            <a:ext cx="5760720" cy="1901952"/>
+            <a:ext cx="5760720" cy="1810512"/>
           </a:xfrm>
           <a:prstGeom prst="rect">
             <a:avLst/>
@@ -4564,7 +5129,7 @@
         <p:spPr>
           <a:xfrm>
             <a:off x="6373368" y="1828800"/>
-            <a:ext cx="5541264" cy="1737360"/>
+            <a:ext cx="5541264" cy="1645920"/>
           </a:xfrm>
           <a:prstGeom prst="rect">
             <a:avLst/>
@@ -4599,7 +5164,7 @@
         </p:nvSpPr>
         <p:spPr>
           <a:xfrm>
-            <a:off x="274320" y="3931920"/>
+            <a:off x="274320" y="3749039"/>
             <a:ext cx="5760720" cy="384048"/>
           </a:xfrm>
           <a:prstGeom prst="rect">
@@ -4642,7 +5207,7 @@
         </p:nvSpPr>
         <p:spPr>
           <a:xfrm>
-            <a:off x="365760" y="3950208"/>
+            <a:off x="365760" y="3767327"/>
             <a:ext cx="5577840" cy="347472"/>
           </a:xfrm>
           <a:prstGeom prst="rect">
@@ -4676,8 +5241,8 @@
         </p:nvSpPr>
         <p:spPr>
           <a:xfrm>
-            <a:off x="274320" y="4315968"/>
-            <a:ext cx="5760720" cy="1901952"/>
+            <a:off x="274320" y="4133087"/>
+            <a:ext cx="5760720" cy="1810512"/>
           </a:xfrm>
           <a:prstGeom prst="rect">
             <a:avLst/>
@@ -4721,8 +5286,8 @@
         </p:nvSpPr>
         <p:spPr>
           <a:xfrm>
-            <a:off x="384048" y="4389120"/>
-            <a:ext cx="5541264" cy="1737360"/>
+            <a:off x="384048" y="4206239"/>
+            <a:ext cx="5541264" cy="1645920"/>
           </a:xfrm>
           <a:prstGeom prst="rect">
             <a:avLst/>
@@ -4757,7 +5322,7 @@
         </p:nvSpPr>
         <p:spPr>
           <a:xfrm>
-            <a:off x="6263640" y="3931920"/>
+            <a:off x="6263640" y="3749039"/>
             <a:ext cx="5760720" cy="384048"/>
           </a:xfrm>
           <a:prstGeom prst="rect">
@@ -4800,7 +5365,7 @@
         </p:nvSpPr>
         <p:spPr>
           <a:xfrm>
-            <a:off x="6355080" y="3950208"/>
+            <a:off x="6355080" y="3767327"/>
             <a:ext cx="5577840" cy="347472"/>
           </a:xfrm>
           <a:prstGeom prst="rect">
@@ -4834,8 +5399,8 @@
         </p:nvSpPr>
         <p:spPr>
           <a:xfrm>
-            <a:off x="6263640" y="4315968"/>
-            <a:ext cx="5760720" cy="1901952"/>
+            <a:off x="6263640" y="4133087"/>
+            <a:ext cx="5760720" cy="1810512"/>
           </a:xfrm>
           <a:prstGeom prst="rect">
             <a:avLst/>
@@ -4879,8 +5444,8 @@
         </p:nvSpPr>
         <p:spPr>
           <a:xfrm>
-            <a:off x="6373368" y="4389120"/>
-            <a:ext cx="5541264" cy="1737360"/>
+            <a:off x="6373368" y="4206239"/>
+            <a:ext cx="5541264" cy="1645920"/>
           </a:xfrm>
           <a:prstGeom prst="rect">
             <a:avLst/>
@@ -4903,6 +5468,707 @@
               <a:t>→  Inspeksi jaringan, inspeksi pohon, dan pengukuran gardu di sistem terpisah
 →  Tidak ada satu dashboard tunggal untuk semua informasi
 →  UP3 tidak bisa memantau kondisi 4 ULP sekaligus</a:t>
+            </a:r>
+          </a:p>
+        </p:txBody>
+      </p:sp>
+      <p:sp>
+        <p:nvSpPr>
+          <p:cNvPr id="22" name="Rectangle 21"/>
+          <p:cNvSpPr/>
+          <p:nvPr/>
+        </p:nvSpPr>
+        <p:spPr>
+          <a:xfrm>
+            <a:off x="274320" y="6053328"/>
+            <a:ext cx="11612880" cy="201168"/>
+          </a:xfrm>
+          <a:prstGeom prst="rect">
+            <a:avLst/>
+          </a:prstGeom>
+          <a:solidFill>
+            <a:srgbClr val="004D40"/>
+          </a:solidFill>
+          <a:ln>
+            <a:noFill/>
+          </a:ln>
+        </p:spPr>
+        <p:style>
+          <a:lnRef idx="1">
+            <a:schemeClr val="accent1"/>
+          </a:lnRef>
+          <a:fillRef idx="3">
+            <a:schemeClr val="accent1"/>
+          </a:fillRef>
+          <a:effectRef idx="2">
+            <a:schemeClr val="accent1"/>
+          </a:effectRef>
+          <a:fontRef idx="minor">
+            <a:schemeClr val="lt1"/>
+          </a:fontRef>
+        </p:style>
+        <p:txBody>
+          <a:bodyPr rtlCol="0" anchor="ctr"/>
+          <a:lstStyle/>
+          <a:p>
+            <a:pPr algn="ctr"/>
+          </a:p>
+        </p:txBody>
+      </p:sp>
+      <p:sp>
+        <p:nvSpPr>
+          <p:cNvPr id="23" name="TextBox 22"/>
+          <p:cNvSpPr txBox="1"/>
+          <p:nvPr/>
+        </p:nvSpPr>
+        <p:spPr>
+          <a:xfrm>
+            <a:off x="320040" y="6053328"/>
+            <a:ext cx="11247120" cy="201168"/>
+          </a:xfrm>
+          <a:prstGeom prst="rect">
+            <a:avLst/>
+          </a:prstGeom>
+          <a:noFill/>
+        </p:spPr>
+        <p:txBody>
+          <a:bodyPr wrap="square">
+            <a:spAutoFit/>
+          </a:bodyPr>
+          <a:lstStyle/>
+          <a:p>
+            <a:pPr algn="ctr"/>
+            <a:r>
+              <a:rPr sz="800" b="1" i="0">
+                <a:solidFill>
+                  <a:srgbClr val="FFFFFF"/>
+                </a:solidFill>
+              </a:rPr>
+              <a:t>TINGKAT DAMPAK TERHADAP OPERASIONAL</a:t>
+            </a:r>
+          </a:p>
+        </p:txBody>
+      </p:sp>
+      <p:sp>
+        <p:nvSpPr>
+          <p:cNvPr id="24" name="Rectangle 23"/>
+          <p:cNvSpPr/>
+          <p:nvPr/>
+        </p:nvSpPr>
+        <p:spPr>
+          <a:xfrm>
+            <a:off x="274320" y="6254496"/>
+            <a:ext cx="2857500" cy="457200"/>
+          </a:xfrm>
+          <a:prstGeom prst="rect">
+            <a:avLst/>
+          </a:prstGeom>
+          <a:solidFill>
+            <a:srgbClr val="FFF0F0"/>
+          </a:solidFill>
+          <a:ln w="6350">
+            <a:solidFill>
+              <a:srgbClr val="B2DFDB"/>
+            </a:solidFill>
+          </a:ln>
+        </p:spPr>
+        <p:style>
+          <a:lnRef idx="1">
+            <a:schemeClr val="accent1"/>
+          </a:lnRef>
+          <a:fillRef idx="3">
+            <a:schemeClr val="accent1"/>
+          </a:fillRef>
+          <a:effectRef idx="2">
+            <a:schemeClr val="accent1"/>
+          </a:effectRef>
+          <a:fontRef idx="minor">
+            <a:schemeClr val="lt1"/>
+          </a:fontRef>
+        </p:style>
+        <p:txBody>
+          <a:bodyPr rtlCol="0" anchor="ctr"/>
+          <a:lstStyle/>
+          <a:p>
+            <a:pPr algn="ctr"/>
+          </a:p>
+        </p:txBody>
+      </p:sp>
+      <p:sp>
+        <p:nvSpPr>
+          <p:cNvPr id="25" name="Rectangle 24"/>
+          <p:cNvSpPr/>
+          <p:nvPr/>
+        </p:nvSpPr>
+        <p:spPr>
+          <a:xfrm>
+            <a:off x="274320" y="6254496"/>
+            <a:ext cx="2143125" cy="457200"/>
+          </a:xfrm>
+          <a:prstGeom prst="rect">
+            <a:avLst/>
+          </a:prstGeom>
+          <a:solidFill>
+            <a:srgbClr val="C0392B"/>
+          </a:solidFill>
+          <a:ln>
+            <a:noFill/>
+          </a:ln>
+        </p:spPr>
+        <p:style>
+          <a:lnRef idx="1">
+            <a:schemeClr val="accent1"/>
+          </a:lnRef>
+          <a:fillRef idx="3">
+            <a:schemeClr val="accent1"/>
+          </a:fillRef>
+          <a:effectRef idx="2">
+            <a:schemeClr val="accent1"/>
+          </a:effectRef>
+          <a:fontRef idx="minor">
+            <a:schemeClr val="lt1"/>
+          </a:fontRef>
+        </p:style>
+        <p:txBody>
+          <a:bodyPr rtlCol="0" anchor="ctr"/>
+          <a:lstStyle/>
+          <a:p>
+            <a:pPr algn="ctr"/>
+          </a:p>
+        </p:txBody>
+      </p:sp>
+      <p:sp>
+        <p:nvSpPr>
+          <p:cNvPr id="26" name="TextBox 25"/>
+          <p:cNvSpPr txBox="1"/>
+          <p:nvPr/>
+        </p:nvSpPr>
+        <p:spPr>
+          <a:xfrm>
+            <a:off x="365760" y="6272784"/>
+            <a:ext cx="2674620" cy="420624"/>
+          </a:xfrm>
+          <a:prstGeom prst="rect">
+            <a:avLst/>
+          </a:prstGeom>
+          <a:noFill/>
+        </p:spPr>
+        <p:txBody>
+          <a:bodyPr wrap="none">
+            <a:spAutoFit/>
+          </a:bodyPr>
+          <a:lstStyle/>
+          <a:p>
+            <a:pPr algn="l"/>
+            <a:r>
+              <a:rPr sz="900" b="1" i="0">
+                <a:solidFill>
+                  <a:srgbClr val="FFFFFF"/>
+                </a:solidFill>
+              </a:rPr>
+              <a:t>  Kehilangan Temuan Inspeksi</a:t>
+            </a:r>
+          </a:p>
+        </p:txBody>
+      </p:sp>
+      <p:sp>
+        <p:nvSpPr>
+          <p:cNvPr id="27" name="TextBox 26"/>
+          <p:cNvSpPr txBox="1"/>
+          <p:nvPr/>
+        </p:nvSpPr>
+        <p:spPr>
+          <a:xfrm>
+            <a:off x="2674620" y="6272784"/>
+            <a:ext cx="411480" cy="420624"/>
+          </a:xfrm>
+          <a:prstGeom prst="rect">
+            <a:avLst/>
+          </a:prstGeom>
+          <a:noFill/>
+        </p:spPr>
+        <p:txBody>
+          <a:bodyPr wrap="none">
+            <a:spAutoFit/>
+          </a:bodyPr>
+          <a:lstStyle/>
+          <a:p>
+            <a:pPr algn="r"/>
+            <a:r>
+              <a:rPr sz="900" b="1" i="0">
+                <a:solidFill>
+                  <a:srgbClr val="1B2631"/>
+                </a:solidFill>
+              </a:rPr>
+              <a:t>75%</a:t>
+            </a:r>
+          </a:p>
+        </p:txBody>
+      </p:sp>
+      <p:sp>
+        <p:nvSpPr>
+          <p:cNvPr id="28" name="Rectangle 27"/>
+          <p:cNvSpPr/>
+          <p:nvPr/>
+        </p:nvSpPr>
+        <p:spPr>
+          <a:xfrm>
+            <a:off x="3177540" y="6254496"/>
+            <a:ext cx="2857500" cy="457200"/>
+          </a:xfrm>
+          <a:prstGeom prst="rect">
+            <a:avLst/>
+          </a:prstGeom>
+          <a:solidFill>
+            <a:srgbClr val="FFF0F0"/>
+          </a:solidFill>
+          <a:ln w="6350">
+            <a:solidFill>
+              <a:srgbClr val="B2DFDB"/>
+            </a:solidFill>
+          </a:ln>
+        </p:spPr>
+        <p:style>
+          <a:lnRef idx="1">
+            <a:schemeClr val="accent1"/>
+          </a:lnRef>
+          <a:fillRef idx="3">
+            <a:schemeClr val="accent1"/>
+          </a:fillRef>
+          <a:effectRef idx="2">
+            <a:schemeClr val="accent1"/>
+          </a:effectRef>
+          <a:fontRef idx="minor">
+            <a:schemeClr val="lt1"/>
+          </a:fontRef>
+        </p:style>
+        <p:txBody>
+          <a:bodyPr rtlCol="0" anchor="ctr"/>
+          <a:lstStyle/>
+          <a:p>
+            <a:pPr algn="ctr"/>
+          </a:p>
+        </p:txBody>
+      </p:sp>
+      <p:sp>
+        <p:nvSpPr>
+          <p:cNvPr id="29" name="Rectangle 28"/>
+          <p:cNvSpPr/>
+          <p:nvPr/>
+        </p:nvSpPr>
+        <p:spPr>
+          <a:xfrm>
+            <a:off x="3177540" y="6254496"/>
+            <a:ext cx="2571750" cy="457200"/>
+          </a:xfrm>
+          <a:prstGeom prst="rect">
+            <a:avLst/>
+          </a:prstGeom>
+          <a:solidFill>
+            <a:srgbClr val="D85000"/>
+          </a:solidFill>
+          <a:ln>
+            <a:noFill/>
+          </a:ln>
+        </p:spPr>
+        <p:style>
+          <a:lnRef idx="1">
+            <a:schemeClr val="accent1"/>
+          </a:lnRef>
+          <a:fillRef idx="3">
+            <a:schemeClr val="accent1"/>
+          </a:fillRef>
+          <a:effectRef idx="2">
+            <a:schemeClr val="accent1"/>
+          </a:effectRef>
+          <a:fontRef idx="minor">
+            <a:schemeClr val="lt1"/>
+          </a:fontRef>
+        </p:style>
+        <p:txBody>
+          <a:bodyPr rtlCol="0" anchor="ctr"/>
+          <a:lstStyle/>
+          <a:p>
+            <a:pPr algn="ctr"/>
+          </a:p>
+        </p:txBody>
+      </p:sp>
+      <p:sp>
+        <p:nvSpPr>
+          <p:cNvPr id="30" name="TextBox 29"/>
+          <p:cNvSpPr txBox="1"/>
+          <p:nvPr/>
+        </p:nvSpPr>
+        <p:spPr>
+          <a:xfrm>
+            <a:off x="3268980" y="6272784"/>
+            <a:ext cx="2674620" cy="420624"/>
+          </a:xfrm>
+          <a:prstGeom prst="rect">
+            <a:avLst/>
+          </a:prstGeom>
+          <a:noFill/>
+        </p:spPr>
+        <p:txBody>
+          <a:bodyPr wrap="none">
+            <a:spAutoFit/>
+          </a:bodyPr>
+          <a:lstStyle/>
+          <a:p>
+            <a:pPr algn="l"/>
+            <a:r>
+              <a:rPr sz="900" b="1" i="0">
+                <a:solidFill>
+                  <a:srgbClr val="FFFFFF"/>
+                </a:solidFill>
+              </a:rPr>
+              <a:t>  Anomali Gardu Terlambat</a:t>
+            </a:r>
+          </a:p>
+        </p:txBody>
+      </p:sp>
+      <p:sp>
+        <p:nvSpPr>
+          <p:cNvPr id="31" name="TextBox 30"/>
+          <p:cNvSpPr txBox="1"/>
+          <p:nvPr/>
+        </p:nvSpPr>
+        <p:spPr>
+          <a:xfrm>
+            <a:off x="5577840" y="6272784"/>
+            <a:ext cx="411480" cy="420624"/>
+          </a:xfrm>
+          <a:prstGeom prst="rect">
+            <a:avLst/>
+          </a:prstGeom>
+          <a:noFill/>
+        </p:spPr>
+        <p:txBody>
+          <a:bodyPr wrap="none">
+            <a:spAutoFit/>
+          </a:bodyPr>
+          <a:lstStyle/>
+          <a:p>
+            <a:pPr algn="r"/>
+            <a:r>
+              <a:rPr sz="900" b="1" i="0">
+                <a:solidFill>
+                  <a:srgbClr val="1B2631"/>
+                </a:solidFill>
+              </a:rPr>
+              <a:t>90%</a:t>
+            </a:r>
+          </a:p>
+        </p:txBody>
+      </p:sp>
+      <p:sp>
+        <p:nvSpPr>
+          <p:cNvPr id="32" name="Rectangle 31"/>
+          <p:cNvSpPr/>
+          <p:nvPr/>
+        </p:nvSpPr>
+        <p:spPr>
+          <a:xfrm>
+            <a:off x="6080760" y="6254496"/>
+            <a:ext cx="2857500" cy="457200"/>
+          </a:xfrm>
+          <a:prstGeom prst="rect">
+            <a:avLst/>
+          </a:prstGeom>
+          <a:solidFill>
+            <a:srgbClr val="FFF0F0"/>
+          </a:solidFill>
+          <a:ln w="6350">
+            <a:solidFill>
+              <a:srgbClr val="B2DFDB"/>
+            </a:solidFill>
+          </a:ln>
+        </p:spPr>
+        <p:style>
+          <a:lnRef idx="1">
+            <a:schemeClr val="accent1"/>
+          </a:lnRef>
+          <a:fillRef idx="3">
+            <a:schemeClr val="accent1"/>
+          </a:fillRef>
+          <a:effectRef idx="2">
+            <a:schemeClr val="accent1"/>
+          </a:effectRef>
+          <a:fontRef idx="minor">
+            <a:schemeClr val="lt1"/>
+          </a:fontRef>
+        </p:style>
+        <p:txBody>
+          <a:bodyPr rtlCol="0" anchor="ctr"/>
+          <a:lstStyle/>
+          <a:p>
+            <a:pPr algn="ctr"/>
+          </a:p>
+        </p:txBody>
+      </p:sp>
+      <p:sp>
+        <p:nvSpPr>
+          <p:cNvPr id="33" name="Rectangle 32"/>
+          <p:cNvSpPr/>
+          <p:nvPr/>
+        </p:nvSpPr>
+        <p:spPr>
+          <a:xfrm>
+            <a:off x="6080760" y="6254496"/>
+            <a:ext cx="1857375" cy="457200"/>
+          </a:xfrm>
+          <a:prstGeom prst="rect">
+            <a:avLst/>
+          </a:prstGeom>
+          <a:solidFill>
+            <a:srgbClr val="F59E0E"/>
+          </a:solidFill>
+          <a:ln>
+            <a:noFill/>
+          </a:ln>
+        </p:spPr>
+        <p:style>
+          <a:lnRef idx="1">
+            <a:schemeClr val="accent1"/>
+          </a:lnRef>
+          <a:fillRef idx="3">
+            <a:schemeClr val="accent1"/>
+          </a:fillRef>
+          <a:effectRef idx="2">
+            <a:schemeClr val="accent1"/>
+          </a:effectRef>
+          <a:fontRef idx="minor">
+            <a:schemeClr val="lt1"/>
+          </a:fontRef>
+        </p:style>
+        <p:txBody>
+          <a:bodyPr rtlCol="0" anchor="ctr"/>
+          <a:lstStyle/>
+          <a:p>
+            <a:pPr algn="ctr"/>
+          </a:p>
+        </p:txBody>
+      </p:sp>
+      <p:sp>
+        <p:nvSpPr>
+          <p:cNvPr id="34" name="TextBox 33"/>
+          <p:cNvSpPr txBox="1"/>
+          <p:nvPr/>
+        </p:nvSpPr>
+        <p:spPr>
+          <a:xfrm>
+            <a:off x="6172200" y="6272784"/>
+            <a:ext cx="2674620" cy="420624"/>
+          </a:xfrm>
+          <a:prstGeom prst="rect">
+            <a:avLst/>
+          </a:prstGeom>
+          <a:noFill/>
+        </p:spPr>
+        <p:txBody>
+          <a:bodyPr wrap="none">
+            <a:spAutoFit/>
+          </a:bodyPr>
+          <a:lstStyle/>
+          <a:p>
+            <a:pPr algn="l"/>
+            <a:r>
+              <a:rPr sz="900" b="1" i="0">
+                <a:solidFill>
+                  <a:srgbClr val="FFFFFF"/>
+                </a:solidFill>
+              </a:rPr>
+              <a:t>  Akuntabilitas Rendah</a:t>
+            </a:r>
+          </a:p>
+        </p:txBody>
+      </p:sp>
+      <p:sp>
+        <p:nvSpPr>
+          <p:cNvPr id="35" name="TextBox 34"/>
+          <p:cNvSpPr txBox="1"/>
+          <p:nvPr/>
+        </p:nvSpPr>
+        <p:spPr>
+          <a:xfrm>
+            <a:off x="8481060" y="6272784"/>
+            <a:ext cx="411480" cy="420624"/>
+          </a:xfrm>
+          <a:prstGeom prst="rect">
+            <a:avLst/>
+          </a:prstGeom>
+          <a:noFill/>
+        </p:spPr>
+        <p:txBody>
+          <a:bodyPr wrap="none">
+            <a:spAutoFit/>
+          </a:bodyPr>
+          <a:lstStyle/>
+          <a:p>
+            <a:pPr algn="r"/>
+            <a:r>
+              <a:rPr sz="900" b="1" i="0">
+                <a:solidFill>
+                  <a:srgbClr val="1B2631"/>
+                </a:solidFill>
+              </a:rPr>
+              <a:t>65%</a:t>
+            </a:r>
+          </a:p>
+        </p:txBody>
+      </p:sp>
+      <p:sp>
+        <p:nvSpPr>
+          <p:cNvPr id="36" name="Rectangle 35"/>
+          <p:cNvSpPr/>
+          <p:nvPr/>
+        </p:nvSpPr>
+        <p:spPr>
+          <a:xfrm>
+            <a:off x="8983980" y="6254496"/>
+            <a:ext cx="2857500" cy="457200"/>
+          </a:xfrm>
+          <a:prstGeom prst="rect">
+            <a:avLst/>
+          </a:prstGeom>
+          <a:solidFill>
+            <a:srgbClr val="FFF0F0"/>
+          </a:solidFill>
+          <a:ln w="6350">
+            <a:solidFill>
+              <a:srgbClr val="B2DFDB"/>
+            </a:solidFill>
+          </a:ln>
+        </p:spPr>
+        <p:style>
+          <a:lnRef idx="1">
+            <a:schemeClr val="accent1"/>
+          </a:lnRef>
+          <a:fillRef idx="3">
+            <a:schemeClr val="accent1"/>
+          </a:fillRef>
+          <a:effectRef idx="2">
+            <a:schemeClr val="accent1"/>
+          </a:effectRef>
+          <a:fontRef idx="minor">
+            <a:schemeClr val="lt1"/>
+          </a:fontRef>
+        </p:style>
+        <p:txBody>
+          <a:bodyPr rtlCol="0" anchor="ctr"/>
+          <a:lstStyle/>
+          <a:p>
+            <a:pPr algn="ctr"/>
+          </a:p>
+        </p:txBody>
+      </p:sp>
+      <p:sp>
+        <p:nvSpPr>
+          <p:cNvPr id="37" name="Rectangle 36"/>
+          <p:cNvSpPr/>
+          <p:nvPr/>
+        </p:nvSpPr>
+        <p:spPr>
+          <a:xfrm>
+            <a:off x="8983980" y="6254496"/>
+            <a:ext cx="2286000" cy="457200"/>
+          </a:xfrm>
+          <a:prstGeom prst="rect">
+            <a:avLst/>
+          </a:prstGeom>
+          <a:solidFill>
+            <a:srgbClr val="8B1A1A"/>
+          </a:solidFill>
+          <a:ln>
+            <a:noFill/>
+          </a:ln>
+        </p:spPr>
+        <p:style>
+          <a:lnRef idx="1">
+            <a:schemeClr val="accent1"/>
+          </a:lnRef>
+          <a:fillRef idx="3">
+            <a:schemeClr val="accent1"/>
+          </a:fillRef>
+          <a:effectRef idx="2">
+            <a:schemeClr val="accent1"/>
+          </a:effectRef>
+          <a:fontRef idx="minor">
+            <a:schemeClr val="lt1"/>
+          </a:fontRef>
+        </p:style>
+        <p:txBody>
+          <a:bodyPr rtlCol="0" anchor="ctr"/>
+          <a:lstStyle/>
+          <a:p>
+            <a:pPr algn="ctr"/>
+          </a:p>
+        </p:txBody>
+      </p:sp>
+      <p:sp>
+        <p:nvSpPr>
+          <p:cNvPr id="38" name="TextBox 37"/>
+          <p:cNvSpPr txBox="1"/>
+          <p:nvPr/>
+        </p:nvSpPr>
+        <p:spPr>
+          <a:xfrm>
+            <a:off x="9075420" y="6272784"/>
+            <a:ext cx="2674620" cy="420624"/>
+          </a:xfrm>
+          <a:prstGeom prst="rect">
+            <a:avLst/>
+          </a:prstGeom>
+          <a:noFill/>
+        </p:spPr>
+        <p:txBody>
+          <a:bodyPr wrap="none">
+            <a:spAutoFit/>
+          </a:bodyPr>
+          <a:lstStyle/>
+          <a:p>
+            <a:pPr algn="l"/>
+            <a:r>
+              <a:rPr sz="900" b="1" i="0">
+                <a:solidFill>
+                  <a:srgbClr val="FFFFFF"/>
+                </a:solidFill>
+              </a:rPr>
+              <a:t>  Visibilitas UP3 Terbatas</a:t>
+            </a:r>
+          </a:p>
+        </p:txBody>
+      </p:sp>
+      <p:sp>
+        <p:nvSpPr>
+          <p:cNvPr id="39" name="TextBox 38"/>
+          <p:cNvSpPr txBox="1"/>
+          <p:nvPr/>
+        </p:nvSpPr>
+        <p:spPr>
+          <a:xfrm>
+            <a:off x="11384280" y="6272784"/>
+            <a:ext cx="411480" cy="420624"/>
+          </a:xfrm>
+          <a:prstGeom prst="rect">
+            <a:avLst/>
+          </a:prstGeom>
+          <a:noFill/>
+        </p:spPr>
+        <p:txBody>
+          <a:bodyPr wrap="none">
+            <a:spAutoFit/>
+          </a:bodyPr>
+          <a:lstStyle/>
+          <a:p>
+            <a:pPr algn="r"/>
+            <a:r>
+              <a:rPr sz="900" b="1" i="0">
+                <a:solidFill>
+                  <a:srgbClr val="1B2631"/>
+                </a:solidFill>
+              </a:rPr>
+              <a:t>80%</a:t>
             </a:r>
           </a:p>
         </p:txBody>
@@ -5088,7 +6354,7 @@
         <p:spPr>
           <a:xfrm>
             <a:off x="274320" y="1371600"/>
-            <a:ext cx="411480" cy="1005840"/>
+            <a:ext cx="411480" cy="960120"/>
           </a:xfrm>
           <a:prstGeom prst="rect">
             <a:avLst/>
@@ -5130,7 +6396,7 @@
         </p:nvSpPr>
         <p:spPr>
           <a:xfrm>
-            <a:off x="274320" y="1600200"/>
+            <a:off x="274320" y="1572768"/>
             <a:ext cx="411480" cy="548640"/>
           </a:xfrm>
           <a:prstGeom prst="rect">
@@ -5165,7 +6431,7 @@
         <p:spPr>
           <a:xfrm>
             <a:off x="685800" y="1371600"/>
-            <a:ext cx="11155680" cy="1005840"/>
+            <a:ext cx="10515600" cy="960120"/>
           </a:xfrm>
           <a:prstGeom prst="rect">
             <a:avLst/>
@@ -5210,7 +6476,7 @@
         <p:spPr>
           <a:xfrm>
             <a:off x="822960" y="1417320"/>
-            <a:ext cx="10972800" cy="347472"/>
+            <a:ext cx="10241280" cy="347472"/>
           </a:xfrm>
           <a:prstGeom prst="rect">
             <a:avLst/>
@@ -5244,7 +6510,7 @@
         <p:spPr>
           <a:xfrm>
             <a:off x="822960" y="1755648"/>
-            <a:ext cx="10881360" cy="548640"/>
+            <a:ext cx="10241280" cy="502920"/>
           </a:xfrm>
           <a:prstGeom prst="rect">
             <a:avLst/>
@@ -5277,8 +6543,8 @@
         </p:nvSpPr>
         <p:spPr>
           <a:xfrm>
-            <a:off x="274320" y="2633472"/>
-            <a:ext cx="411480" cy="1005840"/>
+            <a:off x="274320" y="2578608"/>
+            <a:ext cx="411480" cy="960120"/>
           </a:xfrm>
           <a:prstGeom prst="rect">
             <a:avLst/>
@@ -5320,7 +6586,7 @@
         </p:nvSpPr>
         <p:spPr>
           <a:xfrm>
-            <a:off x="274320" y="2862072"/>
+            <a:off x="274320" y="2779776"/>
             <a:ext cx="411480" cy="548640"/>
           </a:xfrm>
           <a:prstGeom prst="rect">
@@ -5354,8 +6620,8 @@
         </p:nvSpPr>
         <p:spPr>
           <a:xfrm>
-            <a:off x="685800" y="2633472"/>
-            <a:ext cx="11155680" cy="1005840"/>
+            <a:off x="685800" y="2578608"/>
+            <a:ext cx="10515600" cy="960120"/>
           </a:xfrm>
           <a:prstGeom prst="rect">
             <a:avLst/>
@@ -5399,8 +6665,8 @@
         </p:nvSpPr>
         <p:spPr>
           <a:xfrm>
-            <a:off x="822960" y="2679192"/>
-            <a:ext cx="10972800" cy="347472"/>
+            <a:off x="822960" y="2624328"/>
+            <a:ext cx="10241280" cy="347472"/>
           </a:xfrm>
           <a:prstGeom prst="rect">
             <a:avLst/>
@@ -5433,8 +6699,8 @@
         </p:nvSpPr>
         <p:spPr>
           <a:xfrm>
-            <a:off x="822960" y="3017520"/>
-            <a:ext cx="10881360" cy="548640"/>
+            <a:off x="822960" y="2962656"/>
+            <a:ext cx="10241280" cy="502920"/>
           </a:xfrm>
           <a:prstGeom prst="rect">
             <a:avLst/>
@@ -5467,8 +6733,8 @@
         </p:nvSpPr>
         <p:spPr>
           <a:xfrm>
-            <a:off x="274320" y="3895344"/>
-            <a:ext cx="411480" cy="1005840"/>
+            <a:off x="274320" y="3785616"/>
+            <a:ext cx="411480" cy="960120"/>
           </a:xfrm>
           <a:prstGeom prst="rect">
             <a:avLst/>
@@ -5510,7 +6776,7 @@
         </p:nvSpPr>
         <p:spPr>
           <a:xfrm>
-            <a:off x="274320" y="4123944"/>
+            <a:off x="274320" y="3986784"/>
             <a:ext cx="411480" cy="548640"/>
           </a:xfrm>
           <a:prstGeom prst="rect">
@@ -5544,8 +6810,8 @@
         </p:nvSpPr>
         <p:spPr>
           <a:xfrm>
-            <a:off x="685800" y="3895344"/>
-            <a:ext cx="11155680" cy="1005840"/>
+            <a:off x="685800" y="3785616"/>
+            <a:ext cx="10515600" cy="960120"/>
           </a:xfrm>
           <a:prstGeom prst="rect">
             <a:avLst/>
@@ -5589,8 +6855,8 @@
         </p:nvSpPr>
         <p:spPr>
           <a:xfrm>
-            <a:off x="822960" y="3941064"/>
-            <a:ext cx="10972800" cy="347472"/>
+            <a:off x="822960" y="3831336"/>
+            <a:ext cx="10241280" cy="347472"/>
           </a:xfrm>
           <a:prstGeom prst="rect">
             <a:avLst/>
@@ -5623,8 +6889,8 @@
         </p:nvSpPr>
         <p:spPr>
           <a:xfrm>
-            <a:off x="822960" y="4279392"/>
-            <a:ext cx="10881360" cy="548640"/>
+            <a:off x="822960" y="4169664"/>
+            <a:ext cx="10241280" cy="502920"/>
           </a:xfrm>
           <a:prstGeom prst="rect">
             <a:avLst/>
@@ -5657,8 +6923,8 @@
         </p:nvSpPr>
         <p:spPr>
           <a:xfrm>
-            <a:off x="274320" y="5157216"/>
-            <a:ext cx="411480" cy="1005840"/>
+            <a:off x="274320" y="4992624"/>
+            <a:ext cx="411480" cy="960120"/>
           </a:xfrm>
           <a:prstGeom prst="rect">
             <a:avLst/>
@@ -5700,7 +6966,7 @@
         </p:nvSpPr>
         <p:spPr>
           <a:xfrm>
-            <a:off x="274320" y="5385816"/>
+            <a:off x="274320" y="5193792"/>
             <a:ext cx="411480" cy="548640"/>
           </a:xfrm>
           <a:prstGeom prst="rect">
@@ -5734,8 +7000,8 @@
         </p:nvSpPr>
         <p:spPr>
           <a:xfrm>
-            <a:off x="685800" y="5157216"/>
-            <a:ext cx="11155680" cy="1005840"/>
+            <a:off x="685800" y="4992624"/>
+            <a:ext cx="10515600" cy="960120"/>
           </a:xfrm>
           <a:prstGeom prst="rect">
             <a:avLst/>
@@ -5779,8 +7045,8 @@
         </p:nvSpPr>
         <p:spPr>
           <a:xfrm>
-            <a:off x="822960" y="5202936"/>
-            <a:ext cx="10972800" cy="347472"/>
+            <a:off x="822960" y="5038344"/>
+            <a:ext cx="10241280" cy="347472"/>
           </a:xfrm>
           <a:prstGeom prst="rect">
             <a:avLst/>
@@ -5813,8 +7079,8 @@
         </p:nvSpPr>
         <p:spPr>
           <a:xfrm>
-            <a:off x="822960" y="5541264"/>
-            <a:ext cx="10881360" cy="548640"/>
+            <a:off x="822960" y="5376672"/>
+            <a:ext cx="10241280" cy="502920"/>
           </a:xfrm>
           <a:prstGeom prst="rect">
             <a:avLst/>
@@ -5835,6 +7101,753 @@
                 </a:solidFill>
               </a:rPr>
               <a:t>Manajer UP3 tidak dapat memantau kondisi seluruh 4 ULP secara bersamaan dalam satu dashboard. Evaluasi hanya bisa dilakukan melalui rapat atau laporan periodik.</a:t>
+            </a:r>
+          </a:p>
+        </p:txBody>
+      </p:sp>
+      <p:sp>
+        <p:nvSpPr>
+          <p:cNvPr id="26" name="Rectangle 25"/>
+          <p:cNvSpPr/>
+          <p:nvPr/>
+        </p:nvSpPr>
+        <p:spPr>
+          <a:xfrm>
+            <a:off x="452628" y="2331720"/>
+            <a:ext cx="54864" cy="118872"/>
+          </a:xfrm>
+          <a:prstGeom prst="rect">
+            <a:avLst/>
+          </a:prstGeom>
+          <a:solidFill>
+            <a:srgbClr val="FFD600"/>
+          </a:solidFill>
+          <a:ln>
+            <a:noFill/>
+          </a:ln>
+        </p:spPr>
+        <p:style>
+          <a:lnRef idx="1">
+            <a:schemeClr val="accent1"/>
+          </a:lnRef>
+          <a:fillRef idx="3">
+            <a:schemeClr val="accent1"/>
+          </a:fillRef>
+          <a:effectRef idx="2">
+            <a:schemeClr val="accent1"/>
+          </a:effectRef>
+          <a:fontRef idx="minor">
+            <a:schemeClr val="lt1"/>
+          </a:fontRef>
+        </p:style>
+        <p:txBody>
+          <a:bodyPr rtlCol="0" anchor="ctr"/>
+          <a:lstStyle/>
+          <a:p>
+            <a:pPr algn="ctr"/>
+          </a:p>
+        </p:txBody>
+      </p:sp>
+      <p:sp>
+        <p:nvSpPr>
+          <p:cNvPr id="27" name="Rectangle 26"/>
+          <p:cNvSpPr/>
+          <p:nvPr/>
+        </p:nvSpPr>
+        <p:spPr>
+          <a:xfrm>
+            <a:off x="352044" y="2441448"/>
+            <a:ext cx="256032" cy="73152"/>
+          </a:xfrm>
+          <a:prstGeom prst="rect">
+            <a:avLst/>
+          </a:prstGeom>
+          <a:solidFill>
+            <a:srgbClr val="FFD600"/>
+          </a:solidFill>
+          <a:ln>
+            <a:noFill/>
+          </a:ln>
+        </p:spPr>
+        <p:style>
+          <a:lnRef idx="1">
+            <a:schemeClr val="accent1"/>
+          </a:lnRef>
+          <a:fillRef idx="3">
+            <a:schemeClr val="accent1"/>
+          </a:fillRef>
+          <a:effectRef idx="2">
+            <a:schemeClr val="accent1"/>
+          </a:effectRef>
+          <a:fontRef idx="minor">
+            <a:schemeClr val="lt1"/>
+          </a:fontRef>
+        </p:style>
+        <p:txBody>
+          <a:bodyPr rtlCol="0" anchor="ctr"/>
+          <a:lstStyle/>
+          <a:p>
+            <a:pPr algn="ctr"/>
+          </a:p>
+        </p:txBody>
+      </p:sp>
+      <p:sp>
+        <p:nvSpPr>
+          <p:cNvPr id="28" name="Rectangle 27"/>
+          <p:cNvSpPr/>
+          <p:nvPr/>
+        </p:nvSpPr>
+        <p:spPr>
+          <a:xfrm>
+            <a:off x="406908" y="2514600"/>
+            <a:ext cx="146304" cy="54864"/>
+          </a:xfrm>
+          <a:prstGeom prst="rect">
+            <a:avLst/>
+          </a:prstGeom>
+          <a:solidFill>
+            <a:srgbClr val="FFD600"/>
+          </a:solidFill>
+          <a:ln>
+            <a:noFill/>
+          </a:ln>
+        </p:spPr>
+        <p:style>
+          <a:lnRef idx="1">
+            <a:schemeClr val="accent1"/>
+          </a:lnRef>
+          <a:fillRef idx="3">
+            <a:schemeClr val="accent1"/>
+          </a:fillRef>
+          <a:effectRef idx="2">
+            <a:schemeClr val="accent1"/>
+          </a:effectRef>
+          <a:fontRef idx="minor">
+            <a:schemeClr val="lt1"/>
+          </a:fontRef>
+        </p:style>
+        <p:txBody>
+          <a:bodyPr rtlCol="0" anchor="ctr"/>
+          <a:lstStyle/>
+          <a:p>
+            <a:pPr algn="ctr"/>
+          </a:p>
+        </p:txBody>
+      </p:sp>
+      <p:sp>
+        <p:nvSpPr>
+          <p:cNvPr id="29" name="Rectangle 28"/>
+          <p:cNvSpPr/>
+          <p:nvPr/>
+        </p:nvSpPr>
+        <p:spPr>
+          <a:xfrm>
+            <a:off x="452628" y="2569464"/>
+            <a:ext cx="54864" cy="9144"/>
+          </a:xfrm>
+          <a:prstGeom prst="rect">
+            <a:avLst/>
+          </a:prstGeom>
+          <a:solidFill>
+            <a:srgbClr val="FFD600"/>
+          </a:solidFill>
+          <a:ln>
+            <a:noFill/>
+          </a:ln>
+        </p:spPr>
+        <p:style>
+          <a:lnRef idx="1">
+            <a:schemeClr val="accent1"/>
+          </a:lnRef>
+          <a:fillRef idx="3">
+            <a:schemeClr val="accent1"/>
+          </a:fillRef>
+          <a:effectRef idx="2">
+            <a:schemeClr val="accent1"/>
+          </a:effectRef>
+          <a:fontRef idx="minor">
+            <a:schemeClr val="lt1"/>
+          </a:fontRef>
+        </p:style>
+        <p:txBody>
+          <a:bodyPr rtlCol="0" anchor="ctr"/>
+          <a:lstStyle/>
+          <a:p>
+            <a:pPr algn="ctr"/>
+          </a:p>
+        </p:txBody>
+      </p:sp>
+      <p:sp>
+        <p:nvSpPr>
+          <p:cNvPr id="30" name="Rectangle 29"/>
+          <p:cNvSpPr/>
+          <p:nvPr/>
+        </p:nvSpPr>
+        <p:spPr>
+          <a:xfrm>
+            <a:off x="452628" y="3538728"/>
+            <a:ext cx="54864" cy="118872"/>
+          </a:xfrm>
+          <a:prstGeom prst="rect">
+            <a:avLst/>
+          </a:prstGeom>
+          <a:solidFill>
+            <a:srgbClr val="FFD600"/>
+          </a:solidFill>
+          <a:ln>
+            <a:noFill/>
+          </a:ln>
+        </p:spPr>
+        <p:style>
+          <a:lnRef idx="1">
+            <a:schemeClr val="accent1"/>
+          </a:lnRef>
+          <a:fillRef idx="3">
+            <a:schemeClr val="accent1"/>
+          </a:fillRef>
+          <a:effectRef idx="2">
+            <a:schemeClr val="accent1"/>
+          </a:effectRef>
+          <a:fontRef idx="minor">
+            <a:schemeClr val="lt1"/>
+          </a:fontRef>
+        </p:style>
+        <p:txBody>
+          <a:bodyPr rtlCol="0" anchor="ctr"/>
+          <a:lstStyle/>
+          <a:p>
+            <a:pPr algn="ctr"/>
+          </a:p>
+        </p:txBody>
+      </p:sp>
+      <p:sp>
+        <p:nvSpPr>
+          <p:cNvPr id="31" name="Rectangle 30"/>
+          <p:cNvSpPr/>
+          <p:nvPr/>
+        </p:nvSpPr>
+        <p:spPr>
+          <a:xfrm>
+            <a:off x="352044" y="3648456"/>
+            <a:ext cx="256032" cy="73152"/>
+          </a:xfrm>
+          <a:prstGeom prst="rect">
+            <a:avLst/>
+          </a:prstGeom>
+          <a:solidFill>
+            <a:srgbClr val="FFD600"/>
+          </a:solidFill>
+          <a:ln>
+            <a:noFill/>
+          </a:ln>
+        </p:spPr>
+        <p:style>
+          <a:lnRef idx="1">
+            <a:schemeClr val="accent1"/>
+          </a:lnRef>
+          <a:fillRef idx="3">
+            <a:schemeClr val="accent1"/>
+          </a:fillRef>
+          <a:effectRef idx="2">
+            <a:schemeClr val="accent1"/>
+          </a:effectRef>
+          <a:fontRef idx="minor">
+            <a:schemeClr val="lt1"/>
+          </a:fontRef>
+        </p:style>
+        <p:txBody>
+          <a:bodyPr rtlCol="0" anchor="ctr"/>
+          <a:lstStyle/>
+          <a:p>
+            <a:pPr algn="ctr"/>
+          </a:p>
+        </p:txBody>
+      </p:sp>
+      <p:sp>
+        <p:nvSpPr>
+          <p:cNvPr id="32" name="Rectangle 31"/>
+          <p:cNvSpPr/>
+          <p:nvPr/>
+        </p:nvSpPr>
+        <p:spPr>
+          <a:xfrm>
+            <a:off x="406908" y="3721608"/>
+            <a:ext cx="146304" cy="54864"/>
+          </a:xfrm>
+          <a:prstGeom prst="rect">
+            <a:avLst/>
+          </a:prstGeom>
+          <a:solidFill>
+            <a:srgbClr val="FFD600"/>
+          </a:solidFill>
+          <a:ln>
+            <a:noFill/>
+          </a:ln>
+        </p:spPr>
+        <p:style>
+          <a:lnRef idx="1">
+            <a:schemeClr val="accent1"/>
+          </a:lnRef>
+          <a:fillRef idx="3">
+            <a:schemeClr val="accent1"/>
+          </a:fillRef>
+          <a:effectRef idx="2">
+            <a:schemeClr val="accent1"/>
+          </a:effectRef>
+          <a:fontRef idx="minor">
+            <a:schemeClr val="lt1"/>
+          </a:fontRef>
+        </p:style>
+        <p:txBody>
+          <a:bodyPr rtlCol="0" anchor="ctr"/>
+          <a:lstStyle/>
+          <a:p>
+            <a:pPr algn="ctr"/>
+          </a:p>
+        </p:txBody>
+      </p:sp>
+      <p:sp>
+        <p:nvSpPr>
+          <p:cNvPr id="33" name="Rectangle 32"/>
+          <p:cNvSpPr/>
+          <p:nvPr/>
+        </p:nvSpPr>
+        <p:spPr>
+          <a:xfrm>
+            <a:off x="452628" y="3776472"/>
+            <a:ext cx="54864" cy="9144"/>
+          </a:xfrm>
+          <a:prstGeom prst="rect">
+            <a:avLst/>
+          </a:prstGeom>
+          <a:solidFill>
+            <a:srgbClr val="FFD600"/>
+          </a:solidFill>
+          <a:ln>
+            <a:noFill/>
+          </a:ln>
+        </p:spPr>
+        <p:style>
+          <a:lnRef idx="1">
+            <a:schemeClr val="accent1"/>
+          </a:lnRef>
+          <a:fillRef idx="3">
+            <a:schemeClr val="accent1"/>
+          </a:fillRef>
+          <a:effectRef idx="2">
+            <a:schemeClr val="accent1"/>
+          </a:effectRef>
+          <a:fontRef idx="minor">
+            <a:schemeClr val="lt1"/>
+          </a:fontRef>
+        </p:style>
+        <p:txBody>
+          <a:bodyPr rtlCol="0" anchor="ctr"/>
+          <a:lstStyle/>
+          <a:p>
+            <a:pPr algn="ctr"/>
+          </a:p>
+        </p:txBody>
+      </p:sp>
+      <p:sp>
+        <p:nvSpPr>
+          <p:cNvPr id="34" name="Rectangle 33"/>
+          <p:cNvSpPr/>
+          <p:nvPr/>
+        </p:nvSpPr>
+        <p:spPr>
+          <a:xfrm>
+            <a:off x="452628" y="4745736"/>
+            <a:ext cx="54864" cy="118872"/>
+          </a:xfrm>
+          <a:prstGeom prst="rect">
+            <a:avLst/>
+          </a:prstGeom>
+          <a:solidFill>
+            <a:srgbClr val="FFD600"/>
+          </a:solidFill>
+          <a:ln>
+            <a:noFill/>
+          </a:ln>
+        </p:spPr>
+        <p:style>
+          <a:lnRef idx="1">
+            <a:schemeClr val="accent1"/>
+          </a:lnRef>
+          <a:fillRef idx="3">
+            <a:schemeClr val="accent1"/>
+          </a:fillRef>
+          <a:effectRef idx="2">
+            <a:schemeClr val="accent1"/>
+          </a:effectRef>
+          <a:fontRef idx="minor">
+            <a:schemeClr val="lt1"/>
+          </a:fontRef>
+        </p:style>
+        <p:txBody>
+          <a:bodyPr rtlCol="0" anchor="ctr"/>
+          <a:lstStyle/>
+          <a:p>
+            <a:pPr algn="ctr"/>
+          </a:p>
+        </p:txBody>
+      </p:sp>
+      <p:sp>
+        <p:nvSpPr>
+          <p:cNvPr id="35" name="Rectangle 34"/>
+          <p:cNvSpPr/>
+          <p:nvPr/>
+        </p:nvSpPr>
+        <p:spPr>
+          <a:xfrm>
+            <a:off x="352044" y="4855464"/>
+            <a:ext cx="256032" cy="73152"/>
+          </a:xfrm>
+          <a:prstGeom prst="rect">
+            <a:avLst/>
+          </a:prstGeom>
+          <a:solidFill>
+            <a:srgbClr val="FFD600"/>
+          </a:solidFill>
+          <a:ln>
+            <a:noFill/>
+          </a:ln>
+        </p:spPr>
+        <p:style>
+          <a:lnRef idx="1">
+            <a:schemeClr val="accent1"/>
+          </a:lnRef>
+          <a:fillRef idx="3">
+            <a:schemeClr val="accent1"/>
+          </a:fillRef>
+          <a:effectRef idx="2">
+            <a:schemeClr val="accent1"/>
+          </a:effectRef>
+          <a:fontRef idx="minor">
+            <a:schemeClr val="lt1"/>
+          </a:fontRef>
+        </p:style>
+        <p:txBody>
+          <a:bodyPr rtlCol="0" anchor="ctr"/>
+          <a:lstStyle/>
+          <a:p>
+            <a:pPr algn="ctr"/>
+          </a:p>
+        </p:txBody>
+      </p:sp>
+      <p:sp>
+        <p:nvSpPr>
+          <p:cNvPr id="36" name="Rectangle 35"/>
+          <p:cNvSpPr/>
+          <p:nvPr/>
+        </p:nvSpPr>
+        <p:spPr>
+          <a:xfrm>
+            <a:off x="406908" y="4928616"/>
+            <a:ext cx="146304" cy="54864"/>
+          </a:xfrm>
+          <a:prstGeom prst="rect">
+            <a:avLst/>
+          </a:prstGeom>
+          <a:solidFill>
+            <a:srgbClr val="FFD600"/>
+          </a:solidFill>
+          <a:ln>
+            <a:noFill/>
+          </a:ln>
+        </p:spPr>
+        <p:style>
+          <a:lnRef idx="1">
+            <a:schemeClr val="accent1"/>
+          </a:lnRef>
+          <a:fillRef idx="3">
+            <a:schemeClr val="accent1"/>
+          </a:fillRef>
+          <a:effectRef idx="2">
+            <a:schemeClr val="accent1"/>
+          </a:effectRef>
+          <a:fontRef idx="minor">
+            <a:schemeClr val="lt1"/>
+          </a:fontRef>
+        </p:style>
+        <p:txBody>
+          <a:bodyPr rtlCol="0" anchor="ctr"/>
+          <a:lstStyle/>
+          <a:p>
+            <a:pPr algn="ctr"/>
+          </a:p>
+        </p:txBody>
+      </p:sp>
+      <p:sp>
+        <p:nvSpPr>
+          <p:cNvPr id="37" name="Rectangle 36"/>
+          <p:cNvSpPr/>
+          <p:nvPr/>
+        </p:nvSpPr>
+        <p:spPr>
+          <a:xfrm>
+            <a:off x="452628" y="4983480"/>
+            <a:ext cx="54864" cy="9144"/>
+          </a:xfrm>
+          <a:prstGeom prst="rect">
+            <a:avLst/>
+          </a:prstGeom>
+          <a:solidFill>
+            <a:srgbClr val="FFD600"/>
+          </a:solidFill>
+          <a:ln>
+            <a:noFill/>
+          </a:ln>
+        </p:spPr>
+        <p:style>
+          <a:lnRef idx="1">
+            <a:schemeClr val="accent1"/>
+          </a:lnRef>
+          <a:fillRef idx="3">
+            <a:schemeClr val="accent1"/>
+          </a:fillRef>
+          <a:effectRef idx="2">
+            <a:schemeClr val="accent1"/>
+          </a:effectRef>
+          <a:fontRef idx="minor">
+            <a:schemeClr val="lt1"/>
+          </a:fontRef>
+        </p:style>
+        <p:txBody>
+          <a:bodyPr rtlCol="0" anchor="ctr"/>
+          <a:lstStyle/>
+          <a:p>
+            <a:pPr algn="ctr"/>
+          </a:p>
+        </p:txBody>
+      </p:sp>
+      <p:sp>
+        <p:nvSpPr>
+          <p:cNvPr id="38" name="Rectangle 37"/>
+          <p:cNvSpPr/>
+          <p:nvPr/>
+        </p:nvSpPr>
+        <p:spPr>
+          <a:xfrm>
+            <a:off x="274320" y="6025896"/>
+            <a:ext cx="11612880" cy="457200"/>
+          </a:xfrm>
+          <a:prstGeom prst="rect">
+            <a:avLst/>
+          </a:prstGeom>
+          <a:solidFill>
+            <a:srgbClr val="C0392B"/>
+          </a:solidFill>
+          <a:ln>
+            <a:noFill/>
+          </a:ln>
+        </p:spPr>
+        <p:style>
+          <a:lnRef idx="1">
+            <a:schemeClr val="accent1"/>
+          </a:lnRef>
+          <a:fillRef idx="3">
+            <a:schemeClr val="accent1"/>
+          </a:fillRef>
+          <a:effectRef idx="2">
+            <a:schemeClr val="accent1"/>
+          </a:effectRef>
+          <a:fontRef idx="minor">
+            <a:schemeClr val="lt1"/>
+          </a:fontRef>
+        </p:style>
+        <p:txBody>
+          <a:bodyPr rtlCol="0" anchor="ctr"/>
+          <a:lstStyle/>
+          <a:p>
+            <a:pPr algn="ctr"/>
+          </a:p>
+        </p:txBody>
+      </p:sp>
+      <p:sp>
+        <p:nvSpPr>
+          <p:cNvPr id="39" name="TextBox 38"/>
+          <p:cNvSpPr txBox="1"/>
+          <p:nvPr/>
+        </p:nvSpPr>
+        <p:spPr>
+          <a:xfrm>
+            <a:off x="457200" y="6071616"/>
+            <a:ext cx="11247120" cy="365760"/>
+          </a:xfrm>
+          <a:prstGeom prst="rect">
+            <a:avLst/>
+          </a:prstGeom>
+          <a:noFill/>
+        </p:spPr>
+        <p:txBody>
+          <a:bodyPr wrap="square">
+            <a:spAutoFit/>
+          </a:bodyPr>
+          <a:lstStyle/>
+          <a:p>
+            <a:pPr algn="ctr"/>
+            <a:r>
+              <a:rPr sz="1100" b="1" i="0">
+                <a:solidFill>
+                  <a:srgbClr val="FFFFFF"/>
+                </a:solidFill>
+              </a:rPr>
+              <a:t>⚠️  DAMPAK: Gangguan tidak tertangani tepat waktu  ·  Aset berisiko rusak  ·  Kualitas layanan pelanggan menurun</a:t>
+            </a:r>
+          </a:p>
+        </p:txBody>
+      </p:sp>
+      <p:sp>
+        <p:nvSpPr>
+          <p:cNvPr id="40" name="Rectangle 39"/>
+          <p:cNvSpPr/>
+          <p:nvPr/>
+        </p:nvSpPr>
+        <p:spPr>
+          <a:xfrm>
+            <a:off x="11201400" y="1371600"/>
+            <a:ext cx="731520" cy="4937760"/>
+          </a:xfrm>
+          <a:prstGeom prst="rect">
+            <a:avLst/>
+          </a:prstGeom>
+          <a:solidFill>
+            <a:srgbClr val="004D40"/>
+          </a:solidFill>
+          <a:ln>
+            <a:noFill/>
+          </a:ln>
+        </p:spPr>
+        <p:style>
+          <a:lnRef idx="1">
+            <a:schemeClr val="accent1"/>
+          </a:lnRef>
+          <a:fillRef idx="3">
+            <a:schemeClr val="accent1"/>
+          </a:fillRef>
+          <a:effectRef idx="2">
+            <a:schemeClr val="accent1"/>
+          </a:effectRef>
+          <a:fontRef idx="minor">
+            <a:schemeClr val="lt1"/>
+          </a:fontRef>
+        </p:style>
+        <p:txBody>
+          <a:bodyPr rtlCol="0" anchor="ctr"/>
+          <a:lstStyle/>
+          <a:p>
+            <a:pPr algn="ctr"/>
+          </a:p>
+        </p:txBody>
+      </p:sp>
+      <p:sp>
+        <p:nvSpPr>
+          <p:cNvPr id="41" name="TextBox 40"/>
+          <p:cNvSpPr txBox="1"/>
+          <p:nvPr/>
+        </p:nvSpPr>
+        <p:spPr>
+          <a:xfrm>
+            <a:off x="11201400" y="1417320"/>
+            <a:ext cx="731520" cy="2103120"/>
+          </a:xfrm>
+          <a:prstGeom prst="rect">
+            <a:avLst/>
+          </a:prstGeom>
+          <a:noFill/>
+        </p:spPr>
+        <p:txBody>
+          <a:bodyPr wrap="square">
+            <a:spAutoFit/>
+          </a:bodyPr>
+          <a:lstStyle/>
+          <a:p>
+            <a:pPr algn="ctr"/>
+            <a:r>
+              <a:rPr sz="1000" b="1" i="0">
+                <a:solidFill>
+                  <a:srgbClr val="FFD600"/>
+                </a:solidFill>
+              </a:rPr>
+              <a:t>S
+E
+B
+A
+B</a:t>
+            </a:r>
+          </a:p>
+        </p:txBody>
+      </p:sp>
+      <p:sp>
+        <p:nvSpPr>
+          <p:cNvPr id="42" name="TextBox 41"/>
+          <p:cNvSpPr txBox="1"/>
+          <p:nvPr/>
+        </p:nvSpPr>
+        <p:spPr>
+          <a:xfrm>
+            <a:off x="11201400" y="3474720"/>
+            <a:ext cx="731520" cy="457200"/>
+          </a:xfrm>
+          <a:prstGeom prst="rect">
+            <a:avLst/>
+          </a:prstGeom>
+          <a:noFill/>
+        </p:spPr>
+        <p:txBody>
+          <a:bodyPr wrap="square">
+            <a:spAutoFit/>
+          </a:bodyPr>
+          <a:lstStyle/>
+          <a:p>
+            <a:pPr algn="ctr"/>
+            <a:r>
+              <a:rPr sz="1600" b="1" i="0">
+                <a:solidFill>
+                  <a:srgbClr val="FFD600"/>
+                </a:solidFill>
+              </a:rPr>
+              <a:t>↓</a:t>
+            </a:r>
+          </a:p>
+        </p:txBody>
+      </p:sp>
+      <p:sp>
+        <p:nvSpPr>
+          <p:cNvPr id="43" name="TextBox 42"/>
+          <p:cNvSpPr txBox="1"/>
+          <p:nvPr/>
+        </p:nvSpPr>
+        <p:spPr>
+          <a:xfrm>
+            <a:off x="11201400" y="3931920"/>
+            <a:ext cx="731520" cy="2286000"/>
+          </a:xfrm>
+          <a:prstGeom prst="rect">
+            <a:avLst/>
+          </a:prstGeom>
+          <a:noFill/>
+        </p:spPr>
+        <p:txBody>
+          <a:bodyPr wrap="square">
+            <a:spAutoFit/>
+          </a:bodyPr>
+          <a:lstStyle/>
+          <a:p>
+            <a:pPr algn="ctr"/>
+            <a:r>
+              <a:rPr sz="1000" b="1" i="0">
+                <a:solidFill>
+                  <a:srgbClr val="FFA000"/>
+                </a:solidFill>
+              </a:rPr>
+              <a:t>A
+K
+I
+B
+A
+T</a:t>
             </a:r>
           </a:p>
         </p:txBody>
@@ -6020,7 +8033,7 @@
         <p:spPr>
           <a:xfrm>
             <a:off x="274320" y="1371600"/>
-            <a:ext cx="11612880" cy="914400"/>
+            <a:ext cx="11612880" cy="777240"/>
           </a:xfrm>
           <a:prstGeom prst="rect">
             <a:avLst/>
@@ -6062,8 +8075,8 @@
         </p:nvSpPr>
         <p:spPr>
           <a:xfrm>
-            <a:off x="457200" y="1463040"/>
-            <a:ext cx="11247120" cy="731520"/>
+            <a:off x="457200" y="1444752"/>
+            <a:ext cx="11247120" cy="640080"/>
           </a:xfrm>
           <a:prstGeom prst="rect">
             <a:avLst/>
@@ -6096,8 +8109,8 @@
         </p:nvSpPr>
         <p:spPr>
           <a:xfrm>
-            <a:off x="274320" y="2468880"/>
-            <a:ext cx="2834640" cy="384048"/>
+            <a:off x="1668780" y="2148840"/>
+            <a:ext cx="45720" cy="228600"/>
           </a:xfrm>
           <a:prstGeom prst="rect">
             <a:avLst/>
@@ -6133,13 +8146,572 @@
       </p:sp>
       <p:sp>
         <p:nvSpPr>
-          <p:cNvPr id="9" name="TextBox 8"/>
+          <p:cNvPr id="9" name="Rectangle 8"/>
+          <p:cNvSpPr/>
+          <p:nvPr/>
+        </p:nvSpPr>
+        <p:spPr>
+          <a:xfrm>
+            <a:off x="1627632" y="2084832"/>
+            <a:ext cx="128016" cy="128016"/>
+          </a:xfrm>
+          <a:prstGeom prst="rect">
+            <a:avLst/>
+          </a:prstGeom>
+          <a:solidFill>
+            <a:srgbClr val="FFD600"/>
+          </a:solidFill>
+          <a:ln>
+            <a:noFill/>
+          </a:ln>
+        </p:spPr>
+        <p:style>
+          <a:lnRef idx="1">
+            <a:schemeClr val="accent1"/>
+          </a:lnRef>
+          <a:fillRef idx="3">
+            <a:schemeClr val="accent1"/>
+          </a:fillRef>
+          <a:effectRef idx="2">
+            <a:schemeClr val="accent1"/>
+          </a:effectRef>
+          <a:fontRef idx="minor">
+            <a:schemeClr val="lt1"/>
+          </a:fontRef>
+        </p:style>
+        <p:txBody>
+          <a:bodyPr rtlCol="0" anchor="ctr"/>
+          <a:lstStyle/>
+          <a:p>
+            <a:pPr algn="ctr"/>
+          </a:p>
+        </p:txBody>
+      </p:sp>
+      <p:sp>
+        <p:nvSpPr>
+          <p:cNvPr id="10" name="Rectangle 9"/>
+          <p:cNvSpPr/>
+          <p:nvPr/>
+        </p:nvSpPr>
+        <p:spPr>
+          <a:xfrm>
+            <a:off x="1636776" y="2322576"/>
+            <a:ext cx="109728" cy="109728"/>
+          </a:xfrm>
+          <a:prstGeom prst="rect">
+            <a:avLst/>
+          </a:prstGeom>
+          <a:solidFill>
+            <a:srgbClr val="00897B"/>
+          </a:solidFill>
+          <a:ln>
+            <a:noFill/>
+          </a:ln>
+        </p:spPr>
+        <p:style>
+          <a:lnRef idx="1">
+            <a:schemeClr val="accent1"/>
+          </a:lnRef>
+          <a:fillRef idx="3">
+            <a:schemeClr val="accent1"/>
+          </a:fillRef>
+          <a:effectRef idx="2">
+            <a:schemeClr val="accent1"/>
+          </a:effectRef>
+          <a:fontRef idx="minor">
+            <a:schemeClr val="lt1"/>
+          </a:fontRef>
+        </p:style>
+        <p:txBody>
+          <a:bodyPr rtlCol="0" anchor="ctr"/>
+          <a:lstStyle/>
+          <a:p>
+            <a:pPr algn="ctr"/>
+          </a:p>
+        </p:txBody>
+      </p:sp>
+      <p:sp>
+        <p:nvSpPr>
+          <p:cNvPr id="11" name="Rectangle 10"/>
+          <p:cNvSpPr/>
+          <p:nvPr/>
+        </p:nvSpPr>
+        <p:spPr>
+          <a:xfrm>
+            <a:off x="4640580" y="2148840"/>
+            <a:ext cx="45720" cy="228600"/>
+          </a:xfrm>
+          <a:prstGeom prst="rect">
+            <a:avLst/>
+          </a:prstGeom>
+          <a:solidFill>
+            <a:srgbClr val="00897B"/>
+          </a:solidFill>
+          <a:ln>
+            <a:noFill/>
+          </a:ln>
+        </p:spPr>
+        <p:style>
+          <a:lnRef idx="1">
+            <a:schemeClr val="accent1"/>
+          </a:lnRef>
+          <a:fillRef idx="3">
+            <a:schemeClr val="accent1"/>
+          </a:fillRef>
+          <a:effectRef idx="2">
+            <a:schemeClr val="accent1"/>
+          </a:effectRef>
+          <a:fontRef idx="minor">
+            <a:schemeClr val="lt1"/>
+          </a:fontRef>
+        </p:style>
+        <p:txBody>
+          <a:bodyPr rtlCol="0" anchor="ctr"/>
+          <a:lstStyle/>
+          <a:p>
+            <a:pPr algn="ctr"/>
+          </a:p>
+        </p:txBody>
+      </p:sp>
+      <p:sp>
+        <p:nvSpPr>
+          <p:cNvPr id="12" name="Rectangle 11"/>
+          <p:cNvSpPr/>
+          <p:nvPr/>
+        </p:nvSpPr>
+        <p:spPr>
+          <a:xfrm>
+            <a:off x="4599432" y="2084832"/>
+            <a:ext cx="128016" cy="128016"/>
+          </a:xfrm>
+          <a:prstGeom prst="rect">
+            <a:avLst/>
+          </a:prstGeom>
+          <a:solidFill>
+            <a:srgbClr val="FFD600"/>
+          </a:solidFill>
+          <a:ln>
+            <a:noFill/>
+          </a:ln>
+        </p:spPr>
+        <p:style>
+          <a:lnRef idx="1">
+            <a:schemeClr val="accent1"/>
+          </a:lnRef>
+          <a:fillRef idx="3">
+            <a:schemeClr val="accent1"/>
+          </a:fillRef>
+          <a:effectRef idx="2">
+            <a:schemeClr val="accent1"/>
+          </a:effectRef>
+          <a:fontRef idx="minor">
+            <a:schemeClr val="lt1"/>
+          </a:fontRef>
+        </p:style>
+        <p:txBody>
+          <a:bodyPr rtlCol="0" anchor="ctr"/>
+          <a:lstStyle/>
+          <a:p>
+            <a:pPr algn="ctr"/>
+          </a:p>
+        </p:txBody>
+      </p:sp>
+      <p:sp>
+        <p:nvSpPr>
+          <p:cNvPr id="13" name="Rectangle 12"/>
+          <p:cNvSpPr/>
+          <p:nvPr/>
+        </p:nvSpPr>
+        <p:spPr>
+          <a:xfrm>
+            <a:off x="4608576" y="2322576"/>
+            <a:ext cx="109728" cy="109728"/>
+          </a:xfrm>
+          <a:prstGeom prst="rect">
+            <a:avLst/>
+          </a:prstGeom>
+          <a:solidFill>
+            <a:srgbClr val="00897B"/>
+          </a:solidFill>
+          <a:ln>
+            <a:noFill/>
+          </a:ln>
+        </p:spPr>
+        <p:style>
+          <a:lnRef idx="1">
+            <a:schemeClr val="accent1"/>
+          </a:lnRef>
+          <a:fillRef idx="3">
+            <a:schemeClr val="accent1"/>
+          </a:fillRef>
+          <a:effectRef idx="2">
+            <a:schemeClr val="accent1"/>
+          </a:effectRef>
+          <a:fontRef idx="minor">
+            <a:schemeClr val="lt1"/>
+          </a:fontRef>
+        </p:style>
+        <p:txBody>
+          <a:bodyPr rtlCol="0" anchor="ctr"/>
+          <a:lstStyle/>
+          <a:p>
+            <a:pPr algn="ctr"/>
+          </a:p>
+        </p:txBody>
+      </p:sp>
+      <p:sp>
+        <p:nvSpPr>
+          <p:cNvPr id="14" name="Rectangle 13"/>
+          <p:cNvSpPr/>
+          <p:nvPr/>
+        </p:nvSpPr>
+        <p:spPr>
+          <a:xfrm>
+            <a:off x="7612380" y="2148840"/>
+            <a:ext cx="45720" cy="228600"/>
+          </a:xfrm>
+          <a:prstGeom prst="rect">
+            <a:avLst/>
+          </a:prstGeom>
+          <a:solidFill>
+            <a:srgbClr val="00897B"/>
+          </a:solidFill>
+          <a:ln>
+            <a:noFill/>
+          </a:ln>
+        </p:spPr>
+        <p:style>
+          <a:lnRef idx="1">
+            <a:schemeClr val="accent1"/>
+          </a:lnRef>
+          <a:fillRef idx="3">
+            <a:schemeClr val="accent1"/>
+          </a:fillRef>
+          <a:effectRef idx="2">
+            <a:schemeClr val="accent1"/>
+          </a:effectRef>
+          <a:fontRef idx="minor">
+            <a:schemeClr val="lt1"/>
+          </a:fontRef>
+        </p:style>
+        <p:txBody>
+          <a:bodyPr rtlCol="0" anchor="ctr"/>
+          <a:lstStyle/>
+          <a:p>
+            <a:pPr algn="ctr"/>
+          </a:p>
+        </p:txBody>
+      </p:sp>
+      <p:sp>
+        <p:nvSpPr>
+          <p:cNvPr id="15" name="Rectangle 14"/>
+          <p:cNvSpPr/>
+          <p:nvPr/>
+        </p:nvSpPr>
+        <p:spPr>
+          <a:xfrm>
+            <a:off x="7571232" y="2084832"/>
+            <a:ext cx="128016" cy="128016"/>
+          </a:xfrm>
+          <a:prstGeom prst="rect">
+            <a:avLst/>
+          </a:prstGeom>
+          <a:solidFill>
+            <a:srgbClr val="FFD600"/>
+          </a:solidFill>
+          <a:ln>
+            <a:noFill/>
+          </a:ln>
+        </p:spPr>
+        <p:style>
+          <a:lnRef idx="1">
+            <a:schemeClr val="accent1"/>
+          </a:lnRef>
+          <a:fillRef idx="3">
+            <a:schemeClr val="accent1"/>
+          </a:fillRef>
+          <a:effectRef idx="2">
+            <a:schemeClr val="accent1"/>
+          </a:effectRef>
+          <a:fontRef idx="minor">
+            <a:schemeClr val="lt1"/>
+          </a:fontRef>
+        </p:style>
+        <p:txBody>
+          <a:bodyPr rtlCol="0" anchor="ctr"/>
+          <a:lstStyle/>
+          <a:p>
+            <a:pPr algn="ctr"/>
+          </a:p>
+        </p:txBody>
+      </p:sp>
+      <p:sp>
+        <p:nvSpPr>
+          <p:cNvPr id="16" name="Rectangle 15"/>
+          <p:cNvSpPr/>
+          <p:nvPr/>
+        </p:nvSpPr>
+        <p:spPr>
+          <a:xfrm>
+            <a:off x="7580376" y="2322576"/>
+            <a:ext cx="109728" cy="109728"/>
+          </a:xfrm>
+          <a:prstGeom prst="rect">
+            <a:avLst/>
+          </a:prstGeom>
+          <a:solidFill>
+            <a:srgbClr val="00897B"/>
+          </a:solidFill>
+          <a:ln>
+            <a:noFill/>
+          </a:ln>
+        </p:spPr>
+        <p:style>
+          <a:lnRef idx="1">
+            <a:schemeClr val="accent1"/>
+          </a:lnRef>
+          <a:fillRef idx="3">
+            <a:schemeClr val="accent1"/>
+          </a:fillRef>
+          <a:effectRef idx="2">
+            <a:schemeClr val="accent1"/>
+          </a:effectRef>
+          <a:fontRef idx="minor">
+            <a:schemeClr val="lt1"/>
+          </a:fontRef>
+        </p:style>
+        <p:txBody>
+          <a:bodyPr rtlCol="0" anchor="ctr"/>
+          <a:lstStyle/>
+          <a:p>
+            <a:pPr algn="ctr"/>
+          </a:p>
+        </p:txBody>
+      </p:sp>
+      <p:sp>
+        <p:nvSpPr>
+          <p:cNvPr id="17" name="Rectangle 16"/>
+          <p:cNvSpPr/>
+          <p:nvPr/>
+        </p:nvSpPr>
+        <p:spPr>
+          <a:xfrm>
+            <a:off x="10584180" y="2148840"/>
+            <a:ext cx="45720" cy="228600"/>
+          </a:xfrm>
+          <a:prstGeom prst="rect">
+            <a:avLst/>
+          </a:prstGeom>
+          <a:solidFill>
+            <a:srgbClr val="00897B"/>
+          </a:solidFill>
+          <a:ln>
+            <a:noFill/>
+          </a:ln>
+        </p:spPr>
+        <p:style>
+          <a:lnRef idx="1">
+            <a:schemeClr val="accent1"/>
+          </a:lnRef>
+          <a:fillRef idx="3">
+            <a:schemeClr val="accent1"/>
+          </a:fillRef>
+          <a:effectRef idx="2">
+            <a:schemeClr val="accent1"/>
+          </a:effectRef>
+          <a:fontRef idx="minor">
+            <a:schemeClr val="lt1"/>
+          </a:fontRef>
+        </p:style>
+        <p:txBody>
+          <a:bodyPr rtlCol="0" anchor="ctr"/>
+          <a:lstStyle/>
+          <a:p>
+            <a:pPr algn="ctr"/>
+          </a:p>
+        </p:txBody>
+      </p:sp>
+      <p:sp>
+        <p:nvSpPr>
+          <p:cNvPr id="18" name="Rectangle 17"/>
+          <p:cNvSpPr/>
+          <p:nvPr/>
+        </p:nvSpPr>
+        <p:spPr>
+          <a:xfrm>
+            <a:off x="10543032" y="2084832"/>
+            <a:ext cx="128016" cy="128016"/>
+          </a:xfrm>
+          <a:prstGeom prst="rect">
+            <a:avLst/>
+          </a:prstGeom>
+          <a:solidFill>
+            <a:srgbClr val="FFD600"/>
+          </a:solidFill>
+          <a:ln>
+            <a:noFill/>
+          </a:ln>
+        </p:spPr>
+        <p:style>
+          <a:lnRef idx="1">
+            <a:schemeClr val="accent1"/>
+          </a:lnRef>
+          <a:fillRef idx="3">
+            <a:schemeClr val="accent1"/>
+          </a:fillRef>
+          <a:effectRef idx="2">
+            <a:schemeClr val="accent1"/>
+          </a:effectRef>
+          <a:fontRef idx="minor">
+            <a:schemeClr val="lt1"/>
+          </a:fontRef>
+        </p:style>
+        <p:txBody>
+          <a:bodyPr rtlCol="0" anchor="ctr"/>
+          <a:lstStyle/>
+          <a:p>
+            <a:pPr algn="ctr"/>
+          </a:p>
+        </p:txBody>
+      </p:sp>
+      <p:sp>
+        <p:nvSpPr>
+          <p:cNvPr id="19" name="Rectangle 18"/>
+          <p:cNvSpPr/>
+          <p:nvPr/>
+        </p:nvSpPr>
+        <p:spPr>
+          <a:xfrm>
+            <a:off x="10552176" y="2322576"/>
+            <a:ext cx="109728" cy="109728"/>
+          </a:xfrm>
+          <a:prstGeom prst="rect">
+            <a:avLst/>
+          </a:prstGeom>
+          <a:solidFill>
+            <a:srgbClr val="00897B"/>
+          </a:solidFill>
+          <a:ln>
+            <a:noFill/>
+          </a:ln>
+        </p:spPr>
+        <p:style>
+          <a:lnRef idx="1">
+            <a:schemeClr val="accent1"/>
+          </a:lnRef>
+          <a:fillRef idx="3">
+            <a:schemeClr val="accent1"/>
+          </a:fillRef>
+          <a:effectRef idx="2">
+            <a:schemeClr val="accent1"/>
+          </a:effectRef>
+          <a:fontRef idx="minor">
+            <a:schemeClr val="lt1"/>
+          </a:fontRef>
+        </p:style>
+        <p:txBody>
+          <a:bodyPr rtlCol="0" anchor="ctr"/>
+          <a:lstStyle/>
+          <a:p>
+            <a:pPr algn="ctr"/>
+          </a:p>
+        </p:txBody>
+      </p:sp>
+      <p:sp>
+        <p:nvSpPr>
+          <p:cNvPr id="20" name="Rectangle 19"/>
+          <p:cNvSpPr/>
+          <p:nvPr/>
+        </p:nvSpPr>
+        <p:spPr>
+          <a:xfrm>
+            <a:off x="1668780" y="2125980"/>
+            <a:ext cx="8961120" cy="45720"/>
+          </a:xfrm>
+          <a:prstGeom prst="rect">
+            <a:avLst/>
+          </a:prstGeom>
+          <a:solidFill>
+            <a:srgbClr val="00897B"/>
+          </a:solidFill>
+          <a:ln>
+            <a:noFill/>
+          </a:ln>
+        </p:spPr>
+        <p:style>
+          <a:lnRef idx="1">
+            <a:schemeClr val="accent1"/>
+          </a:lnRef>
+          <a:fillRef idx="3">
+            <a:schemeClr val="accent1"/>
+          </a:fillRef>
+          <a:effectRef idx="2">
+            <a:schemeClr val="accent1"/>
+          </a:effectRef>
+          <a:fontRef idx="minor">
+            <a:schemeClr val="lt1"/>
+          </a:fontRef>
+        </p:style>
+        <p:txBody>
+          <a:bodyPr rtlCol="0" anchor="ctr"/>
+          <a:lstStyle/>
+          <a:p>
+            <a:pPr algn="ctr"/>
+          </a:p>
+        </p:txBody>
+      </p:sp>
+      <p:sp>
+        <p:nvSpPr>
+          <p:cNvPr id="21" name="Rectangle 20"/>
+          <p:cNvSpPr/>
+          <p:nvPr/>
+        </p:nvSpPr>
+        <p:spPr>
+          <a:xfrm>
+            <a:off x="274320" y="2377440"/>
+            <a:ext cx="2834640" cy="384048"/>
+          </a:xfrm>
+          <a:prstGeom prst="rect">
+            <a:avLst/>
+          </a:prstGeom>
+          <a:solidFill>
+            <a:srgbClr val="00897B"/>
+          </a:solidFill>
+          <a:ln>
+            <a:noFill/>
+          </a:ln>
+        </p:spPr>
+        <p:style>
+          <a:lnRef idx="1">
+            <a:schemeClr val="accent1"/>
+          </a:lnRef>
+          <a:fillRef idx="3">
+            <a:schemeClr val="accent1"/>
+          </a:fillRef>
+          <a:effectRef idx="2">
+            <a:schemeClr val="accent1"/>
+          </a:effectRef>
+          <a:fontRef idx="minor">
+            <a:schemeClr val="lt1"/>
+          </a:fontRef>
+        </p:style>
+        <p:txBody>
+          <a:bodyPr rtlCol="0" anchor="ctr"/>
+          <a:lstStyle/>
+          <a:p>
+            <a:pPr algn="ctr"/>
+          </a:p>
+        </p:txBody>
+      </p:sp>
+      <p:sp>
+        <p:nvSpPr>
+          <p:cNvPr id="22" name="TextBox 21"/>
           <p:cNvSpPr txBox="1"/>
           <p:nvPr/>
         </p:nvSpPr>
         <p:spPr>
           <a:xfrm>
-            <a:off x="365760" y="2487168"/>
+            <a:off x="365760" y="2395728"/>
             <a:ext cx="2651760" cy="347472"/>
           </a:xfrm>
           <a:prstGeom prst="rect">
@@ -6167,14 +8739,14 @@
       </p:sp>
       <p:sp>
         <p:nvSpPr>
-          <p:cNvPr id="10" name="Rectangle 9"/>
-          <p:cNvSpPr/>
-          <p:nvPr/>
-        </p:nvSpPr>
-        <p:spPr>
-          <a:xfrm>
-            <a:off x="274320" y="2852928"/>
-            <a:ext cx="2834640" cy="3182112"/>
+          <p:cNvPr id="23" name="Rectangle 22"/>
+          <p:cNvSpPr/>
+          <p:nvPr/>
+        </p:nvSpPr>
+        <p:spPr>
+          <a:xfrm>
+            <a:off x="274320" y="2761488"/>
+            <a:ext cx="2834640" cy="3730752"/>
           </a:xfrm>
           <a:prstGeom prst="rect">
             <a:avLst/>
@@ -6212,14 +8784,14 @@
       </p:sp>
       <p:sp>
         <p:nvSpPr>
-          <p:cNvPr id="11" name="TextBox 10"/>
+          <p:cNvPr id="24" name="TextBox 23"/>
           <p:cNvSpPr txBox="1"/>
           <p:nvPr/>
         </p:nvSpPr>
         <p:spPr>
           <a:xfrm>
-            <a:off x="384048" y="2926080"/>
-            <a:ext cx="2615184" cy="3017520"/>
+            <a:off x="384048" y="2834640"/>
+            <a:ext cx="2615184" cy="3566160"/>
           </a:xfrm>
           <a:prstGeom prst="rect">
             <a:avLst/>
@@ -6249,13 +8821,13 @@
       </p:sp>
       <p:sp>
         <p:nvSpPr>
-          <p:cNvPr id="12" name="Rectangle 11"/>
-          <p:cNvSpPr/>
-          <p:nvPr/>
-        </p:nvSpPr>
-        <p:spPr>
-          <a:xfrm>
-            <a:off x="3246120" y="2468880"/>
+          <p:cNvPr id="25" name="Rectangle 24"/>
+          <p:cNvSpPr/>
+          <p:nvPr/>
+        </p:nvSpPr>
+        <p:spPr>
+          <a:xfrm>
+            <a:off x="3246120" y="2377440"/>
             <a:ext cx="2834640" cy="384048"/>
           </a:xfrm>
           <a:prstGeom prst="rect">
@@ -6292,13 +8864,13 @@
       </p:sp>
       <p:sp>
         <p:nvSpPr>
-          <p:cNvPr id="13" name="TextBox 12"/>
+          <p:cNvPr id="26" name="TextBox 25"/>
           <p:cNvSpPr txBox="1"/>
           <p:nvPr/>
         </p:nvSpPr>
         <p:spPr>
           <a:xfrm>
-            <a:off x="3337560" y="2487168"/>
+            <a:off x="3337560" y="2395728"/>
             <a:ext cx="2651760" cy="347472"/>
           </a:xfrm>
           <a:prstGeom prst="rect">
@@ -6326,14 +8898,14 @@
       </p:sp>
       <p:sp>
         <p:nvSpPr>
-          <p:cNvPr id="14" name="Rectangle 13"/>
-          <p:cNvSpPr/>
-          <p:nvPr/>
-        </p:nvSpPr>
-        <p:spPr>
-          <a:xfrm>
-            <a:off x="3246120" y="2852928"/>
-            <a:ext cx="2834640" cy="3182112"/>
+          <p:cNvPr id="27" name="Rectangle 26"/>
+          <p:cNvSpPr/>
+          <p:nvPr/>
+        </p:nvSpPr>
+        <p:spPr>
+          <a:xfrm>
+            <a:off x="3246120" y="2761488"/>
+            <a:ext cx="2834640" cy="3730752"/>
           </a:xfrm>
           <a:prstGeom prst="rect">
             <a:avLst/>
@@ -6371,14 +8943,14 @@
       </p:sp>
       <p:sp>
         <p:nvSpPr>
-          <p:cNvPr id="15" name="TextBox 14"/>
+          <p:cNvPr id="28" name="TextBox 27"/>
           <p:cNvSpPr txBox="1"/>
           <p:nvPr/>
         </p:nvSpPr>
         <p:spPr>
           <a:xfrm>
-            <a:off x="3355848" y="2926080"/>
-            <a:ext cx="2615184" cy="3017520"/>
+            <a:off x="3355848" y="2834640"/>
+            <a:ext cx="2615184" cy="3566160"/>
           </a:xfrm>
           <a:prstGeom prst="rect">
             <a:avLst/>
@@ -6408,13 +8980,13 @@
       </p:sp>
       <p:sp>
         <p:nvSpPr>
-          <p:cNvPr id="16" name="Rectangle 15"/>
-          <p:cNvSpPr/>
-          <p:nvPr/>
-        </p:nvSpPr>
-        <p:spPr>
-          <a:xfrm>
-            <a:off x="6217920" y="2468880"/>
+          <p:cNvPr id="29" name="Rectangle 28"/>
+          <p:cNvSpPr/>
+          <p:nvPr/>
+        </p:nvSpPr>
+        <p:spPr>
+          <a:xfrm>
+            <a:off x="6217920" y="2377440"/>
             <a:ext cx="2834640" cy="384048"/>
           </a:xfrm>
           <a:prstGeom prst="rect">
@@ -6451,13 +9023,13 @@
       </p:sp>
       <p:sp>
         <p:nvSpPr>
-          <p:cNvPr id="17" name="TextBox 16"/>
+          <p:cNvPr id="30" name="TextBox 29"/>
           <p:cNvSpPr txBox="1"/>
           <p:nvPr/>
         </p:nvSpPr>
         <p:spPr>
           <a:xfrm>
-            <a:off x="6309360" y="2487168"/>
+            <a:off x="6309360" y="2395728"/>
             <a:ext cx="2651760" cy="347472"/>
           </a:xfrm>
           <a:prstGeom prst="rect">
@@ -6485,14 +9057,14 @@
       </p:sp>
       <p:sp>
         <p:nvSpPr>
-          <p:cNvPr id="18" name="Rectangle 17"/>
-          <p:cNvSpPr/>
-          <p:nvPr/>
-        </p:nvSpPr>
-        <p:spPr>
-          <a:xfrm>
-            <a:off x="6217920" y="2852928"/>
-            <a:ext cx="2834640" cy="3182112"/>
+          <p:cNvPr id="31" name="Rectangle 30"/>
+          <p:cNvSpPr/>
+          <p:nvPr/>
+        </p:nvSpPr>
+        <p:spPr>
+          <a:xfrm>
+            <a:off x="6217920" y="2761488"/>
+            <a:ext cx="2834640" cy="3730752"/>
           </a:xfrm>
           <a:prstGeom prst="rect">
             <a:avLst/>
@@ -6530,14 +9102,14 @@
       </p:sp>
       <p:sp>
         <p:nvSpPr>
-          <p:cNvPr id="19" name="TextBox 18"/>
+          <p:cNvPr id="32" name="TextBox 31"/>
           <p:cNvSpPr txBox="1"/>
           <p:nvPr/>
         </p:nvSpPr>
         <p:spPr>
           <a:xfrm>
-            <a:off x="6327648" y="2926080"/>
-            <a:ext cx="2615184" cy="3017520"/>
+            <a:off x="6327648" y="2834640"/>
+            <a:ext cx="2615184" cy="3566160"/>
           </a:xfrm>
           <a:prstGeom prst="rect">
             <a:avLst/>
@@ -6567,13 +9139,13 @@
       </p:sp>
       <p:sp>
         <p:nvSpPr>
-          <p:cNvPr id="20" name="Rectangle 19"/>
-          <p:cNvSpPr/>
-          <p:nvPr/>
-        </p:nvSpPr>
-        <p:spPr>
-          <a:xfrm>
-            <a:off x="9189720" y="2468880"/>
+          <p:cNvPr id="33" name="Rectangle 32"/>
+          <p:cNvSpPr/>
+          <p:nvPr/>
+        </p:nvSpPr>
+        <p:spPr>
+          <a:xfrm>
+            <a:off x="9189720" y="2377440"/>
             <a:ext cx="2834640" cy="384048"/>
           </a:xfrm>
           <a:prstGeom prst="rect">
@@ -6610,13 +9182,13 @@
       </p:sp>
       <p:sp>
         <p:nvSpPr>
-          <p:cNvPr id="21" name="TextBox 20"/>
+          <p:cNvPr id="34" name="TextBox 33"/>
           <p:cNvSpPr txBox="1"/>
           <p:nvPr/>
         </p:nvSpPr>
         <p:spPr>
           <a:xfrm>
-            <a:off x="9281160" y="2487168"/>
+            <a:off x="9281160" y="2395728"/>
             <a:ext cx="2651760" cy="347472"/>
           </a:xfrm>
           <a:prstGeom prst="rect">
@@ -6644,14 +9216,14 @@
       </p:sp>
       <p:sp>
         <p:nvSpPr>
-          <p:cNvPr id="22" name="Rectangle 21"/>
-          <p:cNvSpPr/>
-          <p:nvPr/>
-        </p:nvSpPr>
-        <p:spPr>
-          <a:xfrm>
-            <a:off x="9189720" y="2852928"/>
-            <a:ext cx="2834640" cy="3182112"/>
+          <p:cNvPr id="35" name="Rectangle 34"/>
+          <p:cNvSpPr/>
+          <p:nvPr/>
+        </p:nvSpPr>
+        <p:spPr>
+          <a:xfrm>
+            <a:off x="9189720" y="2761488"/>
+            <a:ext cx="2834640" cy="3730752"/>
           </a:xfrm>
           <a:prstGeom prst="rect">
             <a:avLst/>
@@ -6689,14 +9261,14 @@
       </p:sp>
       <p:sp>
         <p:nvSpPr>
-          <p:cNvPr id="23" name="TextBox 22"/>
+          <p:cNvPr id="36" name="TextBox 35"/>
           <p:cNvSpPr txBox="1"/>
           <p:nvPr/>
         </p:nvSpPr>
         <p:spPr>
           <a:xfrm>
-            <a:off x="9299448" y="2926080"/>
-            <a:ext cx="2615184" cy="3017520"/>
+            <a:off x="9299448" y="2834640"/>
+            <a:ext cx="2615184" cy="3566160"/>
           </a:xfrm>
           <a:prstGeom prst="rect">
             <a:avLst/>
@@ -6982,7 +9554,7 @@
         <p:spPr>
           <a:xfrm>
             <a:off x="274320" y="1755648"/>
-            <a:ext cx="2834640" cy="4645152"/>
+            <a:ext cx="2834640" cy="3730752"/>
           </a:xfrm>
           <a:prstGeom prst="rect">
             <a:avLst/>
@@ -7027,7 +9599,7 @@
         <p:spPr>
           <a:xfrm>
             <a:off x="384048" y="1828800"/>
-            <a:ext cx="2615184" cy="4480560"/>
+            <a:ext cx="2615184" cy="3566160"/>
           </a:xfrm>
           <a:prstGeom prst="rect">
             <a:avLst/>
@@ -7142,7 +9714,7 @@
         <p:spPr>
           <a:xfrm>
             <a:off x="3246120" y="1755648"/>
-            <a:ext cx="2834640" cy="4645152"/>
+            <a:ext cx="2834640" cy="3730752"/>
           </a:xfrm>
           <a:prstGeom prst="rect">
             <a:avLst/>
@@ -7187,7 +9759,7 @@
         <p:spPr>
           <a:xfrm>
             <a:off x="3355848" y="1828800"/>
-            <a:ext cx="2615184" cy="4480560"/>
+            <a:ext cx="2615184" cy="3566160"/>
           </a:xfrm>
           <a:prstGeom prst="rect">
             <a:avLst/>
@@ -7302,7 +9874,7 @@
         <p:spPr>
           <a:xfrm>
             <a:off x="6217920" y="1755648"/>
-            <a:ext cx="2834640" cy="4645152"/>
+            <a:ext cx="2834640" cy="3730752"/>
           </a:xfrm>
           <a:prstGeom prst="rect">
             <a:avLst/>
@@ -7347,7 +9919,7 @@
         <p:spPr>
           <a:xfrm>
             <a:off x="6327648" y="1828800"/>
-            <a:ext cx="2615184" cy="4480560"/>
+            <a:ext cx="2615184" cy="3566160"/>
           </a:xfrm>
           <a:prstGeom prst="rect">
             <a:avLst/>
@@ -7462,7 +10034,7 @@
         <p:spPr>
           <a:xfrm>
             <a:off x="9189720" y="1755648"/>
-            <a:ext cx="2834640" cy="4645152"/>
+            <a:ext cx="2834640" cy="3730752"/>
           </a:xfrm>
           <a:prstGeom prst="rect">
             <a:avLst/>
@@ -7507,7 +10079,7 @@
         <p:spPr>
           <a:xfrm>
             <a:off x="9299448" y="1828800"/>
-            <a:ext cx="2615184" cy="4480560"/>
+            <a:ext cx="2615184" cy="3566160"/>
           </a:xfrm>
           <a:prstGeom prst="rect">
             <a:avLst/>
@@ -7531,6 +10103,1627 @@
 ●  Training user per ULP
 ●  Telegram bot aktif kirim laporan tiap pagi
 ●  Integrasi data Google Sheets tanpa migrasi data besar</a:t>
+            </a:r>
+          </a:p>
+        </p:txBody>
+      </p:sp>
+      <p:sp>
+        <p:nvSpPr>
+          <p:cNvPr id="22" name="Rectangle 21"/>
+          <p:cNvSpPr/>
+          <p:nvPr/>
+        </p:nvSpPr>
+        <p:spPr>
+          <a:xfrm>
+            <a:off x="274320" y="5440680"/>
+            <a:ext cx="11612880" cy="182880"/>
+          </a:xfrm>
+          <a:prstGeom prst="rect">
+            <a:avLst/>
+          </a:prstGeom>
+          <a:solidFill>
+            <a:srgbClr val="004D40"/>
+          </a:solidFill>
+          <a:ln>
+            <a:noFill/>
+          </a:ln>
+        </p:spPr>
+        <p:style>
+          <a:lnRef idx="1">
+            <a:schemeClr val="accent1"/>
+          </a:lnRef>
+          <a:fillRef idx="3">
+            <a:schemeClr val="accent1"/>
+          </a:fillRef>
+          <a:effectRef idx="2">
+            <a:schemeClr val="accent1"/>
+          </a:effectRef>
+          <a:fontRef idx="minor">
+            <a:schemeClr val="lt1"/>
+          </a:fontRef>
+        </p:style>
+        <p:txBody>
+          <a:bodyPr rtlCol="0" anchor="ctr"/>
+          <a:lstStyle/>
+          <a:p>
+            <a:pPr algn="ctr"/>
+          </a:p>
+        </p:txBody>
+      </p:sp>
+      <p:sp>
+        <p:nvSpPr>
+          <p:cNvPr id="23" name="TextBox 22"/>
+          <p:cNvSpPr txBox="1"/>
+          <p:nvPr/>
+        </p:nvSpPr>
+        <p:spPr>
+          <a:xfrm>
+            <a:off x="457200" y="5458968"/>
+            <a:ext cx="4572000" cy="164592"/>
+          </a:xfrm>
+          <a:prstGeom prst="rect">
+            <a:avLst/>
+          </a:prstGeom>
+          <a:noFill/>
+        </p:spPr>
+        <p:txBody>
+          <a:bodyPr wrap="square">
+            <a:spAutoFit/>
+          </a:bodyPr>
+          <a:lstStyle/>
+          <a:p>
+            <a:pPr algn="l"/>
+            <a:r>
+              <a:rPr sz="800" b="1" i="0">
+                <a:solidFill>
+                  <a:srgbClr val="FFFFFF"/>
+                </a:solidFill>
+              </a:rPr>
+              <a:t>ARSITEKTUR TEKNOLOGI</a:t>
+            </a:r>
+          </a:p>
+        </p:txBody>
+      </p:sp>
+      <p:sp>
+        <p:nvSpPr>
+          <p:cNvPr id="24" name="Rectangle 23"/>
+          <p:cNvSpPr/>
+          <p:nvPr/>
+        </p:nvSpPr>
+        <p:spPr>
+          <a:xfrm>
+            <a:off x="333756" y="5623560"/>
+            <a:ext cx="1691640" cy="1005840"/>
+          </a:xfrm>
+          <a:prstGeom prst="rect">
+            <a:avLst/>
+          </a:prstGeom>
+          <a:solidFill>
+            <a:srgbClr val="1D4E89"/>
+          </a:solidFill>
+          <a:ln w="12700">
+            <a:solidFill>
+              <a:srgbClr val="00897B"/>
+            </a:solidFill>
+          </a:ln>
+        </p:spPr>
+        <p:style>
+          <a:lnRef idx="1">
+            <a:schemeClr val="accent1"/>
+          </a:lnRef>
+          <a:fillRef idx="3">
+            <a:schemeClr val="accent1"/>
+          </a:fillRef>
+          <a:effectRef idx="2">
+            <a:schemeClr val="accent1"/>
+          </a:effectRef>
+          <a:fontRef idx="minor">
+            <a:schemeClr val="lt1"/>
+          </a:fontRef>
+        </p:style>
+        <p:txBody>
+          <a:bodyPr rtlCol="0" anchor="ctr"/>
+          <a:lstStyle/>
+          <a:p>
+            <a:pPr algn="ctr"/>
+          </a:p>
+        </p:txBody>
+      </p:sp>
+      <p:sp>
+        <p:nvSpPr>
+          <p:cNvPr id="25" name="TextBox 24"/>
+          <p:cNvSpPr txBox="1"/>
+          <p:nvPr/>
+        </p:nvSpPr>
+        <p:spPr>
+          <a:xfrm>
+            <a:off x="333756" y="5669280"/>
+            <a:ext cx="1691640" cy="457200"/>
+          </a:xfrm>
+          <a:prstGeom prst="rect">
+            <a:avLst/>
+          </a:prstGeom>
+          <a:noFill/>
+        </p:spPr>
+        <p:txBody>
+          <a:bodyPr wrap="square">
+            <a:spAutoFit/>
+          </a:bodyPr>
+          <a:lstStyle/>
+          <a:p>
+            <a:pPr algn="ctr"/>
+            <a:r>
+              <a:rPr sz="1100" b="1" i="0">
+                <a:solidFill>
+                  <a:srgbClr val="FFFFFF"/>
+                </a:solidFill>
+              </a:rPr>
+              <a:t>👤 Pengguna</a:t>
+            </a:r>
+          </a:p>
+        </p:txBody>
+      </p:sp>
+      <p:sp>
+        <p:nvSpPr>
+          <p:cNvPr id="26" name="TextBox 25"/>
+          <p:cNvSpPr txBox="1"/>
+          <p:nvPr/>
+        </p:nvSpPr>
+        <p:spPr>
+          <a:xfrm>
+            <a:off x="333756" y="6099048"/>
+            <a:ext cx="1691640" cy="384048"/>
+          </a:xfrm>
+          <a:prstGeom prst="rect">
+            <a:avLst/>
+          </a:prstGeom>
+          <a:noFill/>
+        </p:spPr>
+        <p:txBody>
+          <a:bodyPr wrap="square">
+            <a:spAutoFit/>
+          </a:bodyPr>
+          <a:lstStyle/>
+          <a:p>
+            <a:pPr algn="ctr"/>
+            <a:r>
+              <a:rPr sz="800" b="0" i="0">
+                <a:solidFill>
+                  <a:srgbClr val="B2DFDB"/>
+                </a:solidFill>
+              </a:rPr>
+              <a:t>Browser / HP
+di lapangan</a:t>
+            </a:r>
+          </a:p>
+        </p:txBody>
+      </p:sp>
+      <p:sp>
+        <p:nvSpPr>
+          <p:cNvPr id="27" name="Rectangle 26"/>
+          <p:cNvSpPr/>
+          <p:nvPr/>
+        </p:nvSpPr>
+        <p:spPr>
+          <a:xfrm>
+            <a:off x="2025396" y="6099048"/>
+            <a:ext cx="137160" cy="54864"/>
+          </a:xfrm>
+          <a:prstGeom prst="rect">
+            <a:avLst/>
+          </a:prstGeom>
+          <a:solidFill>
+            <a:srgbClr val="00897B"/>
+          </a:solidFill>
+          <a:ln>
+            <a:noFill/>
+          </a:ln>
+        </p:spPr>
+        <p:style>
+          <a:lnRef idx="1">
+            <a:schemeClr val="accent1"/>
+          </a:lnRef>
+          <a:fillRef idx="3">
+            <a:schemeClr val="accent1"/>
+          </a:fillRef>
+          <a:effectRef idx="2">
+            <a:schemeClr val="accent1"/>
+          </a:effectRef>
+          <a:fontRef idx="minor">
+            <a:schemeClr val="lt1"/>
+          </a:fontRef>
+        </p:style>
+        <p:txBody>
+          <a:bodyPr rtlCol="0" anchor="ctr"/>
+          <a:lstStyle/>
+          <a:p>
+            <a:pPr algn="ctr"/>
+          </a:p>
+        </p:txBody>
+      </p:sp>
+      <p:sp>
+        <p:nvSpPr>
+          <p:cNvPr id="28" name="Rectangle 27"/>
+          <p:cNvSpPr/>
+          <p:nvPr/>
+        </p:nvSpPr>
+        <p:spPr>
+          <a:xfrm>
+            <a:off x="2135124" y="6016752"/>
+            <a:ext cx="54864" cy="219456"/>
+          </a:xfrm>
+          <a:prstGeom prst="rect">
+            <a:avLst/>
+          </a:prstGeom>
+          <a:solidFill>
+            <a:srgbClr val="00897B"/>
+          </a:solidFill>
+          <a:ln>
+            <a:noFill/>
+          </a:ln>
+        </p:spPr>
+        <p:style>
+          <a:lnRef idx="1">
+            <a:schemeClr val="accent1"/>
+          </a:lnRef>
+          <a:fillRef idx="3">
+            <a:schemeClr val="accent1"/>
+          </a:fillRef>
+          <a:effectRef idx="2">
+            <a:schemeClr val="accent1"/>
+          </a:effectRef>
+          <a:fontRef idx="minor">
+            <a:schemeClr val="lt1"/>
+          </a:fontRef>
+        </p:style>
+        <p:txBody>
+          <a:bodyPr rtlCol="0" anchor="ctr"/>
+          <a:lstStyle/>
+          <a:p>
+            <a:pPr algn="ctr"/>
+          </a:p>
+        </p:txBody>
+      </p:sp>
+      <p:sp>
+        <p:nvSpPr>
+          <p:cNvPr id="29" name="Rectangle 28"/>
+          <p:cNvSpPr/>
+          <p:nvPr/>
+        </p:nvSpPr>
+        <p:spPr>
+          <a:xfrm>
+            <a:off x="2189988" y="6053328"/>
+            <a:ext cx="54864" cy="146304"/>
+          </a:xfrm>
+          <a:prstGeom prst="rect">
+            <a:avLst/>
+          </a:prstGeom>
+          <a:solidFill>
+            <a:srgbClr val="00897B"/>
+          </a:solidFill>
+          <a:ln>
+            <a:noFill/>
+          </a:ln>
+        </p:spPr>
+        <p:style>
+          <a:lnRef idx="1">
+            <a:schemeClr val="accent1"/>
+          </a:lnRef>
+          <a:fillRef idx="3">
+            <a:schemeClr val="accent1"/>
+          </a:fillRef>
+          <a:effectRef idx="2">
+            <a:schemeClr val="accent1"/>
+          </a:effectRef>
+          <a:fontRef idx="minor">
+            <a:schemeClr val="lt1"/>
+          </a:fontRef>
+        </p:style>
+        <p:txBody>
+          <a:bodyPr rtlCol="0" anchor="ctr"/>
+          <a:lstStyle/>
+          <a:p>
+            <a:pPr algn="ctr"/>
+          </a:p>
+        </p:txBody>
+      </p:sp>
+      <p:sp>
+        <p:nvSpPr>
+          <p:cNvPr id="30" name="Rectangle 29"/>
+          <p:cNvSpPr/>
+          <p:nvPr/>
+        </p:nvSpPr>
+        <p:spPr>
+          <a:xfrm>
+            <a:off x="2244852" y="6089904"/>
+            <a:ext cx="54864" cy="73152"/>
+          </a:xfrm>
+          <a:prstGeom prst="rect">
+            <a:avLst/>
+          </a:prstGeom>
+          <a:solidFill>
+            <a:srgbClr val="00897B"/>
+          </a:solidFill>
+          <a:ln>
+            <a:noFill/>
+          </a:ln>
+        </p:spPr>
+        <p:style>
+          <a:lnRef idx="1">
+            <a:schemeClr val="accent1"/>
+          </a:lnRef>
+          <a:fillRef idx="3">
+            <a:schemeClr val="accent1"/>
+          </a:fillRef>
+          <a:effectRef idx="2">
+            <a:schemeClr val="accent1"/>
+          </a:effectRef>
+          <a:fontRef idx="minor">
+            <a:schemeClr val="lt1"/>
+          </a:fontRef>
+        </p:style>
+        <p:txBody>
+          <a:bodyPr rtlCol="0" anchor="ctr"/>
+          <a:lstStyle/>
+          <a:p>
+            <a:pPr algn="ctr"/>
+          </a:p>
+        </p:txBody>
+      </p:sp>
+      <p:sp>
+        <p:nvSpPr>
+          <p:cNvPr id="31" name="Rectangle 30"/>
+          <p:cNvSpPr/>
+          <p:nvPr/>
+        </p:nvSpPr>
+        <p:spPr>
+          <a:xfrm>
+            <a:off x="2299716" y="5623560"/>
+            <a:ext cx="1691640" cy="1005840"/>
+          </a:xfrm>
+          <a:prstGeom prst="rect">
+            <a:avLst/>
+          </a:prstGeom>
+          <a:solidFill>
+            <a:srgbClr val="004D40"/>
+          </a:solidFill>
+          <a:ln w="12700">
+            <a:solidFill>
+              <a:srgbClr val="00897B"/>
+            </a:solidFill>
+          </a:ln>
+        </p:spPr>
+        <p:style>
+          <a:lnRef idx="1">
+            <a:schemeClr val="accent1"/>
+          </a:lnRef>
+          <a:fillRef idx="3">
+            <a:schemeClr val="accent1"/>
+          </a:fillRef>
+          <a:effectRef idx="2">
+            <a:schemeClr val="accent1"/>
+          </a:effectRef>
+          <a:fontRef idx="minor">
+            <a:schemeClr val="lt1"/>
+          </a:fontRef>
+        </p:style>
+        <p:txBody>
+          <a:bodyPr rtlCol="0" anchor="ctr"/>
+          <a:lstStyle/>
+          <a:p>
+            <a:pPr algn="ctr"/>
+          </a:p>
+        </p:txBody>
+      </p:sp>
+      <p:sp>
+        <p:nvSpPr>
+          <p:cNvPr id="32" name="TextBox 31"/>
+          <p:cNvSpPr txBox="1"/>
+          <p:nvPr/>
+        </p:nvSpPr>
+        <p:spPr>
+          <a:xfrm>
+            <a:off x="2299716" y="5669280"/>
+            <a:ext cx="1691640" cy="457200"/>
+          </a:xfrm>
+          <a:prstGeom prst="rect">
+            <a:avLst/>
+          </a:prstGeom>
+          <a:noFill/>
+        </p:spPr>
+        <p:txBody>
+          <a:bodyPr wrap="square">
+            <a:spAutoFit/>
+          </a:bodyPr>
+          <a:lstStyle/>
+          <a:p>
+            <a:pPr algn="ctr"/>
+            <a:r>
+              <a:rPr sz="1100" b="1" i="0">
+                <a:solidFill>
+                  <a:srgbClr val="FFFFFF"/>
+                </a:solidFill>
+              </a:rPr>
+              <a:t>⚡ Next.js 16</a:t>
+            </a:r>
+          </a:p>
+        </p:txBody>
+      </p:sp>
+      <p:sp>
+        <p:nvSpPr>
+          <p:cNvPr id="33" name="TextBox 32"/>
+          <p:cNvSpPr txBox="1"/>
+          <p:nvPr/>
+        </p:nvSpPr>
+        <p:spPr>
+          <a:xfrm>
+            <a:off x="2299716" y="6099048"/>
+            <a:ext cx="1691640" cy="384048"/>
+          </a:xfrm>
+          <a:prstGeom prst="rect">
+            <a:avLst/>
+          </a:prstGeom>
+          <a:noFill/>
+        </p:spPr>
+        <p:txBody>
+          <a:bodyPr wrap="square">
+            <a:spAutoFit/>
+          </a:bodyPr>
+          <a:lstStyle/>
+          <a:p>
+            <a:pPr algn="ctr"/>
+            <a:r>
+              <a:rPr sz="800" b="0" i="0">
+                <a:solidFill>
+                  <a:srgbClr val="B2DFDB"/>
+                </a:solidFill>
+              </a:rPr>
+              <a:t>Web App
+App Router</a:t>
+            </a:r>
+          </a:p>
+        </p:txBody>
+      </p:sp>
+      <p:sp>
+        <p:nvSpPr>
+          <p:cNvPr id="34" name="Rectangle 33"/>
+          <p:cNvSpPr/>
+          <p:nvPr/>
+        </p:nvSpPr>
+        <p:spPr>
+          <a:xfrm>
+            <a:off x="3991356" y="6099048"/>
+            <a:ext cx="137160" cy="54864"/>
+          </a:xfrm>
+          <a:prstGeom prst="rect">
+            <a:avLst/>
+          </a:prstGeom>
+          <a:solidFill>
+            <a:srgbClr val="00897B"/>
+          </a:solidFill>
+          <a:ln>
+            <a:noFill/>
+          </a:ln>
+        </p:spPr>
+        <p:style>
+          <a:lnRef idx="1">
+            <a:schemeClr val="accent1"/>
+          </a:lnRef>
+          <a:fillRef idx="3">
+            <a:schemeClr val="accent1"/>
+          </a:fillRef>
+          <a:effectRef idx="2">
+            <a:schemeClr val="accent1"/>
+          </a:effectRef>
+          <a:fontRef idx="minor">
+            <a:schemeClr val="lt1"/>
+          </a:fontRef>
+        </p:style>
+        <p:txBody>
+          <a:bodyPr rtlCol="0" anchor="ctr"/>
+          <a:lstStyle/>
+          <a:p>
+            <a:pPr algn="ctr"/>
+          </a:p>
+        </p:txBody>
+      </p:sp>
+      <p:sp>
+        <p:nvSpPr>
+          <p:cNvPr id="35" name="Rectangle 34"/>
+          <p:cNvSpPr/>
+          <p:nvPr/>
+        </p:nvSpPr>
+        <p:spPr>
+          <a:xfrm>
+            <a:off x="4101084" y="6016752"/>
+            <a:ext cx="54864" cy="219456"/>
+          </a:xfrm>
+          <a:prstGeom prst="rect">
+            <a:avLst/>
+          </a:prstGeom>
+          <a:solidFill>
+            <a:srgbClr val="00897B"/>
+          </a:solidFill>
+          <a:ln>
+            <a:noFill/>
+          </a:ln>
+        </p:spPr>
+        <p:style>
+          <a:lnRef idx="1">
+            <a:schemeClr val="accent1"/>
+          </a:lnRef>
+          <a:fillRef idx="3">
+            <a:schemeClr val="accent1"/>
+          </a:fillRef>
+          <a:effectRef idx="2">
+            <a:schemeClr val="accent1"/>
+          </a:effectRef>
+          <a:fontRef idx="minor">
+            <a:schemeClr val="lt1"/>
+          </a:fontRef>
+        </p:style>
+        <p:txBody>
+          <a:bodyPr rtlCol="0" anchor="ctr"/>
+          <a:lstStyle/>
+          <a:p>
+            <a:pPr algn="ctr"/>
+          </a:p>
+        </p:txBody>
+      </p:sp>
+      <p:sp>
+        <p:nvSpPr>
+          <p:cNvPr id="36" name="Rectangle 35"/>
+          <p:cNvSpPr/>
+          <p:nvPr/>
+        </p:nvSpPr>
+        <p:spPr>
+          <a:xfrm>
+            <a:off x="4155948" y="6053328"/>
+            <a:ext cx="54864" cy="146304"/>
+          </a:xfrm>
+          <a:prstGeom prst="rect">
+            <a:avLst/>
+          </a:prstGeom>
+          <a:solidFill>
+            <a:srgbClr val="00897B"/>
+          </a:solidFill>
+          <a:ln>
+            <a:noFill/>
+          </a:ln>
+        </p:spPr>
+        <p:style>
+          <a:lnRef idx="1">
+            <a:schemeClr val="accent1"/>
+          </a:lnRef>
+          <a:fillRef idx="3">
+            <a:schemeClr val="accent1"/>
+          </a:fillRef>
+          <a:effectRef idx="2">
+            <a:schemeClr val="accent1"/>
+          </a:effectRef>
+          <a:fontRef idx="minor">
+            <a:schemeClr val="lt1"/>
+          </a:fontRef>
+        </p:style>
+        <p:txBody>
+          <a:bodyPr rtlCol="0" anchor="ctr"/>
+          <a:lstStyle/>
+          <a:p>
+            <a:pPr algn="ctr"/>
+          </a:p>
+        </p:txBody>
+      </p:sp>
+      <p:sp>
+        <p:nvSpPr>
+          <p:cNvPr id="37" name="Rectangle 36"/>
+          <p:cNvSpPr/>
+          <p:nvPr/>
+        </p:nvSpPr>
+        <p:spPr>
+          <a:xfrm>
+            <a:off x="4210812" y="6089904"/>
+            <a:ext cx="54864" cy="73152"/>
+          </a:xfrm>
+          <a:prstGeom prst="rect">
+            <a:avLst/>
+          </a:prstGeom>
+          <a:solidFill>
+            <a:srgbClr val="00897B"/>
+          </a:solidFill>
+          <a:ln>
+            <a:noFill/>
+          </a:ln>
+        </p:spPr>
+        <p:style>
+          <a:lnRef idx="1">
+            <a:schemeClr val="accent1"/>
+          </a:lnRef>
+          <a:fillRef idx="3">
+            <a:schemeClr val="accent1"/>
+          </a:fillRef>
+          <a:effectRef idx="2">
+            <a:schemeClr val="accent1"/>
+          </a:effectRef>
+          <a:fontRef idx="minor">
+            <a:schemeClr val="lt1"/>
+          </a:fontRef>
+        </p:style>
+        <p:txBody>
+          <a:bodyPr rtlCol="0" anchor="ctr"/>
+          <a:lstStyle/>
+          <a:p>
+            <a:pPr algn="ctr"/>
+          </a:p>
+        </p:txBody>
+      </p:sp>
+      <p:sp>
+        <p:nvSpPr>
+          <p:cNvPr id="38" name="Rectangle 37"/>
+          <p:cNvSpPr/>
+          <p:nvPr/>
+        </p:nvSpPr>
+        <p:spPr>
+          <a:xfrm>
+            <a:off x="4265676" y="5623560"/>
+            <a:ext cx="1691640" cy="1005840"/>
+          </a:xfrm>
+          <a:prstGeom prst="rect">
+            <a:avLst/>
+          </a:prstGeom>
+          <a:solidFill>
+            <a:srgbClr val="00897B"/>
+          </a:solidFill>
+          <a:ln w="12700">
+            <a:solidFill>
+              <a:srgbClr val="00897B"/>
+            </a:solidFill>
+          </a:ln>
+        </p:spPr>
+        <p:style>
+          <a:lnRef idx="1">
+            <a:schemeClr val="accent1"/>
+          </a:lnRef>
+          <a:fillRef idx="3">
+            <a:schemeClr val="accent1"/>
+          </a:fillRef>
+          <a:effectRef idx="2">
+            <a:schemeClr val="accent1"/>
+          </a:effectRef>
+          <a:fontRef idx="minor">
+            <a:schemeClr val="lt1"/>
+          </a:fontRef>
+        </p:style>
+        <p:txBody>
+          <a:bodyPr rtlCol="0" anchor="ctr"/>
+          <a:lstStyle/>
+          <a:p>
+            <a:pPr algn="ctr"/>
+          </a:p>
+        </p:txBody>
+      </p:sp>
+      <p:sp>
+        <p:nvSpPr>
+          <p:cNvPr id="39" name="TextBox 38"/>
+          <p:cNvSpPr txBox="1"/>
+          <p:nvPr/>
+        </p:nvSpPr>
+        <p:spPr>
+          <a:xfrm>
+            <a:off x="4265676" y="5669280"/>
+            <a:ext cx="1691640" cy="457200"/>
+          </a:xfrm>
+          <a:prstGeom prst="rect">
+            <a:avLst/>
+          </a:prstGeom>
+          <a:noFill/>
+        </p:spPr>
+        <p:txBody>
+          <a:bodyPr wrap="square">
+            <a:spAutoFit/>
+          </a:bodyPr>
+          <a:lstStyle/>
+          <a:p>
+            <a:pPr algn="ctr"/>
+            <a:r>
+              <a:rPr sz="1100" b="1" i="0">
+                <a:solidFill>
+                  <a:srgbClr val="FFFFFF"/>
+                </a:solidFill>
+              </a:rPr>
+              <a:t>🗄️ Supabase</a:t>
+            </a:r>
+          </a:p>
+        </p:txBody>
+      </p:sp>
+      <p:sp>
+        <p:nvSpPr>
+          <p:cNvPr id="40" name="TextBox 39"/>
+          <p:cNvSpPr txBox="1"/>
+          <p:nvPr/>
+        </p:nvSpPr>
+        <p:spPr>
+          <a:xfrm>
+            <a:off x="4265676" y="6099048"/>
+            <a:ext cx="1691640" cy="384048"/>
+          </a:xfrm>
+          <a:prstGeom prst="rect">
+            <a:avLst/>
+          </a:prstGeom>
+          <a:noFill/>
+        </p:spPr>
+        <p:txBody>
+          <a:bodyPr wrap="square">
+            <a:spAutoFit/>
+          </a:bodyPr>
+          <a:lstStyle/>
+          <a:p>
+            <a:pPr algn="ctr"/>
+            <a:r>
+              <a:rPr sz="800" b="0" i="0">
+                <a:solidFill>
+                  <a:srgbClr val="B2DFDB"/>
+                </a:solidFill>
+              </a:rPr>
+              <a:t>Database
++ Auth Cloud</a:t>
+            </a:r>
+          </a:p>
+        </p:txBody>
+      </p:sp>
+      <p:sp>
+        <p:nvSpPr>
+          <p:cNvPr id="41" name="Rectangle 40"/>
+          <p:cNvSpPr/>
+          <p:nvPr/>
+        </p:nvSpPr>
+        <p:spPr>
+          <a:xfrm>
+            <a:off x="5957316" y="6099048"/>
+            <a:ext cx="137160" cy="54864"/>
+          </a:xfrm>
+          <a:prstGeom prst="rect">
+            <a:avLst/>
+          </a:prstGeom>
+          <a:solidFill>
+            <a:srgbClr val="00897B"/>
+          </a:solidFill>
+          <a:ln>
+            <a:noFill/>
+          </a:ln>
+        </p:spPr>
+        <p:style>
+          <a:lnRef idx="1">
+            <a:schemeClr val="accent1"/>
+          </a:lnRef>
+          <a:fillRef idx="3">
+            <a:schemeClr val="accent1"/>
+          </a:fillRef>
+          <a:effectRef idx="2">
+            <a:schemeClr val="accent1"/>
+          </a:effectRef>
+          <a:fontRef idx="minor">
+            <a:schemeClr val="lt1"/>
+          </a:fontRef>
+        </p:style>
+        <p:txBody>
+          <a:bodyPr rtlCol="0" anchor="ctr"/>
+          <a:lstStyle/>
+          <a:p>
+            <a:pPr algn="ctr"/>
+          </a:p>
+        </p:txBody>
+      </p:sp>
+      <p:sp>
+        <p:nvSpPr>
+          <p:cNvPr id="42" name="Rectangle 41"/>
+          <p:cNvSpPr/>
+          <p:nvPr/>
+        </p:nvSpPr>
+        <p:spPr>
+          <a:xfrm>
+            <a:off x="6067044" y="6016752"/>
+            <a:ext cx="54864" cy="219456"/>
+          </a:xfrm>
+          <a:prstGeom prst="rect">
+            <a:avLst/>
+          </a:prstGeom>
+          <a:solidFill>
+            <a:srgbClr val="00897B"/>
+          </a:solidFill>
+          <a:ln>
+            <a:noFill/>
+          </a:ln>
+        </p:spPr>
+        <p:style>
+          <a:lnRef idx="1">
+            <a:schemeClr val="accent1"/>
+          </a:lnRef>
+          <a:fillRef idx="3">
+            <a:schemeClr val="accent1"/>
+          </a:fillRef>
+          <a:effectRef idx="2">
+            <a:schemeClr val="accent1"/>
+          </a:effectRef>
+          <a:fontRef idx="minor">
+            <a:schemeClr val="lt1"/>
+          </a:fontRef>
+        </p:style>
+        <p:txBody>
+          <a:bodyPr rtlCol="0" anchor="ctr"/>
+          <a:lstStyle/>
+          <a:p>
+            <a:pPr algn="ctr"/>
+          </a:p>
+        </p:txBody>
+      </p:sp>
+      <p:sp>
+        <p:nvSpPr>
+          <p:cNvPr id="43" name="Rectangle 42"/>
+          <p:cNvSpPr/>
+          <p:nvPr/>
+        </p:nvSpPr>
+        <p:spPr>
+          <a:xfrm>
+            <a:off x="6121908" y="6053328"/>
+            <a:ext cx="54864" cy="146304"/>
+          </a:xfrm>
+          <a:prstGeom prst="rect">
+            <a:avLst/>
+          </a:prstGeom>
+          <a:solidFill>
+            <a:srgbClr val="00897B"/>
+          </a:solidFill>
+          <a:ln>
+            <a:noFill/>
+          </a:ln>
+        </p:spPr>
+        <p:style>
+          <a:lnRef idx="1">
+            <a:schemeClr val="accent1"/>
+          </a:lnRef>
+          <a:fillRef idx="3">
+            <a:schemeClr val="accent1"/>
+          </a:fillRef>
+          <a:effectRef idx="2">
+            <a:schemeClr val="accent1"/>
+          </a:effectRef>
+          <a:fontRef idx="minor">
+            <a:schemeClr val="lt1"/>
+          </a:fontRef>
+        </p:style>
+        <p:txBody>
+          <a:bodyPr rtlCol="0" anchor="ctr"/>
+          <a:lstStyle/>
+          <a:p>
+            <a:pPr algn="ctr"/>
+          </a:p>
+        </p:txBody>
+      </p:sp>
+      <p:sp>
+        <p:nvSpPr>
+          <p:cNvPr id="44" name="Rectangle 43"/>
+          <p:cNvSpPr/>
+          <p:nvPr/>
+        </p:nvSpPr>
+        <p:spPr>
+          <a:xfrm>
+            <a:off x="6176772" y="6089904"/>
+            <a:ext cx="54864" cy="73152"/>
+          </a:xfrm>
+          <a:prstGeom prst="rect">
+            <a:avLst/>
+          </a:prstGeom>
+          <a:solidFill>
+            <a:srgbClr val="00897B"/>
+          </a:solidFill>
+          <a:ln>
+            <a:noFill/>
+          </a:ln>
+        </p:spPr>
+        <p:style>
+          <a:lnRef idx="1">
+            <a:schemeClr val="accent1"/>
+          </a:lnRef>
+          <a:fillRef idx="3">
+            <a:schemeClr val="accent1"/>
+          </a:fillRef>
+          <a:effectRef idx="2">
+            <a:schemeClr val="accent1"/>
+          </a:effectRef>
+          <a:fontRef idx="minor">
+            <a:schemeClr val="lt1"/>
+          </a:fontRef>
+        </p:style>
+        <p:txBody>
+          <a:bodyPr rtlCol="0" anchor="ctr"/>
+          <a:lstStyle/>
+          <a:p>
+            <a:pPr algn="ctr"/>
+          </a:p>
+        </p:txBody>
+      </p:sp>
+      <p:sp>
+        <p:nvSpPr>
+          <p:cNvPr id="45" name="Rectangle 44"/>
+          <p:cNvSpPr/>
+          <p:nvPr/>
+        </p:nvSpPr>
+        <p:spPr>
+          <a:xfrm>
+            <a:off x="6231636" y="5623560"/>
+            <a:ext cx="1691640" cy="1005840"/>
+          </a:xfrm>
+          <a:prstGeom prst="rect">
+            <a:avLst/>
+          </a:prstGeom>
+          <a:solidFill>
+            <a:srgbClr val="1E6F2D"/>
+          </a:solidFill>
+          <a:ln w="12700">
+            <a:solidFill>
+              <a:srgbClr val="00897B"/>
+            </a:solidFill>
+          </a:ln>
+        </p:spPr>
+        <p:style>
+          <a:lnRef idx="1">
+            <a:schemeClr val="accent1"/>
+          </a:lnRef>
+          <a:fillRef idx="3">
+            <a:schemeClr val="accent1"/>
+          </a:fillRef>
+          <a:effectRef idx="2">
+            <a:schemeClr val="accent1"/>
+          </a:effectRef>
+          <a:fontRef idx="minor">
+            <a:schemeClr val="lt1"/>
+          </a:fontRef>
+        </p:style>
+        <p:txBody>
+          <a:bodyPr rtlCol="0" anchor="ctr"/>
+          <a:lstStyle/>
+          <a:p>
+            <a:pPr algn="ctr"/>
+          </a:p>
+        </p:txBody>
+      </p:sp>
+      <p:sp>
+        <p:nvSpPr>
+          <p:cNvPr id="46" name="TextBox 45"/>
+          <p:cNvSpPr txBox="1"/>
+          <p:nvPr/>
+        </p:nvSpPr>
+        <p:spPr>
+          <a:xfrm>
+            <a:off x="6231636" y="5669280"/>
+            <a:ext cx="1691640" cy="457200"/>
+          </a:xfrm>
+          <a:prstGeom prst="rect">
+            <a:avLst/>
+          </a:prstGeom>
+          <a:noFill/>
+        </p:spPr>
+        <p:txBody>
+          <a:bodyPr wrap="square">
+            <a:spAutoFit/>
+          </a:bodyPr>
+          <a:lstStyle/>
+          <a:p>
+            <a:pPr algn="ctr"/>
+            <a:r>
+              <a:rPr sz="1100" b="1" i="0">
+                <a:solidFill>
+                  <a:srgbClr val="FFFFFF"/>
+                </a:solidFill>
+              </a:rPr>
+              <a:t>📊 Google Sheets</a:t>
+            </a:r>
+          </a:p>
+        </p:txBody>
+      </p:sp>
+      <p:sp>
+        <p:nvSpPr>
+          <p:cNvPr id="47" name="TextBox 46"/>
+          <p:cNvSpPr txBox="1"/>
+          <p:nvPr/>
+        </p:nvSpPr>
+        <p:spPr>
+          <a:xfrm>
+            <a:off x="6231636" y="6099048"/>
+            <a:ext cx="1691640" cy="384048"/>
+          </a:xfrm>
+          <a:prstGeom prst="rect">
+            <a:avLst/>
+          </a:prstGeom>
+          <a:noFill/>
+        </p:spPr>
+        <p:txBody>
+          <a:bodyPr wrap="square">
+            <a:spAutoFit/>
+          </a:bodyPr>
+          <a:lstStyle/>
+          <a:p>
+            <a:pPr algn="ctr"/>
+            <a:r>
+              <a:rPr sz="800" b="0" i="0">
+                <a:solidFill>
+                  <a:srgbClr val="B2DFDB"/>
+                </a:solidFill>
+              </a:rPr>
+              <a:t>Data Gangguan
+Existing</a:t>
+            </a:r>
+          </a:p>
+        </p:txBody>
+      </p:sp>
+      <p:sp>
+        <p:nvSpPr>
+          <p:cNvPr id="48" name="Rectangle 47"/>
+          <p:cNvSpPr/>
+          <p:nvPr/>
+        </p:nvSpPr>
+        <p:spPr>
+          <a:xfrm>
+            <a:off x="7923276" y="6099048"/>
+            <a:ext cx="137160" cy="54864"/>
+          </a:xfrm>
+          <a:prstGeom prst="rect">
+            <a:avLst/>
+          </a:prstGeom>
+          <a:solidFill>
+            <a:srgbClr val="00897B"/>
+          </a:solidFill>
+          <a:ln>
+            <a:noFill/>
+          </a:ln>
+        </p:spPr>
+        <p:style>
+          <a:lnRef idx="1">
+            <a:schemeClr val="accent1"/>
+          </a:lnRef>
+          <a:fillRef idx="3">
+            <a:schemeClr val="accent1"/>
+          </a:fillRef>
+          <a:effectRef idx="2">
+            <a:schemeClr val="accent1"/>
+          </a:effectRef>
+          <a:fontRef idx="minor">
+            <a:schemeClr val="lt1"/>
+          </a:fontRef>
+        </p:style>
+        <p:txBody>
+          <a:bodyPr rtlCol="0" anchor="ctr"/>
+          <a:lstStyle/>
+          <a:p>
+            <a:pPr algn="ctr"/>
+          </a:p>
+        </p:txBody>
+      </p:sp>
+      <p:sp>
+        <p:nvSpPr>
+          <p:cNvPr id="49" name="Rectangle 48"/>
+          <p:cNvSpPr/>
+          <p:nvPr/>
+        </p:nvSpPr>
+        <p:spPr>
+          <a:xfrm>
+            <a:off x="8033004" y="6016752"/>
+            <a:ext cx="54864" cy="219456"/>
+          </a:xfrm>
+          <a:prstGeom prst="rect">
+            <a:avLst/>
+          </a:prstGeom>
+          <a:solidFill>
+            <a:srgbClr val="00897B"/>
+          </a:solidFill>
+          <a:ln>
+            <a:noFill/>
+          </a:ln>
+        </p:spPr>
+        <p:style>
+          <a:lnRef idx="1">
+            <a:schemeClr val="accent1"/>
+          </a:lnRef>
+          <a:fillRef idx="3">
+            <a:schemeClr val="accent1"/>
+          </a:fillRef>
+          <a:effectRef idx="2">
+            <a:schemeClr val="accent1"/>
+          </a:effectRef>
+          <a:fontRef idx="minor">
+            <a:schemeClr val="lt1"/>
+          </a:fontRef>
+        </p:style>
+        <p:txBody>
+          <a:bodyPr rtlCol="0" anchor="ctr"/>
+          <a:lstStyle/>
+          <a:p>
+            <a:pPr algn="ctr"/>
+          </a:p>
+        </p:txBody>
+      </p:sp>
+      <p:sp>
+        <p:nvSpPr>
+          <p:cNvPr id="50" name="Rectangle 49"/>
+          <p:cNvSpPr/>
+          <p:nvPr/>
+        </p:nvSpPr>
+        <p:spPr>
+          <a:xfrm>
+            <a:off x="8087868" y="6053328"/>
+            <a:ext cx="54864" cy="146304"/>
+          </a:xfrm>
+          <a:prstGeom prst="rect">
+            <a:avLst/>
+          </a:prstGeom>
+          <a:solidFill>
+            <a:srgbClr val="00897B"/>
+          </a:solidFill>
+          <a:ln>
+            <a:noFill/>
+          </a:ln>
+        </p:spPr>
+        <p:style>
+          <a:lnRef idx="1">
+            <a:schemeClr val="accent1"/>
+          </a:lnRef>
+          <a:fillRef idx="3">
+            <a:schemeClr val="accent1"/>
+          </a:fillRef>
+          <a:effectRef idx="2">
+            <a:schemeClr val="accent1"/>
+          </a:effectRef>
+          <a:fontRef idx="minor">
+            <a:schemeClr val="lt1"/>
+          </a:fontRef>
+        </p:style>
+        <p:txBody>
+          <a:bodyPr rtlCol="0" anchor="ctr"/>
+          <a:lstStyle/>
+          <a:p>
+            <a:pPr algn="ctr"/>
+          </a:p>
+        </p:txBody>
+      </p:sp>
+      <p:sp>
+        <p:nvSpPr>
+          <p:cNvPr id="51" name="Rectangle 50"/>
+          <p:cNvSpPr/>
+          <p:nvPr/>
+        </p:nvSpPr>
+        <p:spPr>
+          <a:xfrm>
+            <a:off x="8142732" y="6089904"/>
+            <a:ext cx="54864" cy="73152"/>
+          </a:xfrm>
+          <a:prstGeom prst="rect">
+            <a:avLst/>
+          </a:prstGeom>
+          <a:solidFill>
+            <a:srgbClr val="00897B"/>
+          </a:solidFill>
+          <a:ln>
+            <a:noFill/>
+          </a:ln>
+        </p:spPr>
+        <p:style>
+          <a:lnRef idx="1">
+            <a:schemeClr val="accent1"/>
+          </a:lnRef>
+          <a:fillRef idx="3">
+            <a:schemeClr val="accent1"/>
+          </a:fillRef>
+          <a:effectRef idx="2">
+            <a:schemeClr val="accent1"/>
+          </a:effectRef>
+          <a:fontRef idx="minor">
+            <a:schemeClr val="lt1"/>
+          </a:fontRef>
+        </p:style>
+        <p:txBody>
+          <a:bodyPr rtlCol="0" anchor="ctr"/>
+          <a:lstStyle/>
+          <a:p>
+            <a:pPr algn="ctr"/>
+          </a:p>
+        </p:txBody>
+      </p:sp>
+      <p:sp>
+        <p:nvSpPr>
+          <p:cNvPr id="52" name="Rectangle 51"/>
+          <p:cNvSpPr/>
+          <p:nvPr/>
+        </p:nvSpPr>
+        <p:spPr>
+          <a:xfrm>
+            <a:off x="8197596" y="5623560"/>
+            <a:ext cx="1691640" cy="1005840"/>
+          </a:xfrm>
+          <a:prstGeom prst="rect">
+            <a:avLst/>
+          </a:prstGeom>
+          <a:solidFill>
+            <a:srgbClr val="1B2631"/>
+          </a:solidFill>
+          <a:ln w="12700">
+            <a:solidFill>
+              <a:srgbClr val="00897B"/>
+            </a:solidFill>
+          </a:ln>
+        </p:spPr>
+        <p:style>
+          <a:lnRef idx="1">
+            <a:schemeClr val="accent1"/>
+          </a:lnRef>
+          <a:fillRef idx="3">
+            <a:schemeClr val="accent1"/>
+          </a:fillRef>
+          <a:effectRef idx="2">
+            <a:schemeClr val="accent1"/>
+          </a:effectRef>
+          <a:fontRef idx="minor">
+            <a:schemeClr val="lt1"/>
+          </a:fontRef>
+        </p:style>
+        <p:txBody>
+          <a:bodyPr rtlCol="0" anchor="ctr"/>
+          <a:lstStyle/>
+          <a:p>
+            <a:pPr algn="ctr"/>
+          </a:p>
+        </p:txBody>
+      </p:sp>
+      <p:sp>
+        <p:nvSpPr>
+          <p:cNvPr id="53" name="TextBox 52"/>
+          <p:cNvSpPr txBox="1"/>
+          <p:nvPr/>
+        </p:nvSpPr>
+        <p:spPr>
+          <a:xfrm>
+            <a:off x="8197596" y="5669280"/>
+            <a:ext cx="1691640" cy="457200"/>
+          </a:xfrm>
+          <a:prstGeom prst="rect">
+            <a:avLst/>
+          </a:prstGeom>
+          <a:noFill/>
+        </p:spPr>
+        <p:txBody>
+          <a:bodyPr wrap="square">
+            <a:spAutoFit/>
+          </a:bodyPr>
+          <a:lstStyle/>
+          <a:p>
+            <a:pPr algn="ctr"/>
+            <a:r>
+              <a:rPr sz="1100" b="1" i="0">
+                <a:solidFill>
+                  <a:srgbClr val="FFFFFF"/>
+                </a:solidFill>
+              </a:rPr>
+              <a:t>☁️ Vercel</a:t>
+            </a:r>
+          </a:p>
+        </p:txBody>
+      </p:sp>
+      <p:sp>
+        <p:nvSpPr>
+          <p:cNvPr id="54" name="TextBox 53"/>
+          <p:cNvSpPr txBox="1"/>
+          <p:nvPr/>
+        </p:nvSpPr>
+        <p:spPr>
+          <a:xfrm>
+            <a:off x="8197596" y="6099048"/>
+            <a:ext cx="1691640" cy="384048"/>
+          </a:xfrm>
+          <a:prstGeom prst="rect">
+            <a:avLst/>
+          </a:prstGeom>
+          <a:noFill/>
+        </p:spPr>
+        <p:txBody>
+          <a:bodyPr wrap="square">
+            <a:spAutoFit/>
+          </a:bodyPr>
+          <a:lstStyle/>
+          <a:p>
+            <a:pPr algn="ctr"/>
+            <a:r>
+              <a:rPr sz="800" b="0" i="0">
+                <a:solidFill>
+                  <a:srgbClr val="B2DFDB"/>
+                </a:solidFill>
+              </a:rPr>
+              <a:t>Hosting
+Cron Jobs</a:t>
+            </a:r>
+          </a:p>
+        </p:txBody>
+      </p:sp>
+      <p:sp>
+        <p:nvSpPr>
+          <p:cNvPr id="55" name="Rectangle 54"/>
+          <p:cNvSpPr/>
+          <p:nvPr/>
+        </p:nvSpPr>
+        <p:spPr>
+          <a:xfrm>
+            <a:off x="9889236" y="6099048"/>
+            <a:ext cx="137160" cy="54864"/>
+          </a:xfrm>
+          <a:prstGeom prst="rect">
+            <a:avLst/>
+          </a:prstGeom>
+          <a:solidFill>
+            <a:srgbClr val="00897B"/>
+          </a:solidFill>
+          <a:ln>
+            <a:noFill/>
+          </a:ln>
+        </p:spPr>
+        <p:style>
+          <a:lnRef idx="1">
+            <a:schemeClr val="accent1"/>
+          </a:lnRef>
+          <a:fillRef idx="3">
+            <a:schemeClr val="accent1"/>
+          </a:fillRef>
+          <a:effectRef idx="2">
+            <a:schemeClr val="accent1"/>
+          </a:effectRef>
+          <a:fontRef idx="minor">
+            <a:schemeClr val="lt1"/>
+          </a:fontRef>
+        </p:style>
+        <p:txBody>
+          <a:bodyPr rtlCol="0" anchor="ctr"/>
+          <a:lstStyle/>
+          <a:p>
+            <a:pPr algn="ctr"/>
+          </a:p>
+        </p:txBody>
+      </p:sp>
+      <p:sp>
+        <p:nvSpPr>
+          <p:cNvPr id="56" name="Rectangle 55"/>
+          <p:cNvSpPr/>
+          <p:nvPr/>
+        </p:nvSpPr>
+        <p:spPr>
+          <a:xfrm>
+            <a:off x="9998964" y="6016752"/>
+            <a:ext cx="54864" cy="219456"/>
+          </a:xfrm>
+          <a:prstGeom prst="rect">
+            <a:avLst/>
+          </a:prstGeom>
+          <a:solidFill>
+            <a:srgbClr val="00897B"/>
+          </a:solidFill>
+          <a:ln>
+            <a:noFill/>
+          </a:ln>
+        </p:spPr>
+        <p:style>
+          <a:lnRef idx="1">
+            <a:schemeClr val="accent1"/>
+          </a:lnRef>
+          <a:fillRef idx="3">
+            <a:schemeClr val="accent1"/>
+          </a:fillRef>
+          <a:effectRef idx="2">
+            <a:schemeClr val="accent1"/>
+          </a:effectRef>
+          <a:fontRef idx="minor">
+            <a:schemeClr val="lt1"/>
+          </a:fontRef>
+        </p:style>
+        <p:txBody>
+          <a:bodyPr rtlCol="0" anchor="ctr"/>
+          <a:lstStyle/>
+          <a:p>
+            <a:pPr algn="ctr"/>
+          </a:p>
+        </p:txBody>
+      </p:sp>
+      <p:sp>
+        <p:nvSpPr>
+          <p:cNvPr id="57" name="Rectangle 56"/>
+          <p:cNvSpPr/>
+          <p:nvPr/>
+        </p:nvSpPr>
+        <p:spPr>
+          <a:xfrm>
+            <a:off x="10053828" y="6053328"/>
+            <a:ext cx="54864" cy="146304"/>
+          </a:xfrm>
+          <a:prstGeom prst="rect">
+            <a:avLst/>
+          </a:prstGeom>
+          <a:solidFill>
+            <a:srgbClr val="00897B"/>
+          </a:solidFill>
+          <a:ln>
+            <a:noFill/>
+          </a:ln>
+        </p:spPr>
+        <p:style>
+          <a:lnRef idx="1">
+            <a:schemeClr val="accent1"/>
+          </a:lnRef>
+          <a:fillRef idx="3">
+            <a:schemeClr val="accent1"/>
+          </a:fillRef>
+          <a:effectRef idx="2">
+            <a:schemeClr val="accent1"/>
+          </a:effectRef>
+          <a:fontRef idx="minor">
+            <a:schemeClr val="lt1"/>
+          </a:fontRef>
+        </p:style>
+        <p:txBody>
+          <a:bodyPr rtlCol="0" anchor="ctr"/>
+          <a:lstStyle/>
+          <a:p>
+            <a:pPr algn="ctr"/>
+          </a:p>
+        </p:txBody>
+      </p:sp>
+      <p:sp>
+        <p:nvSpPr>
+          <p:cNvPr id="58" name="Rectangle 57"/>
+          <p:cNvSpPr/>
+          <p:nvPr/>
+        </p:nvSpPr>
+        <p:spPr>
+          <a:xfrm>
+            <a:off x="10108692" y="6089904"/>
+            <a:ext cx="54864" cy="73152"/>
+          </a:xfrm>
+          <a:prstGeom prst="rect">
+            <a:avLst/>
+          </a:prstGeom>
+          <a:solidFill>
+            <a:srgbClr val="00897B"/>
+          </a:solidFill>
+          <a:ln>
+            <a:noFill/>
+          </a:ln>
+        </p:spPr>
+        <p:style>
+          <a:lnRef idx="1">
+            <a:schemeClr val="accent1"/>
+          </a:lnRef>
+          <a:fillRef idx="3">
+            <a:schemeClr val="accent1"/>
+          </a:fillRef>
+          <a:effectRef idx="2">
+            <a:schemeClr val="accent1"/>
+          </a:effectRef>
+          <a:fontRef idx="minor">
+            <a:schemeClr val="lt1"/>
+          </a:fontRef>
+        </p:style>
+        <p:txBody>
+          <a:bodyPr rtlCol="0" anchor="ctr"/>
+          <a:lstStyle/>
+          <a:p>
+            <a:pPr algn="ctr"/>
+          </a:p>
+        </p:txBody>
+      </p:sp>
+      <p:sp>
+        <p:nvSpPr>
+          <p:cNvPr id="59" name="Rectangle 58"/>
+          <p:cNvSpPr/>
+          <p:nvPr/>
+        </p:nvSpPr>
+        <p:spPr>
+          <a:xfrm>
+            <a:off x="10163556" y="5623560"/>
+            <a:ext cx="1691640" cy="1005840"/>
+          </a:xfrm>
+          <a:prstGeom prst="rect">
+            <a:avLst/>
+          </a:prstGeom>
+          <a:solidFill>
+            <a:srgbClr val="0088CC"/>
+          </a:solidFill>
+          <a:ln w="12700">
+            <a:solidFill>
+              <a:srgbClr val="00897B"/>
+            </a:solidFill>
+          </a:ln>
+        </p:spPr>
+        <p:style>
+          <a:lnRef idx="1">
+            <a:schemeClr val="accent1"/>
+          </a:lnRef>
+          <a:fillRef idx="3">
+            <a:schemeClr val="accent1"/>
+          </a:fillRef>
+          <a:effectRef idx="2">
+            <a:schemeClr val="accent1"/>
+          </a:effectRef>
+          <a:fontRef idx="minor">
+            <a:schemeClr val="lt1"/>
+          </a:fontRef>
+        </p:style>
+        <p:txBody>
+          <a:bodyPr rtlCol="0" anchor="ctr"/>
+          <a:lstStyle/>
+          <a:p>
+            <a:pPr algn="ctr"/>
+          </a:p>
+        </p:txBody>
+      </p:sp>
+      <p:sp>
+        <p:nvSpPr>
+          <p:cNvPr id="60" name="TextBox 59"/>
+          <p:cNvSpPr txBox="1"/>
+          <p:nvPr/>
+        </p:nvSpPr>
+        <p:spPr>
+          <a:xfrm>
+            <a:off x="10163556" y="5669280"/>
+            <a:ext cx="1691640" cy="457200"/>
+          </a:xfrm>
+          <a:prstGeom prst="rect">
+            <a:avLst/>
+          </a:prstGeom>
+          <a:noFill/>
+        </p:spPr>
+        <p:txBody>
+          <a:bodyPr wrap="square">
+            <a:spAutoFit/>
+          </a:bodyPr>
+          <a:lstStyle/>
+          <a:p>
+            <a:pPr algn="ctr"/>
+            <a:r>
+              <a:rPr sz="1100" b="1" i="0">
+                <a:solidFill>
+                  <a:srgbClr val="FFFFFF"/>
+                </a:solidFill>
+              </a:rPr>
+              <a:t>📱 Telegram Bot</a:t>
+            </a:r>
+          </a:p>
+        </p:txBody>
+      </p:sp>
+      <p:sp>
+        <p:nvSpPr>
+          <p:cNvPr id="61" name="TextBox 60"/>
+          <p:cNvSpPr txBox="1"/>
+          <p:nvPr/>
+        </p:nvSpPr>
+        <p:spPr>
+          <a:xfrm>
+            <a:off x="10163556" y="6099048"/>
+            <a:ext cx="1691640" cy="384048"/>
+          </a:xfrm>
+          <a:prstGeom prst="rect">
+            <a:avLst/>
+          </a:prstGeom>
+          <a:noFill/>
+        </p:spPr>
+        <p:txBody>
+          <a:bodyPr wrap="square">
+            <a:spAutoFit/>
+          </a:bodyPr>
+          <a:lstStyle/>
+          <a:p>
+            <a:pPr algn="ctr"/>
+            <a:r>
+              <a:rPr sz="800" b="0" i="0">
+                <a:solidFill>
+                  <a:srgbClr val="B2DFDB"/>
+                </a:solidFill>
+              </a:rPr>
+              <a:t>Notifikasi
+Morning Brief</a:t>
             </a:r>
           </a:p>
         </p:txBody>
@@ -7801,8 +11994,8 @@
         </p:nvSpPr>
         <p:spPr>
           <a:xfrm>
-            <a:off x="5486400" y="2286000"/>
-            <a:ext cx="1216152" cy="3200400"/>
+            <a:off x="5486400" y="1371600"/>
+            <a:ext cx="1216152" cy="5029200"/>
           </a:xfrm>
           <a:prstGeom prst="rect">
             <a:avLst/>
@@ -7912,8 +12105,8 @@
         </p:nvSpPr>
         <p:spPr>
           <a:xfrm>
-            <a:off x="5486400" y="3474720"/>
-            <a:ext cx="1216152" cy="822960"/>
+            <a:off x="5486400" y="1920240"/>
+            <a:ext cx="1216152" cy="640080"/>
           </a:xfrm>
           <a:prstGeom prst="rect">
             <a:avLst/>
@@ -7940,7 +12133,349 @@
       </p:sp>
       <p:sp>
         <p:nvSpPr>
-          <p:cNvPr id="12" name="TextBox 11"/>
+          <p:cNvPr id="12" name="Rectangle 11"/>
+          <p:cNvSpPr/>
+          <p:nvPr/>
+        </p:nvSpPr>
+        <p:spPr>
+          <a:xfrm>
+            <a:off x="5559552" y="2697480"/>
+            <a:ext cx="1069848" cy="1005840"/>
+          </a:xfrm>
+          <a:prstGeom prst="rect">
+            <a:avLst/>
+          </a:prstGeom>
+          <a:solidFill>
+            <a:srgbClr val="004D40"/>
+          </a:solidFill>
+          <a:ln w="19050">
+            <a:solidFill>
+              <a:srgbClr val="FFD600"/>
+            </a:solidFill>
+          </a:ln>
+        </p:spPr>
+        <p:style>
+          <a:lnRef idx="1">
+            <a:schemeClr val="accent1"/>
+          </a:lnRef>
+          <a:fillRef idx="3">
+            <a:schemeClr val="accent1"/>
+          </a:fillRef>
+          <a:effectRef idx="2">
+            <a:schemeClr val="accent1"/>
+          </a:effectRef>
+          <a:fontRef idx="minor">
+            <a:schemeClr val="lt1"/>
+          </a:fontRef>
+        </p:style>
+        <p:txBody>
+          <a:bodyPr rtlCol="0" anchor="ctr"/>
+          <a:lstStyle/>
+          <a:p>
+            <a:pPr algn="ctr"/>
+          </a:p>
+        </p:txBody>
+      </p:sp>
+      <p:sp>
+        <p:nvSpPr>
+          <p:cNvPr id="13" name="TextBox 12"/>
+          <p:cNvSpPr txBox="1"/>
+          <p:nvPr/>
+        </p:nvSpPr>
+        <p:spPr>
+          <a:xfrm>
+            <a:off x="5559552" y="2770632"/>
+            <a:ext cx="1069848" cy="475488"/>
+          </a:xfrm>
+          <a:prstGeom prst="rect">
+            <a:avLst/>
+          </a:prstGeom>
+          <a:noFill/>
+        </p:spPr>
+        <p:txBody>
+          <a:bodyPr wrap="square">
+            <a:spAutoFit/>
+          </a:bodyPr>
+          <a:lstStyle/>
+          <a:p>
+            <a:pPr algn="ctr"/>
+            <a:r>
+              <a:rPr sz="1800" b="1" i="0">
+                <a:solidFill>
+                  <a:srgbClr val="FFD600"/>
+                </a:solidFill>
+              </a:rPr>
+              <a:t>0%</a:t>
+            </a:r>
+          </a:p>
+        </p:txBody>
+      </p:sp>
+      <p:sp>
+        <p:nvSpPr>
+          <p:cNvPr id="14" name="TextBox 13"/>
+          <p:cNvSpPr txBox="1"/>
+          <p:nvPr/>
+        </p:nvSpPr>
+        <p:spPr>
+          <a:xfrm>
+            <a:off x="5559552" y="3227832"/>
+            <a:ext cx="1069848" cy="420624"/>
+          </a:xfrm>
+          <a:prstGeom prst="rect">
+            <a:avLst/>
+          </a:prstGeom>
+          <a:noFill/>
+        </p:spPr>
+        <p:txBody>
+          <a:bodyPr wrap="square">
+            <a:spAutoFit/>
+          </a:bodyPr>
+          <a:lstStyle/>
+          <a:p>
+            <a:pPr algn="ctr"/>
+            <a:r>
+              <a:rPr sz="800" b="0" i="0">
+                <a:solidFill>
+                  <a:srgbClr val="B2DFDB"/>
+                </a:solidFill>
+              </a:rPr>
+              <a:t>Temuan
+hilang</a:t>
+            </a:r>
+          </a:p>
+        </p:txBody>
+      </p:sp>
+      <p:sp>
+        <p:nvSpPr>
+          <p:cNvPr id="15" name="Rectangle 14"/>
+          <p:cNvSpPr/>
+          <p:nvPr/>
+        </p:nvSpPr>
+        <p:spPr>
+          <a:xfrm>
+            <a:off x="5559552" y="3886200"/>
+            <a:ext cx="1069848" cy="1005840"/>
+          </a:xfrm>
+          <a:prstGeom prst="rect">
+            <a:avLst/>
+          </a:prstGeom>
+          <a:solidFill>
+            <a:srgbClr val="004D40"/>
+          </a:solidFill>
+          <a:ln w="19050">
+            <a:solidFill>
+              <a:srgbClr val="FFD600"/>
+            </a:solidFill>
+          </a:ln>
+        </p:spPr>
+        <p:style>
+          <a:lnRef idx="1">
+            <a:schemeClr val="accent1"/>
+          </a:lnRef>
+          <a:fillRef idx="3">
+            <a:schemeClr val="accent1"/>
+          </a:fillRef>
+          <a:effectRef idx="2">
+            <a:schemeClr val="accent1"/>
+          </a:effectRef>
+          <a:fontRef idx="minor">
+            <a:schemeClr val="lt1"/>
+          </a:fontRef>
+        </p:style>
+        <p:txBody>
+          <a:bodyPr rtlCol="0" anchor="ctr"/>
+          <a:lstStyle/>
+          <a:p>
+            <a:pPr algn="ctr"/>
+          </a:p>
+        </p:txBody>
+      </p:sp>
+      <p:sp>
+        <p:nvSpPr>
+          <p:cNvPr id="16" name="TextBox 15"/>
+          <p:cNvSpPr txBox="1"/>
+          <p:nvPr/>
+        </p:nvSpPr>
+        <p:spPr>
+          <a:xfrm>
+            <a:off x="5559552" y="3959352"/>
+            <a:ext cx="1069848" cy="475488"/>
+          </a:xfrm>
+          <a:prstGeom prst="rect">
+            <a:avLst/>
+          </a:prstGeom>
+          <a:noFill/>
+        </p:spPr>
+        <p:txBody>
+          <a:bodyPr wrap="square">
+            <a:spAutoFit/>
+          </a:bodyPr>
+          <a:lstStyle/>
+          <a:p>
+            <a:pPr algn="ctr"/>
+            <a:r>
+              <a:rPr sz="1800" b="1" i="0">
+                <a:solidFill>
+                  <a:srgbClr val="FFD600"/>
+                </a:solidFill>
+              </a:rPr>
+              <a:t>4x</a:t>
+            </a:r>
+          </a:p>
+        </p:txBody>
+      </p:sp>
+      <p:sp>
+        <p:nvSpPr>
+          <p:cNvPr id="17" name="TextBox 16"/>
+          <p:cNvSpPr txBox="1"/>
+          <p:nvPr/>
+        </p:nvSpPr>
+        <p:spPr>
+          <a:xfrm>
+            <a:off x="5559552" y="4416552"/>
+            <a:ext cx="1069848" cy="420624"/>
+          </a:xfrm>
+          <a:prstGeom prst="rect">
+            <a:avLst/>
+          </a:prstGeom>
+          <a:noFill/>
+        </p:spPr>
+        <p:txBody>
+          <a:bodyPr wrap="square">
+            <a:spAutoFit/>
+          </a:bodyPr>
+          <a:lstStyle/>
+          <a:p>
+            <a:pPr algn="ctr"/>
+            <a:r>
+              <a:rPr sz="800" b="0" i="0">
+                <a:solidFill>
+                  <a:srgbClr val="B2DFDB"/>
+                </a:solidFill>
+              </a:rPr>
+              <a:t>Lebih
+cepat</a:t>
+            </a:r>
+          </a:p>
+        </p:txBody>
+      </p:sp>
+      <p:sp>
+        <p:nvSpPr>
+          <p:cNvPr id="18" name="Rectangle 17"/>
+          <p:cNvSpPr/>
+          <p:nvPr/>
+        </p:nvSpPr>
+        <p:spPr>
+          <a:xfrm>
+            <a:off x="5559552" y="5074920"/>
+            <a:ext cx="1069848" cy="1005840"/>
+          </a:xfrm>
+          <a:prstGeom prst="rect">
+            <a:avLst/>
+          </a:prstGeom>
+          <a:solidFill>
+            <a:srgbClr val="004D40"/>
+          </a:solidFill>
+          <a:ln w="19050">
+            <a:solidFill>
+              <a:srgbClr val="FFD600"/>
+            </a:solidFill>
+          </a:ln>
+        </p:spPr>
+        <p:style>
+          <a:lnRef idx="1">
+            <a:schemeClr val="accent1"/>
+          </a:lnRef>
+          <a:fillRef idx="3">
+            <a:schemeClr val="accent1"/>
+          </a:fillRef>
+          <a:effectRef idx="2">
+            <a:schemeClr val="accent1"/>
+          </a:effectRef>
+          <a:fontRef idx="minor">
+            <a:schemeClr val="lt1"/>
+          </a:fontRef>
+        </p:style>
+        <p:txBody>
+          <a:bodyPr rtlCol="0" anchor="ctr"/>
+          <a:lstStyle/>
+          <a:p>
+            <a:pPr algn="ctr"/>
+          </a:p>
+        </p:txBody>
+      </p:sp>
+      <p:sp>
+        <p:nvSpPr>
+          <p:cNvPr id="19" name="TextBox 18"/>
+          <p:cNvSpPr txBox="1"/>
+          <p:nvPr/>
+        </p:nvSpPr>
+        <p:spPr>
+          <a:xfrm>
+            <a:off x="5559552" y="5148072"/>
+            <a:ext cx="1069848" cy="475488"/>
+          </a:xfrm>
+          <a:prstGeom prst="rect">
+            <a:avLst/>
+          </a:prstGeom>
+          <a:noFill/>
+        </p:spPr>
+        <p:txBody>
+          <a:bodyPr wrap="square">
+            <a:spAutoFit/>
+          </a:bodyPr>
+          <a:lstStyle/>
+          <a:p>
+            <a:pPr algn="ctr"/>
+            <a:r>
+              <a:rPr sz="1800" b="1" i="0">
+                <a:solidFill>
+                  <a:srgbClr val="FFD600"/>
+                </a:solidFill>
+              </a:rPr>
+              <a:t>24/7</a:t>
+            </a:r>
+          </a:p>
+        </p:txBody>
+      </p:sp>
+      <p:sp>
+        <p:nvSpPr>
+          <p:cNvPr id="20" name="TextBox 19"/>
+          <p:cNvSpPr txBox="1"/>
+          <p:nvPr/>
+        </p:nvSpPr>
+        <p:spPr>
+          <a:xfrm>
+            <a:off x="5559552" y="5605272"/>
+            <a:ext cx="1069848" cy="420624"/>
+          </a:xfrm>
+          <a:prstGeom prst="rect">
+            <a:avLst/>
+          </a:prstGeom>
+          <a:noFill/>
+        </p:spPr>
+        <p:txBody>
+          <a:bodyPr wrap="square">
+            <a:spAutoFit/>
+          </a:bodyPr>
+          <a:lstStyle/>
+          <a:p>
+            <a:pPr algn="ctr"/>
+            <a:r>
+              <a:rPr sz="800" b="0" i="0">
+                <a:solidFill>
+                  <a:srgbClr val="B2DFDB"/>
+                </a:solidFill>
+              </a:rPr>
+              <a:t>Monitor
+otomatis</a:t>
+            </a:r>
+          </a:p>
+        </p:txBody>
+      </p:sp>
+      <p:sp>
+        <p:nvSpPr>
+          <p:cNvPr id="21" name="TextBox 20"/>
           <p:cNvSpPr txBox="1"/>
           <p:nvPr/>
         </p:nvSpPr>
@@ -7981,7 +12516,7 @@
       </p:sp>
       <p:sp>
         <p:nvSpPr>
-          <p:cNvPr id="13" name="TextBox 12"/>
+          <p:cNvPr id="22" name="TextBox 21"/>
           <p:cNvSpPr txBox="1"/>
           <p:nvPr/>
         </p:nvSpPr>
@@ -8201,7 +12736,7 @@
         <p:spPr>
           <a:xfrm>
             <a:off x="274320" y="1371600"/>
-            <a:ext cx="2743200" cy="1463040"/>
+            <a:ext cx="2743200" cy="1554480"/>
           </a:xfrm>
           <a:prstGeom prst="rect">
             <a:avLst/>
@@ -8239,14 +12774,57 @@
       </p:sp>
       <p:sp>
         <p:nvSpPr>
-          <p:cNvPr id="7" name="TextBox 6"/>
+          <p:cNvPr id="7" name="Rectangle 6"/>
+          <p:cNvSpPr/>
+          <p:nvPr/>
+        </p:nvSpPr>
+        <p:spPr>
+          <a:xfrm>
+            <a:off x="274320" y="1371600"/>
+            <a:ext cx="137160" cy="1554480"/>
+          </a:xfrm>
+          <a:prstGeom prst="rect">
+            <a:avLst/>
+          </a:prstGeom>
+          <a:solidFill>
+            <a:srgbClr val="004D40"/>
+          </a:solidFill>
+          <a:ln>
+            <a:noFill/>
+          </a:ln>
+        </p:spPr>
+        <p:style>
+          <a:lnRef idx="1">
+            <a:schemeClr val="accent1"/>
+          </a:lnRef>
+          <a:fillRef idx="3">
+            <a:schemeClr val="accent1"/>
+          </a:fillRef>
+          <a:effectRef idx="2">
+            <a:schemeClr val="accent1"/>
+          </a:effectRef>
+          <a:fontRef idx="minor">
+            <a:schemeClr val="lt1"/>
+          </a:fontRef>
+        </p:style>
+        <p:txBody>
+          <a:bodyPr rtlCol="0" anchor="ctr"/>
+          <a:lstStyle/>
+          <a:p>
+            <a:pPr algn="ctr"/>
+          </a:p>
+        </p:txBody>
+      </p:sp>
+      <p:sp>
+        <p:nvSpPr>
+          <p:cNvPr id="8" name="TextBox 7"/>
           <p:cNvSpPr txBox="1"/>
           <p:nvPr/>
         </p:nvSpPr>
         <p:spPr>
           <a:xfrm>
-            <a:off x="274320" y="1463040"/>
-            <a:ext cx="2743200" cy="640080"/>
+            <a:off x="457200" y="1417320"/>
+            <a:ext cx="2514600" cy="685800"/>
           </a:xfrm>
           <a:prstGeom prst="rect">
             <a:avLst/>
@@ -8273,14 +12851,14 @@
       </p:sp>
       <p:sp>
         <p:nvSpPr>
-          <p:cNvPr id="8" name="TextBox 7"/>
+          <p:cNvPr id="9" name="TextBox 8"/>
           <p:cNvSpPr txBox="1"/>
           <p:nvPr/>
         </p:nvSpPr>
         <p:spPr>
           <a:xfrm>
-            <a:off x="274320" y="2057400"/>
-            <a:ext cx="2743200" cy="502920"/>
+            <a:off x="457200" y="2075688"/>
+            <a:ext cx="2514600" cy="777240"/>
           </a:xfrm>
           <a:prstGeom prst="rect">
             <a:avLst/>
@@ -8300,21 +12878,22 @@
                   <a:srgbClr val="5D6D7E"/>
                 </a:solidFill>
               </a:rPr>
-              <a:t>Unit aktif menggunakan SMART MATARAM</a:t>
-            </a:r>
-          </a:p>
-        </p:txBody>
-      </p:sp>
-      <p:sp>
-        <p:nvSpPr>
-          <p:cNvPr id="9" name="Rectangle 8"/>
+              <a:t>Unit aktif
+menggunakan SMART MATARAM</a:t>
+            </a:r>
+          </a:p>
+        </p:txBody>
+      </p:sp>
+      <p:sp>
+        <p:nvSpPr>
+          <p:cNvPr id="10" name="Rectangle 9"/>
           <p:cNvSpPr/>
           <p:nvPr/>
         </p:nvSpPr>
         <p:spPr>
           <a:xfrm>
             <a:off x="3246120" y="1371600"/>
-            <a:ext cx="2743200" cy="1463040"/>
+            <a:ext cx="2743200" cy="1554480"/>
           </a:xfrm>
           <a:prstGeom prst="rect">
             <a:avLst/>
@@ -8352,14 +12931,57 @@
       </p:sp>
       <p:sp>
         <p:nvSpPr>
-          <p:cNvPr id="10" name="TextBox 9"/>
+          <p:cNvPr id="11" name="Rectangle 10"/>
+          <p:cNvSpPr/>
+          <p:nvPr/>
+        </p:nvSpPr>
+        <p:spPr>
+          <a:xfrm>
+            <a:off x="3246120" y="1371600"/>
+            <a:ext cx="137160" cy="1554480"/>
+          </a:xfrm>
+          <a:prstGeom prst="rect">
+            <a:avLst/>
+          </a:prstGeom>
+          <a:solidFill>
+            <a:srgbClr val="1E8B4C"/>
+          </a:solidFill>
+          <a:ln>
+            <a:noFill/>
+          </a:ln>
+        </p:spPr>
+        <p:style>
+          <a:lnRef idx="1">
+            <a:schemeClr val="accent1"/>
+          </a:lnRef>
+          <a:fillRef idx="3">
+            <a:schemeClr val="accent1"/>
+          </a:fillRef>
+          <a:effectRef idx="2">
+            <a:schemeClr val="accent1"/>
+          </a:effectRef>
+          <a:fontRef idx="minor">
+            <a:schemeClr val="lt1"/>
+          </a:fontRef>
+        </p:style>
+        <p:txBody>
+          <a:bodyPr rtlCol="0" anchor="ctr"/>
+          <a:lstStyle/>
+          <a:p>
+            <a:pPr algn="ctr"/>
+          </a:p>
+        </p:txBody>
+      </p:sp>
+      <p:sp>
+        <p:nvSpPr>
+          <p:cNvPr id="12" name="TextBox 11"/>
           <p:cNvSpPr txBox="1"/>
           <p:nvPr/>
         </p:nvSpPr>
         <p:spPr>
           <a:xfrm>
-            <a:off x="3246120" y="1463040"/>
-            <a:ext cx="2743200" cy="640080"/>
+            <a:off x="3429000" y="1417320"/>
+            <a:ext cx="2514600" cy="685800"/>
           </a:xfrm>
           <a:prstGeom prst="rect">
             <a:avLst/>
@@ -8376,7 +12998,7 @@
             <a:r>
               <a:rPr sz="2800" b="1" i="0">
                 <a:solidFill>
-                  <a:srgbClr val="004D40"/>
+                  <a:srgbClr val="1E8B4C"/>
                 </a:solidFill>
               </a:rPr>
               <a:t>100%</a:t>
@@ -8386,14 +13008,14 @@
       </p:sp>
       <p:sp>
         <p:nvSpPr>
-          <p:cNvPr id="11" name="TextBox 10"/>
+          <p:cNvPr id="13" name="TextBox 12"/>
           <p:cNvSpPr txBox="1"/>
           <p:nvPr/>
         </p:nvSpPr>
         <p:spPr>
           <a:xfrm>
-            <a:off x="3246120" y="2057400"/>
-            <a:ext cx="2743200" cy="502920"/>
+            <a:off x="3429000" y="2075688"/>
+            <a:ext cx="2514600" cy="777240"/>
           </a:xfrm>
           <a:prstGeom prst="rect">
             <a:avLst/>
@@ -8421,14 +13043,14 @@
       </p:sp>
       <p:sp>
         <p:nvSpPr>
-          <p:cNvPr id="12" name="Rectangle 11"/>
+          <p:cNvPr id="14" name="Rectangle 13"/>
           <p:cNvSpPr/>
           <p:nvPr/>
         </p:nvSpPr>
         <p:spPr>
           <a:xfrm>
             <a:off x="6217920" y="1371600"/>
-            <a:ext cx="2743200" cy="1463040"/>
+            <a:ext cx="2743200" cy="1554480"/>
           </a:xfrm>
           <a:prstGeom prst="rect">
             <a:avLst/>
@@ -8466,14 +13088,57 @@
       </p:sp>
       <p:sp>
         <p:nvSpPr>
-          <p:cNvPr id="13" name="TextBox 12"/>
+          <p:cNvPr id="15" name="Rectangle 14"/>
+          <p:cNvSpPr/>
+          <p:nvPr/>
+        </p:nvSpPr>
+        <p:spPr>
+          <a:xfrm>
+            <a:off x="6217920" y="1371600"/>
+            <a:ext cx="137160" cy="1554480"/>
+          </a:xfrm>
+          <a:prstGeom prst="rect">
+            <a:avLst/>
+          </a:prstGeom>
+          <a:solidFill>
+            <a:srgbClr val="00695C"/>
+          </a:solidFill>
+          <a:ln>
+            <a:noFill/>
+          </a:ln>
+        </p:spPr>
+        <p:style>
+          <a:lnRef idx="1">
+            <a:schemeClr val="accent1"/>
+          </a:lnRef>
+          <a:fillRef idx="3">
+            <a:schemeClr val="accent1"/>
+          </a:fillRef>
+          <a:effectRef idx="2">
+            <a:schemeClr val="accent1"/>
+          </a:effectRef>
+          <a:fontRef idx="minor">
+            <a:schemeClr val="lt1"/>
+          </a:fontRef>
+        </p:style>
+        <p:txBody>
+          <a:bodyPr rtlCol="0" anchor="ctr"/>
+          <a:lstStyle/>
+          <a:p>
+            <a:pPr algn="ctr"/>
+          </a:p>
+        </p:txBody>
+      </p:sp>
+      <p:sp>
+        <p:nvSpPr>
+          <p:cNvPr id="16" name="TextBox 15"/>
           <p:cNvSpPr txBox="1"/>
           <p:nvPr/>
         </p:nvSpPr>
         <p:spPr>
           <a:xfrm>
-            <a:off x="6217920" y="1463040"/>
-            <a:ext cx="2743200" cy="640080"/>
+            <a:off x="6400800" y="1417320"/>
+            <a:ext cx="2514600" cy="685800"/>
           </a:xfrm>
           <a:prstGeom prst="rect">
             <a:avLst/>
@@ -8490,7 +13155,7 @@
             <a:r>
               <a:rPr sz="2800" b="1" i="0">
                 <a:solidFill>
-                  <a:srgbClr val="004D40"/>
+                  <a:srgbClr val="00695C"/>
                 </a:solidFill>
               </a:rPr>
               <a:t>Real-time</a:t>
@@ -8500,14 +13165,14 @@
       </p:sp>
       <p:sp>
         <p:nvSpPr>
-          <p:cNvPr id="14" name="TextBox 13"/>
+          <p:cNvPr id="17" name="TextBox 16"/>
           <p:cNvSpPr txBox="1"/>
           <p:nvPr/>
         </p:nvSpPr>
         <p:spPr>
           <a:xfrm>
-            <a:off x="6217920" y="2057400"/>
-            <a:ext cx="2743200" cy="502920"/>
+            <a:off x="6400800" y="2075688"/>
+            <a:ext cx="2514600" cy="777240"/>
           </a:xfrm>
           <a:prstGeom prst="rect">
             <a:avLst/>
@@ -8535,14 +13200,14 @@
       </p:sp>
       <p:sp>
         <p:nvSpPr>
-          <p:cNvPr id="15" name="Rectangle 14"/>
+          <p:cNvPr id="18" name="Rectangle 17"/>
           <p:cNvSpPr/>
           <p:nvPr/>
         </p:nvSpPr>
         <p:spPr>
           <a:xfrm>
             <a:off x="9189720" y="1371600"/>
-            <a:ext cx="2743200" cy="1463040"/>
+            <a:ext cx="2743200" cy="1554480"/>
           </a:xfrm>
           <a:prstGeom prst="rect">
             <a:avLst/>
@@ -8580,14 +13245,57 @@
       </p:sp>
       <p:sp>
         <p:nvSpPr>
-          <p:cNvPr id="16" name="TextBox 15"/>
+          <p:cNvPr id="19" name="Rectangle 18"/>
+          <p:cNvSpPr/>
+          <p:nvPr/>
+        </p:nvSpPr>
+        <p:spPr>
+          <a:xfrm>
+            <a:off x="9189720" y="1371600"/>
+            <a:ext cx="137160" cy="1554480"/>
+          </a:xfrm>
+          <a:prstGeom prst="rect">
+            <a:avLst/>
+          </a:prstGeom>
+          <a:solidFill>
+            <a:srgbClr val="1D4E89"/>
+          </a:solidFill>
+          <a:ln>
+            <a:noFill/>
+          </a:ln>
+        </p:spPr>
+        <p:style>
+          <a:lnRef idx="1">
+            <a:schemeClr val="accent1"/>
+          </a:lnRef>
+          <a:fillRef idx="3">
+            <a:schemeClr val="accent1"/>
+          </a:fillRef>
+          <a:effectRef idx="2">
+            <a:schemeClr val="accent1"/>
+          </a:effectRef>
+          <a:fontRef idx="minor">
+            <a:schemeClr val="lt1"/>
+          </a:fontRef>
+        </p:style>
+        <p:txBody>
+          <a:bodyPr rtlCol="0" anchor="ctr"/>
+          <a:lstStyle/>
+          <a:p>
+            <a:pPr algn="ctr"/>
+          </a:p>
+        </p:txBody>
+      </p:sp>
+      <p:sp>
+        <p:nvSpPr>
+          <p:cNvPr id="20" name="TextBox 19"/>
           <p:cNvSpPr txBox="1"/>
           <p:nvPr/>
         </p:nvSpPr>
         <p:spPr>
           <a:xfrm>
-            <a:off x="9189720" y="1463040"/>
-            <a:ext cx="2743200" cy="640080"/>
+            <a:off x="9372600" y="1417320"/>
+            <a:ext cx="2514600" cy="685800"/>
           </a:xfrm>
           <a:prstGeom prst="rect">
             <a:avLst/>
@@ -8604,7 +13312,7 @@
             <a:r>
               <a:rPr sz="2800" b="1" i="0">
                 <a:solidFill>
-                  <a:srgbClr val="004D40"/>
+                  <a:srgbClr val="1D4E89"/>
                 </a:solidFill>
               </a:rPr>
               <a:t>08.00 WITA</a:t>
@@ -8614,14 +13322,14 @@
       </p:sp>
       <p:sp>
         <p:nvSpPr>
-          <p:cNvPr id="17" name="TextBox 16"/>
+          <p:cNvPr id="21" name="TextBox 20"/>
           <p:cNvSpPr txBox="1"/>
           <p:nvPr/>
         </p:nvSpPr>
         <p:spPr>
           <a:xfrm>
-            <a:off x="9189720" y="2057400"/>
-            <a:ext cx="2743200" cy="502920"/>
+            <a:off x="9372600" y="2075688"/>
+            <a:ext cx="2514600" cy="777240"/>
           </a:xfrm>
           <a:prstGeom prst="rect">
             <a:avLst/>
@@ -8649,20 +13357,20 @@
       </p:sp>
       <p:sp>
         <p:nvSpPr>
-          <p:cNvPr id="18" name="Rectangle 17"/>
-          <p:cNvSpPr/>
-          <p:nvPr/>
-        </p:nvSpPr>
-        <p:spPr>
-          <a:xfrm>
-            <a:off x="274320" y="3017520"/>
-            <a:ext cx="3749039" cy="384048"/>
-          </a:xfrm>
-          <a:prstGeom prst="rect">
-            <a:avLst/>
-          </a:prstGeom>
-          <a:solidFill>
-            <a:srgbClr val="00897B"/>
+          <p:cNvPr id="22" name="Rectangle 21"/>
+          <p:cNvSpPr/>
+          <p:nvPr/>
+        </p:nvSpPr>
+        <p:spPr>
+          <a:xfrm>
+            <a:off x="274320" y="3063240"/>
+            <a:ext cx="11612880" cy="228600"/>
+          </a:xfrm>
+          <a:prstGeom prst="rect">
+            <a:avLst/>
+          </a:prstGeom>
+          <a:solidFill>
+            <a:srgbClr val="004D40"/>
           </a:solidFill>
           <a:ln>
             <a:noFill/>
@@ -8692,14 +13400,14 @@
       </p:sp>
       <p:sp>
         <p:nvSpPr>
-          <p:cNvPr id="19" name="TextBox 18"/>
+          <p:cNvPr id="23" name="TextBox 22"/>
           <p:cNvSpPr txBox="1"/>
           <p:nvPr/>
         </p:nvSpPr>
         <p:spPr>
           <a:xfrm>
-            <a:off x="365760" y="3035808"/>
-            <a:ext cx="3566159" cy="347472"/>
+            <a:off x="320040" y="3090672"/>
+            <a:ext cx="6400800" cy="182880"/>
           </a:xfrm>
           <a:prstGeom prst="rect">
             <a:avLst/>
@@ -8714,6 +13422,741 @@
           <a:p>
             <a:pPr algn="l"/>
             <a:r>
+              <a:rPr sz="800" b="1" i="0">
+                <a:solidFill>
+                  <a:srgbClr val="FFFFFF"/>
+                </a:solidFill>
+              </a:rPr>
+              <a:t>TINGKAT PEMANFAATAN PER MODUL</a:t>
+            </a:r>
+          </a:p>
+        </p:txBody>
+      </p:sp>
+      <p:sp>
+        <p:nvSpPr>
+          <p:cNvPr id="24" name="TextBox 23"/>
+          <p:cNvSpPr txBox="1"/>
+          <p:nvPr/>
+        </p:nvSpPr>
+        <p:spPr>
+          <a:xfrm>
+            <a:off x="6720840" y="3090672"/>
+            <a:ext cx="5120640" cy="182880"/>
+          </a:xfrm>
+          <a:prstGeom prst="rect">
+            <a:avLst/>
+          </a:prstGeom>
+          <a:noFill/>
+        </p:spPr>
+        <p:txBody>
+          <a:bodyPr wrap="square">
+            <a:spAutoFit/>
+          </a:bodyPr>
+          <a:lstStyle/>
+          <a:p>
+            <a:pPr algn="r"/>
+            <a:r>
+              <a:rPr sz="800" b="0" i="1">
+                <a:solidFill>
+                  <a:srgbClr val="B2DFDB"/>
+                </a:solidFill>
+              </a:rPr>
+              <a:t>Estimasi adopsi berdasarkan penggunaan aktif</a:t>
+            </a:r>
+          </a:p>
+        </p:txBody>
+      </p:sp>
+      <p:sp>
+        <p:nvSpPr>
+          <p:cNvPr id="25" name="Rectangle 24"/>
+          <p:cNvSpPr/>
+          <p:nvPr/>
+        </p:nvSpPr>
+        <p:spPr>
+          <a:xfrm>
+            <a:off x="274320" y="3291840"/>
+            <a:ext cx="11612880" cy="347472"/>
+          </a:xfrm>
+          <a:prstGeom prst="rect">
+            <a:avLst/>
+          </a:prstGeom>
+          <a:solidFill>
+            <a:srgbClr val="E0F2F1"/>
+          </a:solidFill>
+          <a:ln w="6350">
+            <a:solidFill>
+              <a:srgbClr val="B2DFDB"/>
+            </a:solidFill>
+          </a:ln>
+        </p:spPr>
+        <p:style>
+          <a:lnRef idx="1">
+            <a:schemeClr val="accent1"/>
+          </a:lnRef>
+          <a:fillRef idx="3">
+            <a:schemeClr val="accent1"/>
+          </a:fillRef>
+          <a:effectRef idx="2">
+            <a:schemeClr val="accent1"/>
+          </a:effectRef>
+          <a:fontRef idx="minor">
+            <a:schemeClr val="lt1"/>
+          </a:fontRef>
+        </p:style>
+        <p:txBody>
+          <a:bodyPr rtlCol="0" anchor="ctr"/>
+          <a:lstStyle/>
+          <a:p>
+            <a:pPr algn="ctr"/>
+          </a:p>
+        </p:txBody>
+      </p:sp>
+      <p:sp>
+        <p:nvSpPr>
+          <p:cNvPr id="26" name="Rectangle 25"/>
+          <p:cNvSpPr/>
+          <p:nvPr/>
+        </p:nvSpPr>
+        <p:spPr>
+          <a:xfrm>
+            <a:off x="274320" y="3291840"/>
+            <a:ext cx="9870948" cy="347472"/>
+          </a:xfrm>
+          <a:prstGeom prst="rect">
+            <a:avLst/>
+          </a:prstGeom>
+          <a:solidFill>
+            <a:srgbClr val="00897B"/>
+          </a:solidFill>
+          <a:ln>
+            <a:noFill/>
+          </a:ln>
+        </p:spPr>
+        <p:style>
+          <a:lnRef idx="1">
+            <a:schemeClr val="accent1"/>
+          </a:lnRef>
+          <a:fillRef idx="3">
+            <a:schemeClr val="accent1"/>
+          </a:fillRef>
+          <a:effectRef idx="2">
+            <a:schemeClr val="accent1"/>
+          </a:effectRef>
+          <a:fontRef idx="minor">
+            <a:schemeClr val="lt1"/>
+          </a:fontRef>
+        </p:style>
+        <p:txBody>
+          <a:bodyPr rtlCol="0" anchor="ctr"/>
+          <a:lstStyle/>
+          <a:p>
+            <a:pPr algn="ctr"/>
+          </a:p>
+        </p:txBody>
+      </p:sp>
+      <p:sp>
+        <p:nvSpPr>
+          <p:cNvPr id="27" name="TextBox 26"/>
+          <p:cNvSpPr txBox="1"/>
+          <p:nvPr/>
+        </p:nvSpPr>
+        <p:spPr>
+          <a:xfrm>
+            <a:off x="365760" y="3310128"/>
+            <a:ext cx="11430000" cy="310896"/>
+          </a:xfrm>
+          <a:prstGeom prst="rect">
+            <a:avLst/>
+          </a:prstGeom>
+          <a:noFill/>
+        </p:spPr>
+        <p:txBody>
+          <a:bodyPr wrap="none">
+            <a:spAutoFit/>
+          </a:bodyPr>
+          <a:lstStyle/>
+          <a:p>
+            <a:pPr algn="l"/>
+            <a:r>
+              <a:rPr sz="900" b="1" i="0">
+                <a:solidFill>
+                  <a:srgbClr val="FFFFFF"/>
+                </a:solidFill>
+              </a:rPr>
+              <a:t>  Inspeksi Jaringan</a:t>
+            </a:r>
+          </a:p>
+        </p:txBody>
+      </p:sp>
+      <p:sp>
+        <p:nvSpPr>
+          <p:cNvPr id="28" name="TextBox 27"/>
+          <p:cNvSpPr txBox="1"/>
+          <p:nvPr/>
+        </p:nvSpPr>
+        <p:spPr>
+          <a:xfrm>
+            <a:off x="11430000" y="3310128"/>
+            <a:ext cx="411480" cy="310896"/>
+          </a:xfrm>
+          <a:prstGeom prst="rect">
+            <a:avLst/>
+          </a:prstGeom>
+          <a:noFill/>
+        </p:spPr>
+        <p:txBody>
+          <a:bodyPr wrap="none">
+            <a:spAutoFit/>
+          </a:bodyPr>
+          <a:lstStyle/>
+          <a:p>
+            <a:pPr algn="r"/>
+            <a:r>
+              <a:rPr sz="900" b="1" i="0">
+                <a:solidFill>
+                  <a:srgbClr val="1B2631"/>
+                </a:solidFill>
+              </a:rPr>
+              <a:t>85%</a:t>
+            </a:r>
+          </a:p>
+        </p:txBody>
+      </p:sp>
+      <p:sp>
+        <p:nvSpPr>
+          <p:cNvPr id="29" name="Rectangle 28"/>
+          <p:cNvSpPr/>
+          <p:nvPr/>
+        </p:nvSpPr>
+        <p:spPr>
+          <a:xfrm>
+            <a:off x="274320" y="3675888"/>
+            <a:ext cx="11612880" cy="347472"/>
+          </a:xfrm>
+          <a:prstGeom prst="rect">
+            <a:avLst/>
+          </a:prstGeom>
+          <a:solidFill>
+            <a:srgbClr val="E0F2F1"/>
+          </a:solidFill>
+          <a:ln w="6350">
+            <a:solidFill>
+              <a:srgbClr val="B2DFDB"/>
+            </a:solidFill>
+          </a:ln>
+        </p:spPr>
+        <p:style>
+          <a:lnRef idx="1">
+            <a:schemeClr val="accent1"/>
+          </a:lnRef>
+          <a:fillRef idx="3">
+            <a:schemeClr val="accent1"/>
+          </a:fillRef>
+          <a:effectRef idx="2">
+            <a:schemeClr val="accent1"/>
+          </a:effectRef>
+          <a:fontRef idx="minor">
+            <a:schemeClr val="lt1"/>
+          </a:fontRef>
+        </p:style>
+        <p:txBody>
+          <a:bodyPr rtlCol="0" anchor="ctr"/>
+          <a:lstStyle/>
+          <a:p>
+            <a:pPr algn="ctr"/>
+          </a:p>
+        </p:txBody>
+      </p:sp>
+      <p:sp>
+        <p:nvSpPr>
+          <p:cNvPr id="30" name="Rectangle 29"/>
+          <p:cNvSpPr/>
+          <p:nvPr/>
+        </p:nvSpPr>
+        <p:spPr>
+          <a:xfrm>
+            <a:off x="274320" y="3675888"/>
+            <a:ext cx="9058046" cy="347472"/>
+          </a:xfrm>
+          <a:prstGeom prst="rect">
+            <a:avLst/>
+          </a:prstGeom>
+          <a:solidFill>
+            <a:srgbClr val="1E6F2D"/>
+          </a:solidFill>
+          <a:ln>
+            <a:noFill/>
+          </a:ln>
+        </p:spPr>
+        <p:style>
+          <a:lnRef idx="1">
+            <a:schemeClr val="accent1"/>
+          </a:lnRef>
+          <a:fillRef idx="3">
+            <a:schemeClr val="accent1"/>
+          </a:fillRef>
+          <a:effectRef idx="2">
+            <a:schemeClr val="accent1"/>
+          </a:effectRef>
+          <a:fontRef idx="minor">
+            <a:schemeClr val="lt1"/>
+          </a:fontRef>
+        </p:style>
+        <p:txBody>
+          <a:bodyPr rtlCol="0" anchor="ctr"/>
+          <a:lstStyle/>
+          <a:p>
+            <a:pPr algn="ctr"/>
+          </a:p>
+        </p:txBody>
+      </p:sp>
+      <p:sp>
+        <p:nvSpPr>
+          <p:cNvPr id="31" name="TextBox 30"/>
+          <p:cNvSpPr txBox="1"/>
+          <p:nvPr/>
+        </p:nvSpPr>
+        <p:spPr>
+          <a:xfrm>
+            <a:off x="365760" y="3694176"/>
+            <a:ext cx="11430000" cy="310896"/>
+          </a:xfrm>
+          <a:prstGeom prst="rect">
+            <a:avLst/>
+          </a:prstGeom>
+          <a:noFill/>
+        </p:spPr>
+        <p:txBody>
+          <a:bodyPr wrap="none">
+            <a:spAutoFit/>
+          </a:bodyPr>
+          <a:lstStyle/>
+          <a:p>
+            <a:pPr algn="l"/>
+            <a:r>
+              <a:rPr sz="900" b="1" i="0">
+                <a:solidFill>
+                  <a:srgbClr val="FFFFFF"/>
+                </a:solidFill>
+              </a:rPr>
+              <a:t>  Inspeksi Pohon</a:t>
+            </a:r>
+          </a:p>
+        </p:txBody>
+      </p:sp>
+      <p:sp>
+        <p:nvSpPr>
+          <p:cNvPr id="32" name="TextBox 31"/>
+          <p:cNvSpPr txBox="1"/>
+          <p:nvPr/>
+        </p:nvSpPr>
+        <p:spPr>
+          <a:xfrm>
+            <a:off x="11430000" y="3694176"/>
+            <a:ext cx="411480" cy="310896"/>
+          </a:xfrm>
+          <a:prstGeom prst="rect">
+            <a:avLst/>
+          </a:prstGeom>
+          <a:noFill/>
+        </p:spPr>
+        <p:txBody>
+          <a:bodyPr wrap="none">
+            <a:spAutoFit/>
+          </a:bodyPr>
+          <a:lstStyle/>
+          <a:p>
+            <a:pPr algn="r"/>
+            <a:r>
+              <a:rPr sz="900" b="1" i="0">
+                <a:solidFill>
+                  <a:srgbClr val="1B2631"/>
+                </a:solidFill>
+              </a:rPr>
+              <a:t>78%</a:t>
+            </a:r>
+          </a:p>
+        </p:txBody>
+      </p:sp>
+      <p:sp>
+        <p:nvSpPr>
+          <p:cNvPr id="33" name="Rectangle 32"/>
+          <p:cNvSpPr/>
+          <p:nvPr/>
+        </p:nvSpPr>
+        <p:spPr>
+          <a:xfrm>
+            <a:off x="274320" y="4059936"/>
+            <a:ext cx="11612880" cy="347472"/>
+          </a:xfrm>
+          <a:prstGeom prst="rect">
+            <a:avLst/>
+          </a:prstGeom>
+          <a:solidFill>
+            <a:srgbClr val="E0F2F1"/>
+          </a:solidFill>
+          <a:ln w="6350">
+            <a:solidFill>
+              <a:srgbClr val="B2DFDB"/>
+            </a:solidFill>
+          </a:ln>
+        </p:spPr>
+        <p:style>
+          <a:lnRef idx="1">
+            <a:schemeClr val="accent1"/>
+          </a:lnRef>
+          <a:fillRef idx="3">
+            <a:schemeClr val="accent1"/>
+          </a:fillRef>
+          <a:effectRef idx="2">
+            <a:schemeClr val="accent1"/>
+          </a:effectRef>
+          <a:fontRef idx="minor">
+            <a:schemeClr val="lt1"/>
+          </a:fontRef>
+        </p:style>
+        <p:txBody>
+          <a:bodyPr rtlCol="0" anchor="ctr"/>
+          <a:lstStyle/>
+          <a:p>
+            <a:pPr algn="ctr"/>
+          </a:p>
+        </p:txBody>
+      </p:sp>
+      <p:sp>
+        <p:nvSpPr>
+          <p:cNvPr id="34" name="Rectangle 33"/>
+          <p:cNvSpPr/>
+          <p:nvPr/>
+        </p:nvSpPr>
+        <p:spPr>
+          <a:xfrm>
+            <a:off x="274320" y="4059936"/>
+            <a:ext cx="10683849" cy="347472"/>
+          </a:xfrm>
+          <a:prstGeom prst="rect">
+            <a:avLst/>
+          </a:prstGeom>
+          <a:solidFill>
+            <a:srgbClr val="00695C"/>
+          </a:solidFill>
+          <a:ln>
+            <a:noFill/>
+          </a:ln>
+        </p:spPr>
+        <p:style>
+          <a:lnRef idx="1">
+            <a:schemeClr val="accent1"/>
+          </a:lnRef>
+          <a:fillRef idx="3">
+            <a:schemeClr val="accent1"/>
+          </a:fillRef>
+          <a:effectRef idx="2">
+            <a:schemeClr val="accent1"/>
+          </a:effectRef>
+          <a:fontRef idx="minor">
+            <a:schemeClr val="lt1"/>
+          </a:fontRef>
+        </p:style>
+        <p:txBody>
+          <a:bodyPr rtlCol="0" anchor="ctr"/>
+          <a:lstStyle/>
+          <a:p>
+            <a:pPr algn="ctr"/>
+          </a:p>
+        </p:txBody>
+      </p:sp>
+      <p:sp>
+        <p:nvSpPr>
+          <p:cNvPr id="35" name="TextBox 34"/>
+          <p:cNvSpPr txBox="1"/>
+          <p:nvPr/>
+        </p:nvSpPr>
+        <p:spPr>
+          <a:xfrm>
+            <a:off x="365760" y="4078224"/>
+            <a:ext cx="11430000" cy="310896"/>
+          </a:xfrm>
+          <a:prstGeom prst="rect">
+            <a:avLst/>
+          </a:prstGeom>
+          <a:noFill/>
+        </p:spPr>
+        <p:txBody>
+          <a:bodyPr wrap="none">
+            <a:spAutoFit/>
+          </a:bodyPr>
+          <a:lstStyle/>
+          <a:p>
+            <a:pPr algn="l"/>
+            <a:r>
+              <a:rPr sz="900" b="1" i="0">
+                <a:solidFill>
+                  <a:srgbClr val="FFFFFF"/>
+                </a:solidFill>
+              </a:rPr>
+              <a:t>  Pengukuran Gardu &amp; WO</a:t>
+            </a:r>
+          </a:p>
+        </p:txBody>
+      </p:sp>
+      <p:sp>
+        <p:nvSpPr>
+          <p:cNvPr id="36" name="TextBox 35"/>
+          <p:cNvSpPr txBox="1"/>
+          <p:nvPr/>
+        </p:nvSpPr>
+        <p:spPr>
+          <a:xfrm>
+            <a:off x="11430000" y="4078224"/>
+            <a:ext cx="411480" cy="310896"/>
+          </a:xfrm>
+          <a:prstGeom prst="rect">
+            <a:avLst/>
+          </a:prstGeom>
+          <a:noFill/>
+        </p:spPr>
+        <p:txBody>
+          <a:bodyPr wrap="none">
+            <a:spAutoFit/>
+          </a:bodyPr>
+          <a:lstStyle/>
+          <a:p>
+            <a:pPr algn="r"/>
+            <a:r>
+              <a:rPr sz="900" b="1" i="0">
+                <a:solidFill>
+                  <a:srgbClr val="1B2631"/>
+                </a:solidFill>
+              </a:rPr>
+              <a:t>92%</a:t>
+            </a:r>
+          </a:p>
+        </p:txBody>
+      </p:sp>
+      <p:sp>
+        <p:nvSpPr>
+          <p:cNvPr id="37" name="Rectangle 36"/>
+          <p:cNvSpPr/>
+          <p:nvPr/>
+        </p:nvSpPr>
+        <p:spPr>
+          <a:xfrm>
+            <a:off x="274320" y="4443984"/>
+            <a:ext cx="11612880" cy="347472"/>
+          </a:xfrm>
+          <a:prstGeom prst="rect">
+            <a:avLst/>
+          </a:prstGeom>
+          <a:solidFill>
+            <a:srgbClr val="E0F2F1"/>
+          </a:solidFill>
+          <a:ln w="6350">
+            <a:solidFill>
+              <a:srgbClr val="B2DFDB"/>
+            </a:solidFill>
+          </a:ln>
+        </p:spPr>
+        <p:style>
+          <a:lnRef idx="1">
+            <a:schemeClr val="accent1"/>
+          </a:lnRef>
+          <a:fillRef idx="3">
+            <a:schemeClr val="accent1"/>
+          </a:fillRef>
+          <a:effectRef idx="2">
+            <a:schemeClr val="accent1"/>
+          </a:effectRef>
+          <a:fontRef idx="minor">
+            <a:schemeClr val="lt1"/>
+          </a:fontRef>
+        </p:style>
+        <p:txBody>
+          <a:bodyPr rtlCol="0" anchor="ctr"/>
+          <a:lstStyle/>
+          <a:p>
+            <a:pPr algn="ctr"/>
+          </a:p>
+        </p:txBody>
+      </p:sp>
+      <p:sp>
+        <p:nvSpPr>
+          <p:cNvPr id="38" name="Rectangle 37"/>
+          <p:cNvSpPr/>
+          <p:nvPr/>
+        </p:nvSpPr>
+        <p:spPr>
+          <a:xfrm>
+            <a:off x="274320" y="4443984"/>
+            <a:ext cx="8129015" cy="347472"/>
+          </a:xfrm>
+          <a:prstGeom prst="rect">
+            <a:avLst/>
+          </a:prstGeom>
+          <a:solidFill>
+            <a:srgbClr val="1D4E89"/>
+          </a:solidFill>
+          <a:ln>
+            <a:noFill/>
+          </a:ln>
+        </p:spPr>
+        <p:style>
+          <a:lnRef idx="1">
+            <a:schemeClr val="accent1"/>
+          </a:lnRef>
+          <a:fillRef idx="3">
+            <a:schemeClr val="accent1"/>
+          </a:fillRef>
+          <a:effectRef idx="2">
+            <a:schemeClr val="accent1"/>
+          </a:effectRef>
+          <a:fontRef idx="minor">
+            <a:schemeClr val="lt1"/>
+          </a:fontRef>
+        </p:style>
+        <p:txBody>
+          <a:bodyPr rtlCol="0" anchor="ctr"/>
+          <a:lstStyle/>
+          <a:p>
+            <a:pPr algn="ctr"/>
+          </a:p>
+        </p:txBody>
+      </p:sp>
+      <p:sp>
+        <p:nvSpPr>
+          <p:cNvPr id="39" name="TextBox 38"/>
+          <p:cNvSpPr txBox="1"/>
+          <p:nvPr/>
+        </p:nvSpPr>
+        <p:spPr>
+          <a:xfrm>
+            <a:off x="365760" y="4462272"/>
+            <a:ext cx="11430000" cy="310896"/>
+          </a:xfrm>
+          <a:prstGeom prst="rect">
+            <a:avLst/>
+          </a:prstGeom>
+          <a:noFill/>
+        </p:spPr>
+        <p:txBody>
+          <a:bodyPr wrap="none">
+            <a:spAutoFit/>
+          </a:bodyPr>
+          <a:lstStyle/>
+          <a:p>
+            <a:pPr algn="l"/>
+            <a:r>
+              <a:rPr sz="900" b="1" i="0">
+                <a:solidFill>
+                  <a:srgbClr val="FFFFFF"/>
+                </a:solidFill>
+              </a:rPr>
+              <a:t>  Score Board &amp; Morning Brief</a:t>
+            </a:r>
+          </a:p>
+        </p:txBody>
+      </p:sp>
+      <p:sp>
+        <p:nvSpPr>
+          <p:cNvPr id="40" name="TextBox 39"/>
+          <p:cNvSpPr txBox="1"/>
+          <p:nvPr/>
+        </p:nvSpPr>
+        <p:spPr>
+          <a:xfrm>
+            <a:off x="11430000" y="4462272"/>
+            <a:ext cx="411480" cy="310896"/>
+          </a:xfrm>
+          <a:prstGeom prst="rect">
+            <a:avLst/>
+          </a:prstGeom>
+          <a:noFill/>
+        </p:spPr>
+        <p:txBody>
+          <a:bodyPr wrap="none">
+            <a:spAutoFit/>
+          </a:bodyPr>
+          <a:lstStyle/>
+          <a:p>
+            <a:pPr algn="r"/>
+            <a:r>
+              <a:rPr sz="900" b="1" i="0">
+                <a:solidFill>
+                  <a:srgbClr val="1B2631"/>
+                </a:solidFill>
+              </a:rPr>
+              <a:t>70%</a:t>
+            </a:r>
+          </a:p>
+        </p:txBody>
+      </p:sp>
+      <p:sp>
+        <p:nvSpPr>
+          <p:cNvPr id="41" name="Rectangle 40"/>
+          <p:cNvSpPr/>
+          <p:nvPr/>
+        </p:nvSpPr>
+        <p:spPr>
+          <a:xfrm>
+            <a:off x="274320" y="4709160"/>
+            <a:ext cx="3749039" cy="384048"/>
+          </a:xfrm>
+          <a:prstGeom prst="rect">
+            <a:avLst/>
+          </a:prstGeom>
+          <a:solidFill>
+            <a:srgbClr val="00897B"/>
+          </a:solidFill>
+          <a:ln>
+            <a:noFill/>
+          </a:ln>
+        </p:spPr>
+        <p:style>
+          <a:lnRef idx="1">
+            <a:schemeClr val="accent1"/>
+          </a:lnRef>
+          <a:fillRef idx="3">
+            <a:schemeClr val="accent1"/>
+          </a:fillRef>
+          <a:effectRef idx="2">
+            <a:schemeClr val="accent1"/>
+          </a:effectRef>
+          <a:fontRef idx="minor">
+            <a:schemeClr val="lt1"/>
+          </a:fontRef>
+        </p:style>
+        <p:txBody>
+          <a:bodyPr rtlCol="0" anchor="ctr"/>
+          <a:lstStyle/>
+          <a:p>
+            <a:pPr algn="ctr"/>
+          </a:p>
+        </p:txBody>
+      </p:sp>
+      <p:sp>
+        <p:nvSpPr>
+          <p:cNvPr id="42" name="TextBox 41"/>
+          <p:cNvSpPr txBox="1"/>
+          <p:nvPr/>
+        </p:nvSpPr>
+        <p:spPr>
+          <a:xfrm>
+            <a:off x="365760" y="4727448"/>
+            <a:ext cx="3566159" cy="347472"/>
+          </a:xfrm>
+          <a:prstGeom prst="rect">
+            <a:avLst/>
+          </a:prstGeom>
+          <a:noFill/>
+        </p:spPr>
+        <p:txBody>
+          <a:bodyPr wrap="square">
+            <a:spAutoFit/>
+          </a:bodyPr>
+          <a:lstStyle/>
+          <a:p>
+            <a:pPr algn="l"/>
+            <a:r>
               <a:rPr sz="1200" b="1" i="0">
                 <a:solidFill>
                   <a:srgbClr val="FFFFFF"/>
@@ -8726,14 +14169,14 @@
       </p:sp>
       <p:sp>
         <p:nvSpPr>
-          <p:cNvPr id="20" name="Rectangle 19"/>
-          <p:cNvSpPr/>
-          <p:nvPr/>
-        </p:nvSpPr>
-        <p:spPr>
-          <a:xfrm>
-            <a:off x="274320" y="3401568"/>
-            <a:ext cx="3749039" cy="3090672"/>
+          <p:cNvPr id="43" name="Rectangle 42"/>
+          <p:cNvSpPr/>
+          <p:nvPr/>
+        </p:nvSpPr>
+        <p:spPr>
+          <a:xfrm>
+            <a:off x="274320" y="5093208"/>
+            <a:ext cx="3749039" cy="1536192"/>
           </a:xfrm>
           <a:prstGeom prst="rect">
             <a:avLst/>
@@ -8771,14 +14214,14 @@
       </p:sp>
       <p:sp>
         <p:nvSpPr>
-          <p:cNvPr id="21" name="TextBox 20"/>
+          <p:cNvPr id="44" name="TextBox 43"/>
           <p:cNvSpPr txBox="1"/>
           <p:nvPr/>
         </p:nvSpPr>
         <p:spPr>
           <a:xfrm>
-            <a:off x="384048" y="3474720"/>
-            <a:ext cx="3529583" cy="2926080"/>
+            <a:off x="384048" y="5166360"/>
+            <a:ext cx="3529583" cy="1371600"/>
           </a:xfrm>
           <a:prstGeom prst="rect">
             <a:avLst/>
@@ -8808,13 +14251,13 @@
       </p:sp>
       <p:sp>
         <p:nvSpPr>
-          <p:cNvPr id="22" name="Rectangle 21"/>
-          <p:cNvSpPr/>
-          <p:nvPr/>
-        </p:nvSpPr>
-        <p:spPr>
-          <a:xfrm>
-            <a:off x="4160520" y="3017520"/>
+          <p:cNvPr id="45" name="Rectangle 44"/>
+          <p:cNvSpPr/>
+          <p:nvPr/>
+        </p:nvSpPr>
+        <p:spPr>
+          <a:xfrm>
+            <a:off x="4160520" y="4709160"/>
             <a:ext cx="3749039" cy="384048"/>
           </a:xfrm>
           <a:prstGeom prst="rect">
@@ -8851,13 +14294,13 @@
       </p:sp>
       <p:sp>
         <p:nvSpPr>
-          <p:cNvPr id="23" name="TextBox 22"/>
+          <p:cNvPr id="46" name="TextBox 45"/>
           <p:cNvSpPr txBox="1"/>
           <p:nvPr/>
         </p:nvSpPr>
         <p:spPr>
           <a:xfrm>
-            <a:off x="4251960" y="3035808"/>
+            <a:off x="4251960" y="4727448"/>
             <a:ext cx="3566159" cy="347472"/>
           </a:xfrm>
           <a:prstGeom prst="rect">
@@ -8885,14 +14328,14 @@
       </p:sp>
       <p:sp>
         <p:nvSpPr>
-          <p:cNvPr id="24" name="Rectangle 23"/>
-          <p:cNvSpPr/>
-          <p:nvPr/>
-        </p:nvSpPr>
-        <p:spPr>
-          <a:xfrm>
-            <a:off x="4160520" y="3401568"/>
-            <a:ext cx="3749039" cy="3090672"/>
+          <p:cNvPr id="47" name="Rectangle 46"/>
+          <p:cNvSpPr/>
+          <p:nvPr/>
+        </p:nvSpPr>
+        <p:spPr>
+          <a:xfrm>
+            <a:off x="4160520" y="5093208"/>
+            <a:ext cx="3749039" cy="1536192"/>
           </a:xfrm>
           <a:prstGeom prst="rect">
             <a:avLst/>
@@ -8930,14 +14373,14 @@
       </p:sp>
       <p:sp>
         <p:nvSpPr>
-          <p:cNvPr id="25" name="TextBox 24"/>
+          <p:cNvPr id="48" name="TextBox 47"/>
           <p:cNvSpPr txBox="1"/>
           <p:nvPr/>
         </p:nvSpPr>
         <p:spPr>
           <a:xfrm>
-            <a:off x="4270248" y="3474720"/>
-            <a:ext cx="3529583" cy="2926080"/>
+            <a:off x="4270248" y="5166360"/>
+            <a:ext cx="3529583" cy="1371600"/>
           </a:xfrm>
           <a:prstGeom prst="rect">
             <a:avLst/>
@@ -8967,13 +14410,13 @@
       </p:sp>
       <p:sp>
         <p:nvSpPr>
-          <p:cNvPr id="26" name="Rectangle 25"/>
-          <p:cNvSpPr/>
-          <p:nvPr/>
-        </p:nvSpPr>
-        <p:spPr>
-          <a:xfrm>
-            <a:off x="8046720" y="3017520"/>
+          <p:cNvPr id="49" name="Rectangle 48"/>
+          <p:cNvSpPr/>
+          <p:nvPr/>
+        </p:nvSpPr>
+        <p:spPr>
+          <a:xfrm>
+            <a:off x="8046720" y="4709160"/>
             <a:ext cx="3749039" cy="384048"/>
           </a:xfrm>
           <a:prstGeom prst="rect">
@@ -9010,13 +14453,13 @@
       </p:sp>
       <p:sp>
         <p:nvSpPr>
-          <p:cNvPr id="27" name="TextBox 26"/>
+          <p:cNvPr id="50" name="TextBox 49"/>
           <p:cNvSpPr txBox="1"/>
           <p:nvPr/>
         </p:nvSpPr>
         <p:spPr>
           <a:xfrm>
-            <a:off x="8138160" y="3035808"/>
+            <a:off x="8138160" y="4727448"/>
             <a:ext cx="3566159" cy="347472"/>
           </a:xfrm>
           <a:prstGeom prst="rect">
@@ -9044,14 +14487,14 @@
       </p:sp>
       <p:sp>
         <p:nvSpPr>
-          <p:cNvPr id="28" name="Rectangle 27"/>
-          <p:cNvSpPr/>
-          <p:nvPr/>
-        </p:nvSpPr>
-        <p:spPr>
-          <a:xfrm>
-            <a:off x="8046720" y="3401568"/>
-            <a:ext cx="3749039" cy="3090672"/>
+          <p:cNvPr id="51" name="Rectangle 50"/>
+          <p:cNvSpPr/>
+          <p:nvPr/>
+        </p:nvSpPr>
+        <p:spPr>
+          <a:xfrm>
+            <a:off x="8046720" y="5093208"/>
+            <a:ext cx="3749039" cy="1536192"/>
           </a:xfrm>
           <a:prstGeom prst="rect">
             <a:avLst/>
@@ -9089,14 +14532,14 @@
       </p:sp>
       <p:sp>
         <p:nvSpPr>
-          <p:cNvPr id="29" name="TextBox 28"/>
+          <p:cNvPr id="52" name="TextBox 51"/>
           <p:cNvSpPr txBox="1"/>
           <p:nvPr/>
         </p:nvSpPr>
         <p:spPr>
           <a:xfrm>
-            <a:off x="8156448" y="3474720"/>
-            <a:ext cx="3529583" cy="2926080"/>
+            <a:off x="8156448" y="5166360"/>
+            <a:ext cx="3529583" cy="1371600"/>
           </a:xfrm>
           <a:prstGeom prst="rect">
             <a:avLst/>
@@ -9382,7 +14825,7 @@
         <p:spPr>
           <a:xfrm>
             <a:off x="274320" y="1755648"/>
-            <a:ext cx="2834640" cy="4645152"/>
+            <a:ext cx="2834640" cy="4096512"/>
           </a:xfrm>
           <a:prstGeom prst="rect">
             <a:avLst/>
@@ -9427,7 +14870,7 @@
         <p:spPr>
           <a:xfrm>
             <a:off x="384048" y="1828800"/>
-            <a:ext cx="2615184" cy="4480560"/>
+            <a:ext cx="2615184" cy="3931920"/>
           </a:xfrm>
           <a:prstGeom prst="rect">
             <a:avLst/>
@@ -9541,7 +14984,7 @@
         <p:spPr>
           <a:xfrm>
             <a:off x="3246120" y="1755648"/>
-            <a:ext cx="2834640" cy="4645152"/>
+            <a:ext cx="2834640" cy="4096512"/>
           </a:xfrm>
           <a:prstGeom prst="rect">
             <a:avLst/>
@@ -9586,7 +15029,7 @@
         <p:spPr>
           <a:xfrm>
             <a:off x="3355848" y="1828800"/>
-            <a:ext cx="2615184" cy="4480560"/>
+            <a:ext cx="2615184" cy="3931920"/>
           </a:xfrm>
           <a:prstGeom prst="rect">
             <a:avLst/>
@@ -9700,7 +15143,7 @@
         <p:spPr>
           <a:xfrm>
             <a:off x="6217920" y="1755648"/>
-            <a:ext cx="2834640" cy="4645152"/>
+            <a:ext cx="2834640" cy="4096512"/>
           </a:xfrm>
           <a:prstGeom prst="rect">
             <a:avLst/>
@@ -9745,7 +15188,7 @@
         <p:spPr>
           <a:xfrm>
             <a:off x="6327648" y="1828800"/>
-            <a:ext cx="2615184" cy="4480560"/>
+            <a:ext cx="2615184" cy="3931920"/>
           </a:xfrm>
           <a:prstGeom prst="rect">
             <a:avLst/>
@@ -9859,7 +15302,7 @@
         <p:spPr>
           <a:xfrm>
             <a:off x="9189720" y="1755648"/>
-            <a:ext cx="2834640" cy="4645152"/>
+            <a:ext cx="2834640" cy="4096512"/>
           </a:xfrm>
           <a:prstGeom prst="rect">
             <a:avLst/>
@@ -9904,7 +15347,7 @@
         <p:spPr>
           <a:xfrm>
             <a:off x="9299448" y="1828800"/>
-            <a:ext cx="2615184" cy="4480560"/>
+            <a:ext cx="2615184" cy="3931920"/>
           </a:xfrm>
           <a:prstGeom prst="rect">
             <a:avLst/>
@@ -9928,6 +15371,83 @@
 ●  Laporan rapat langsung bisa ditampilkan dari aplikasi
 ●  UP3 hemat waktu koordinasi karena data sudah terpusat
 ●  Pengambilan keputusan berbasis data, bukan laporan lisan</a:t>
+            </a:r>
+          </a:p>
+        </p:txBody>
+      </p:sp>
+      <p:sp>
+        <p:nvSpPr>
+          <p:cNvPr id="22" name="Rectangle 21"/>
+          <p:cNvSpPr/>
+          <p:nvPr/>
+        </p:nvSpPr>
+        <p:spPr>
+          <a:xfrm>
+            <a:off x="274320" y="5989320"/>
+            <a:ext cx="11612880" cy="640080"/>
+          </a:xfrm>
+          <a:prstGeom prst="rect">
+            <a:avLst/>
+          </a:prstGeom>
+          <a:solidFill>
+            <a:srgbClr val="004D40"/>
+          </a:solidFill>
+          <a:ln>
+            <a:noFill/>
+          </a:ln>
+        </p:spPr>
+        <p:style>
+          <a:lnRef idx="1">
+            <a:schemeClr val="accent1"/>
+          </a:lnRef>
+          <a:fillRef idx="3">
+            <a:schemeClr val="accent1"/>
+          </a:fillRef>
+          <a:effectRef idx="2">
+            <a:schemeClr val="accent1"/>
+          </a:effectRef>
+          <a:fontRef idx="minor">
+            <a:schemeClr val="lt1"/>
+          </a:fontRef>
+        </p:style>
+        <p:txBody>
+          <a:bodyPr rtlCol="0" anchor="ctr"/>
+          <a:lstStyle/>
+          <a:p>
+            <a:pPr algn="ctr"/>
+          </a:p>
+        </p:txBody>
+      </p:sp>
+      <p:sp>
+        <p:nvSpPr>
+          <p:cNvPr id="23" name="TextBox 22"/>
+          <p:cNvSpPr txBox="1"/>
+          <p:nvPr/>
+        </p:nvSpPr>
+        <p:spPr>
+          <a:xfrm>
+            <a:off x="457200" y="6053328"/>
+            <a:ext cx="11247120" cy="512064"/>
+          </a:xfrm>
+          <a:prstGeom prst="rect">
+            <a:avLst/>
+          </a:prstGeom>
+          <a:noFill/>
+        </p:spPr>
+        <p:txBody>
+          <a:bodyPr wrap="square">
+            <a:spAutoFit/>
+          </a:bodyPr>
+          <a:lstStyle/>
+          <a:p>
+            <a:pPr algn="ctr"/>
+            <a:r>
+              <a:rPr sz="1300" b="1" i="0">
+                <a:solidFill>
+                  <a:srgbClr val="FFD600"/>
+                </a:solidFill>
+              </a:rPr>
+              <a:t>1 Platform  →  4 Modul  →  4 ULP  →  Banyak Tim  →  Dampak Berganda bagi PLN &amp; Pelanggan</a:t>
             </a:r>
           </a:p>
         </p:txBody>
@@ -10189,7 +15709,7 @@
         </p:nvSpPr>
         <p:spPr>
           <a:xfrm>
-            <a:off x="274320" y="2286000"/>
+            <a:off x="274320" y="2240280"/>
             <a:ext cx="2834640" cy="384048"/>
           </a:xfrm>
           <a:prstGeom prst="rect">
@@ -10232,7 +15752,7 @@
         </p:nvSpPr>
         <p:spPr>
           <a:xfrm>
-            <a:off x="365760" y="2304288"/>
+            <a:off x="365760" y="2258568"/>
             <a:ext cx="2651760" cy="347472"/>
           </a:xfrm>
           <a:prstGeom prst="rect">
@@ -10266,8 +15786,8 @@
         </p:nvSpPr>
         <p:spPr>
           <a:xfrm>
-            <a:off x="274320" y="2670048"/>
-            <a:ext cx="2834640" cy="3730752"/>
+            <a:off x="274320" y="2624328"/>
+            <a:ext cx="2834640" cy="3044952"/>
           </a:xfrm>
           <a:prstGeom prst="rect">
             <a:avLst/>
@@ -10311,8 +15831,8 @@
         </p:nvSpPr>
         <p:spPr>
           <a:xfrm>
-            <a:off x="384048" y="2743200"/>
-            <a:ext cx="2615184" cy="3566160"/>
+            <a:off x="384048" y="2697480"/>
+            <a:ext cx="2615184" cy="2880360"/>
           </a:xfrm>
           <a:prstGeom prst="rect">
             <a:avLst/>
@@ -10348,7 +15868,7 @@
         </p:nvSpPr>
         <p:spPr>
           <a:xfrm>
-            <a:off x="3246120" y="2286000"/>
+            <a:off x="3246120" y="2240280"/>
             <a:ext cx="2834640" cy="384048"/>
           </a:xfrm>
           <a:prstGeom prst="rect">
@@ -10391,7 +15911,7 @@
         </p:nvSpPr>
         <p:spPr>
           <a:xfrm>
-            <a:off x="3337560" y="2304288"/>
+            <a:off x="3337560" y="2258568"/>
             <a:ext cx="2651760" cy="347472"/>
           </a:xfrm>
           <a:prstGeom prst="rect">
@@ -10425,8 +15945,8 @@
         </p:nvSpPr>
         <p:spPr>
           <a:xfrm>
-            <a:off x="3246120" y="2670048"/>
-            <a:ext cx="2834640" cy="3730752"/>
+            <a:off x="3246120" y="2624328"/>
+            <a:ext cx="2834640" cy="3044952"/>
           </a:xfrm>
           <a:prstGeom prst="rect">
             <a:avLst/>
@@ -10470,8 +15990,8 @@
         </p:nvSpPr>
         <p:spPr>
           <a:xfrm>
-            <a:off x="3355848" y="2743200"/>
-            <a:ext cx="2615184" cy="3566160"/>
+            <a:off x="3355848" y="2697480"/>
+            <a:ext cx="2615184" cy="2880360"/>
           </a:xfrm>
           <a:prstGeom prst="rect">
             <a:avLst/>
@@ -10507,7 +16027,7 @@
         </p:nvSpPr>
         <p:spPr>
           <a:xfrm>
-            <a:off x="6217920" y="2286000"/>
+            <a:off x="6217920" y="2240280"/>
             <a:ext cx="2834640" cy="384048"/>
           </a:xfrm>
           <a:prstGeom prst="rect">
@@ -10550,7 +16070,7 @@
         </p:nvSpPr>
         <p:spPr>
           <a:xfrm>
-            <a:off x="6309360" y="2304288"/>
+            <a:off x="6309360" y="2258568"/>
             <a:ext cx="2651760" cy="347472"/>
           </a:xfrm>
           <a:prstGeom prst="rect">
@@ -10584,8 +16104,8 @@
         </p:nvSpPr>
         <p:spPr>
           <a:xfrm>
-            <a:off x="6217920" y="2670048"/>
-            <a:ext cx="2834640" cy="3730752"/>
+            <a:off x="6217920" y="2624328"/>
+            <a:ext cx="2834640" cy="3044952"/>
           </a:xfrm>
           <a:prstGeom prst="rect">
             <a:avLst/>
@@ -10629,8 +16149,8 @@
         </p:nvSpPr>
         <p:spPr>
           <a:xfrm>
-            <a:off x="6327648" y="2743200"/>
-            <a:ext cx="2615184" cy="3566160"/>
+            <a:off x="6327648" y="2697480"/>
+            <a:ext cx="2615184" cy="2880360"/>
           </a:xfrm>
           <a:prstGeom prst="rect">
             <a:avLst/>
@@ -10666,7 +16186,7 @@
         </p:nvSpPr>
         <p:spPr>
           <a:xfrm>
-            <a:off x="9189720" y="2286000"/>
+            <a:off x="9189720" y="2240280"/>
             <a:ext cx="2834640" cy="384048"/>
           </a:xfrm>
           <a:prstGeom prst="rect">
@@ -10709,7 +16229,7 @@
         </p:nvSpPr>
         <p:spPr>
           <a:xfrm>
-            <a:off x="9281160" y="2304288"/>
+            <a:off x="9281160" y="2258568"/>
             <a:ext cx="2651760" cy="347472"/>
           </a:xfrm>
           <a:prstGeom prst="rect">
@@ -10743,8 +16263,8 @@
         </p:nvSpPr>
         <p:spPr>
           <a:xfrm>
-            <a:off x="9189720" y="2670048"/>
-            <a:ext cx="2834640" cy="3730752"/>
+            <a:off x="9189720" y="2624328"/>
+            <a:ext cx="2834640" cy="3044952"/>
           </a:xfrm>
           <a:prstGeom prst="rect">
             <a:avLst/>
@@ -10788,8 +16308,8 @@
         </p:nvSpPr>
         <p:spPr>
           <a:xfrm>
-            <a:off x="9299448" y="2743200"/>
-            <a:ext cx="2615184" cy="3566160"/>
+            <a:off x="9299448" y="2697480"/>
+            <a:ext cx="2615184" cy="2880360"/>
           </a:xfrm>
           <a:prstGeom prst="rect">
             <a:avLst/>
@@ -10813,6 +16333,1099 @@
 ●  AI prediksi anomali sebelum terjadi gangguan
 ●  Integrasi P2TL dan data pelanggan
 ●  Mobile app native (Android/iOS)</a:t>
+            </a:r>
+          </a:p>
+        </p:txBody>
+      </p:sp>
+      <p:sp>
+        <p:nvSpPr>
+          <p:cNvPr id="24" name="Rectangle 23"/>
+          <p:cNvSpPr/>
+          <p:nvPr/>
+        </p:nvSpPr>
+        <p:spPr>
+          <a:xfrm>
+            <a:off x="274320" y="5559552"/>
+            <a:ext cx="11612880" cy="201168"/>
+          </a:xfrm>
+          <a:prstGeom prst="rect">
+            <a:avLst/>
+          </a:prstGeom>
+          <a:solidFill>
+            <a:srgbClr val="004D40"/>
+          </a:solidFill>
+          <a:ln>
+            <a:noFill/>
+          </a:ln>
+        </p:spPr>
+        <p:style>
+          <a:lnRef idx="1">
+            <a:schemeClr val="accent1"/>
+          </a:lnRef>
+          <a:fillRef idx="3">
+            <a:schemeClr val="accent1"/>
+          </a:fillRef>
+          <a:effectRef idx="2">
+            <a:schemeClr val="accent1"/>
+          </a:effectRef>
+          <a:fontRef idx="minor">
+            <a:schemeClr val="lt1"/>
+          </a:fontRef>
+        </p:style>
+        <p:txBody>
+          <a:bodyPr rtlCol="0" anchor="ctr"/>
+          <a:lstStyle/>
+          <a:p>
+            <a:pPr algn="ctr"/>
+          </a:p>
+        </p:txBody>
+      </p:sp>
+      <p:sp>
+        <p:nvSpPr>
+          <p:cNvPr id="25" name="TextBox 24"/>
+          <p:cNvSpPr txBox="1"/>
+          <p:nvPr/>
+        </p:nvSpPr>
+        <p:spPr>
+          <a:xfrm>
+            <a:off x="320040" y="5577840"/>
+            <a:ext cx="4572000" cy="182880"/>
+          </a:xfrm>
+          <a:prstGeom prst="rect">
+            <a:avLst/>
+          </a:prstGeom>
+          <a:noFill/>
+        </p:spPr>
+        <p:txBody>
+          <a:bodyPr wrap="square">
+            <a:spAutoFit/>
+          </a:bodyPr>
+          <a:lstStyle/>
+          <a:p>
+            <a:pPr algn="l"/>
+            <a:r>
+              <a:rPr sz="800" b="1" i="0">
+                <a:solidFill>
+                  <a:srgbClr val="FFFFFF"/>
+                </a:solidFill>
+              </a:rPr>
+              <a:t>ROADMAP REPLIKASI</a:t>
+            </a:r>
+          </a:p>
+        </p:txBody>
+      </p:sp>
+      <p:sp>
+        <p:nvSpPr>
+          <p:cNvPr id="26" name="Rectangle 25"/>
+          <p:cNvSpPr/>
+          <p:nvPr/>
+        </p:nvSpPr>
+        <p:spPr>
+          <a:xfrm>
+            <a:off x="242316" y="5760720"/>
+            <a:ext cx="3657600" cy="896112"/>
+          </a:xfrm>
+          <a:prstGeom prst="rect">
+            <a:avLst/>
+          </a:prstGeom>
+          <a:solidFill>
+            <a:srgbClr val="004D40"/>
+          </a:solidFill>
+          <a:ln w="12700">
+            <a:solidFill>
+              <a:srgbClr val="FFFFFF"/>
+            </a:solidFill>
+          </a:ln>
+        </p:spPr>
+        <p:style>
+          <a:lnRef idx="1">
+            <a:schemeClr val="accent1"/>
+          </a:lnRef>
+          <a:fillRef idx="3">
+            <a:schemeClr val="accent1"/>
+          </a:fillRef>
+          <a:effectRef idx="2">
+            <a:schemeClr val="accent1"/>
+          </a:effectRef>
+          <a:fontRef idx="minor">
+            <a:schemeClr val="lt1"/>
+          </a:fontRef>
+        </p:style>
+        <p:txBody>
+          <a:bodyPr rtlCol="0" anchor="ctr"/>
+          <a:lstStyle/>
+          <a:p>
+            <a:pPr algn="ctr"/>
+          </a:p>
+        </p:txBody>
+      </p:sp>
+      <p:sp>
+        <p:nvSpPr>
+          <p:cNvPr id="27" name="Rectangle 26"/>
+          <p:cNvSpPr/>
+          <p:nvPr/>
+        </p:nvSpPr>
+        <p:spPr>
+          <a:xfrm>
+            <a:off x="333756" y="5833872"/>
+            <a:ext cx="731520" cy="256032"/>
+          </a:xfrm>
+          <a:prstGeom prst="rect">
+            <a:avLst/>
+          </a:prstGeom>
+          <a:solidFill>
+            <a:srgbClr val="1E8B4C"/>
+          </a:solidFill>
+          <a:ln>
+            <a:noFill/>
+          </a:ln>
+        </p:spPr>
+        <p:style>
+          <a:lnRef idx="1">
+            <a:schemeClr val="accent1"/>
+          </a:lnRef>
+          <a:fillRef idx="3">
+            <a:schemeClr val="accent1"/>
+          </a:fillRef>
+          <a:effectRef idx="2">
+            <a:schemeClr val="accent1"/>
+          </a:effectRef>
+          <a:fontRef idx="minor">
+            <a:schemeClr val="lt1"/>
+          </a:fontRef>
+        </p:style>
+        <p:txBody>
+          <a:bodyPr rtlCol="0" anchor="ctr"/>
+          <a:lstStyle/>
+          <a:p>
+            <a:pPr algn="ctr"/>
+          </a:p>
+        </p:txBody>
+      </p:sp>
+      <p:sp>
+        <p:nvSpPr>
+          <p:cNvPr id="28" name="TextBox 27"/>
+          <p:cNvSpPr txBox="1"/>
+          <p:nvPr/>
+        </p:nvSpPr>
+        <p:spPr>
+          <a:xfrm>
+            <a:off x="333756" y="5833872"/>
+            <a:ext cx="731520" cy="256032"/>
+          </a:xfrm>
+          <a:prstGeom prst="rect">
+            <a:avLst/>
+          </a:prstGeom>
+          <a:noFill/>
+        </p:spPr>
+        <p:txBody>
+          <a:bodyPr wrap="square">
+            <a:spAutoFit/>
+          </a:bodyPr>
+          <a:lstStyle/>
+          <a:p>
+            <a:pPr algn="ctr"/>
+            <a:r>
+              <a:rPr sz="800" b="1" i="0">
+                <a:solidFill>
+                  <a:srgbClr val="FFFFFF"/>
+                </a:solidFill>
+              </a:rPr>
+              <a:t>✓ Aktif</a:t>
+            </a:r>
+          </a:p>
+        </p:txBody>
+      </p:sp>
+      <p:sp>
+        <p:nvSpPr>
+          <p:cNvPr id="29" name="TextBox 28"/>
+          <p:cNvSpPr txBox="1"/>
+          <p:nvPr/>
+        </p:nvSpPr>
+        <p:spPr>
+          <a:xfrm>
+            <a:off x="1110996" y="5833872"/>
+            <a:ext cx="2651760" cy="274320"/>
+          </a:xfrm>
+          <a:prstGeom prst="rect">
+            <a:avLst/>
+          </a:prstGeom>
+          <a:noFill/>
+        </p:spPr>
+        <p:txBody>
+          <a:bodyPr wrap="square">
+            <a:spAutoFit/>
+          </a:bodyPr>
+          <a:lstStyle/>
+          <a:p>
+            <a:pPr algn="l"/>
+            <a:r>
+              <a:rPr sz="1000" b="1" i="0">
+                <a:solidFill>
+                  <a:srgbClr val="FFD600"/>
+                </a:solidFill>
+              </a:rPr>
+              <a:t>FASE 1</a:t>
+            </a:r>
+          </a:p>
+        </p:txBody>
+      </p:sp>
+      <p:sp>
+        <p:nvSpPr>
+          <p:cNvPr id="30" name="TextBox 29"/>
+          <p:cNvSpPr txBox="1"/>
+          <p:nvPr/>
+        </p:nvSpPr>
+        <p:spPr>
+          <a:xfrm>
+            <a:off x="333756" y="6144768"/>
+            <a:ext cx="3474720" cy="347472"/>
+          </a:xfrm>
+          <a:prstGeom prst="rect">
+            <a:avLst/>
+          </a:prstGeom>
+          <a:noFill/>
+        </p:spPr>
+        <p:txBody>
+          <a:bodyPr wrap="square">
+            <a:spAutoFit/>
+          </a:bodyPr>
+          <a:lstStyle/>
+          <a:p>
+            <a:pPr algn="l"/>
+            <a:r>
+              <a:rPr sz="1200" b="1" i="0">
+                <a:solidFill>
+                  <a:srgbClr val="FFFFFF"/>
+                </a:solidFill>
+              </a:rPr>
+              <a:t>UP3 Mataram — 4 ULP</a:t>
+            </a:r>
+          </a:p>
+        </p:txBody>
+      </p:sp>
+      <p:sp>
+        <p:nvSpPr>
+          <p:cNvPr id="31" name="TextBox 30"/>
+          <p:cNvSpPr txBox="1"/>
+          <p:nvPr/>
+        </p:nvSpPr>
+        <p:spPr>
+          <a:xfrm>
+            <a:off x="333756" y="6510528"/>
+            <a:ext cx="3474720" cy="73152"/>
+          </a:xfrm>
+          <a:prstGeom prst="rect">
+            <a:avLst/>
+          </a:prstGeom>
+          <a:noFill/>
+        </p:spPr>
+        <p:txBody>
+          <a:bodyPr wrap="square">
+            <a:spAutoFit/>
+          </a:bodyPr>
+          <a:lstStyle/>
+          <a:p>
+            <a:pPr algn="l"/>
+            <a:r>
+              <a:rPr sz="900" b="0" i="0">
+                <a:solidFill>
+                  <a:srgbClr val="B2DFDB"/>
+                </a:solidFill>
+              </a:rPr>
+              <a:t>Ampenan · Cakranegara · Gerung · Tanjung</a:t>
+            </a:r>
+          </a:p>
+        </p:txBody>
+      </p:sp>
+      <p:sp>
+        <p:nvSpPr>
+          <p:cNvPr id="32" name="Rectangle 31"/>
+          <p:cNvSpPr/>
+          <p:nvPr/>
+        </p:nvSpPr>
+        <p:spPr>
+          <a:xfrm>
+            <a:off x="3899916" y="6153912"/>
+            <a:ext cx="274320" cy="109728"/>
+          </a:xfrm>
+          <a:prstGeom prst="rect">
+            <a:avLst/>
+          </a:prstGeom>
+          <a:solidFill>
+            <a:srgbClr val="00897B"/>
+          </a:solidFill>
+          <a:ln>
+            <a:noFill/>
+          </a:ln>
+        </p:spPr>
+        <p:style>
+          <a:lnRef idx="1">
+            <a:schemeClr val="accent1"/>
+          </a:lnRef>
+          <a:fillRef idx="3">
+            <a:schemeClr val="accent1"/>
+          </a:fillRef>
+          <a:effectRef idx="2">
+            <a:schemeClr val="accent1"/>
+          </a:effectRef>
+          <a:fontRef idx="minor">
+            <a:schemeClr val="lt1"/>
+          </a:fontRef>
+        </p:style>
+        <p:txBody>
+          <a:bodyPr rtlCol="0" anchor="ctr"/>
+          <a:lstStyle/>
+          <a:p>
+            <a:pPr algn="ctr"/>
+          </a:p>
+        </p:txBody>
+      </p:sp>
+      <p:sp>
+        <p:nvSpPr>
+          <p:cNvPr id="33" name="Rectangle 32"/>
+          <p:cNvSpPr/>
+          <p:nvPr/>
+        </p:nvSpPr>
+        <p:spPr>
+          <a:xfrm>
+            <a:off x="4101084" y="6080760"/>
+            <a:ext cx="73152" cy="256032"/>
+          </a:xfrm>
+          <a:prstGeom prst="rect">
+            <a:avLst/>
+          </a:prstGeom>
+          <a:solidFill>
+            <a:srgbClr val="00897B"/>
+          </a:solidFill>
+          <a:ln>
+            <a:noFill/>
+          </a:ln>
+        </p:spPr>
+        <p:style>
+          <a:lnRef idx="1">
+            <a:schemeClr val="accent1"/>
+          </a:lnRef>
+          <a:fillRef idx="3">
+            <a:schemeClr val="accent1"/>
+          </a:fillRef>
+          <a:effectRef idx="2">
+            <a:schemeClr val="accent1"/>
+          </a:effectRef>
+          <a:fontRef idx="minor">
+            <a:schemeClr val="lt1"/>
+          </a:fontRef>
+        </p:style>
+        <p:txBody>
+          <a:bodyPr rtlCol="0" anchor="ctr"/>
+          <a:lstStyle/>
+          <a:p>
+            <a:pPr algn="ctr"/>
+          </a:p>
+        </p:txBody>
+      </p:sp>
+      <p:sp>
+        <p:nvSpPr>
+          <p:cNvPr id="34" name="Rectangle 33"/>
+          <p:cNvSpPr/>
+          <p:nvPr/>
+        </p:nvSpPr>
+        <p:spPr>
+          <a:xfrm>
+            <a:off x="4174236" y="6135624"/>
+            <a:ext cx="54864" cy="146304"/>
+          </a:xfrm>
+          <a:prstGeom prst="rect">
+            <a:avLst/>
+          </a:prstGeom>
+          <a:solidFill>
+            <a:srgbClr val="00897B"/>
+          </a:solidFill>
+          <a:ln>
+            <a:noFill/>
+          </a:ln>
+        </p:spPr>
+        <p:style>
+          <a:lnRef idx="1">
+            <a:schemeClr val="accent1"/>
+          </a:lnRef>
+          <a:fillRef idx="3">
+            <a:schemeClr val="accent1"/>
+          </a:fillRef>
+          <a:effectRef idx="2">
+            <a:schemeClr val="accent1"/>
+          </a:effectRef>
+          <a:fontRef idx="minor">
+            <a:schemeClr val="lt1"/>
+          </a:fontRef>
+        </p:style>
+        <p:txBody>
+          <a:bodyPr rtlCol="0" anchor="ctr"/>
+          <a:lstStyle/>
+          <a:p>
+            <a:pPr algn="ctr"/>
+          </a:p>
+        </p:txBody>
+      </p:sp>
+      <p:sp>
+        <p:nvSpPr>
+          <p:cNvPr id="35" name="Rectangle 34"/>
+          <p:cNvSpPr/>
+          <p:nvPr/>
+        </p:nvSpPr>
+        <p:spPr>
+          <a:xfrm>
+            <a:off x="4229100" y="6172200"/>
+            <a:ext cx="36576" cy="73152"/>
+          </a:xfrm>
+          <a:prstGeom prst="rect">
+            <a:avLst/>
+          </a:prstGeom>
+          <a:solidFill>
+            <a:srgbClr val="00897B"/>
+          </a:solidFill>
+          <a:ln>
+            <a:noFill/>
+          </a:ln>
+        </p:spPr>
+        <p:style>
+          <a:lnRef idx="1">
+            <a:schemeClr val="accent1"/>
+          </a:lnRef>
+          <a:fillRef idx="3">
+            <a:schemeClr val="accent1"/>
+          </a:fillRef>
+          <a:effectRef idx="2">
+            <a:schemeClr val="accent1"/>
+          </a:effectRef>
+          <a:fontRef idx="minor">
+            <a:schemeClr val="lt1"/>
+          </a:fontRef>
+        </p:style>
+        <p:txBody>
+          <a:bodyPr rtlCol="0" anchor="ctr"/>
+          <a:lstStyle/>
+          <a:p>
+            <a:pPr algn="ctr"/>
+          </a:p>
+        </p:txBody>
+      </p:sp>
+      <p:sp>
+        <p:nvSpPr>
+          <p:cNvPr id="36" name="Rectangle 35"/>
+          <p:cNvSpPr/>
+          <p:nvPr/>
+        </p:nvSpPr>
+        <p:spPr>
+          <a:xfrm>
+            <a:off x="4265676" y="5760720"/>
+            <a:ext cx="3657600" cy="896112"/>
+          </a:xfrm>
+          <a:prstGeom prst="rect">
+            <a:avLst/>
+          </a:prstGeom>
+          <a:solidFill>
+            <a:srgbClr val="00897B"/>
+          </a:solidFill>
+          <a:ln w="12700">
+            <a:solidFill>
+              <a:srgbClr val="FFFFFF"/>
+            </a:solidFill>
+          </a:ln>
+        </p:spPr>
+        <p:style>
+          <a:lnRef idx="1">
+            <a:schemeClr val="accent1"/>
+          </a:lnRef>
+          <a:fillRef idx="3">
+            <a:schemeClr val="accent1"/>
+          </a:fillRef>
+          <a:effectRef idx="2">
+            <a:schemeClr val="accent1"/>
+          </a:effectRef>
+          <a:fontRef idx="minor">
+            <a:schemeClr val="lt1"/>
+          </a:fontRef>
+        </p:style>
+        <p:txBody>
+          <a:bodyPr rtlCol="0" anchor="ctr"/>
+          <a:lstStyle/>
+          <a:p>
+            <a:pPr algn="ctr"/>
+          </a:p>
+        </p:txBody>
+      </p:sp>
+      <p:sp>
+        <p:nvSpPr>
+          <p:cNvPr id="37" name="Rectangle 36"/>
+          <p:cNvSpPr/>
+          <p:nvPr/>
+        </p:nvSpPr>
+        <p:spPr>
+          <a:xfrm>
+            <a:off x="4357116" y="5833872"/>
+            <a:ext cx="731520" cy="256032"/>
+          </a:xfrm>
+          <a:prstGeom prst="rect">
+            <a:avLst/>
+          </a:prstGeom>
+          <a:solidFill>
+            <a:srgbClr val="F59E0E"/>
+          </a:solidFill>
+          <a:ln>
+            <a:noFill/>
+          </a:ln>
+        </p:spPr>
+        <p:style>
+          <a:lnRef idx="1">
+            <a:schemeClr val="accent1"/>
+          </a:lnRef>
+          <a:fillRef idx="3">
+            <a:schemeClr val="accent1"/>
+          </a:fillRef>
+          <a:effectRef idx="2">
+            <a:schemeClr val="accent1"/>
+          </a:effectRef>
+          <a:fontRef idx="minor">
+            <a:schemeClr val="lt1"/>
+          </a:fontRef>
+        </p:style>
+        <p:txBody>
+          <a:bodyPr rtlCol="0" anchor="ctr"/>
+          <a:lstStyle/>
+          <a:p>
+            <a:pPr algn="ctr"/>
+          </a:p>
+        </p:txBody>
+      </p:sp>
+      <p:sp>
+        <p:nvSpPr>
+          <p:cNvPr id="38" name="TextBox 37"/>
+          <p:cNvSpPr txBox="1"/>
+          <p:nvPr/>
+        </p:nvSpPr>
+        <p:spPr>
+          <a:xfrm>
+            <a:off x="4357116" y="5833872"/>
+            <a:ext cx="731520" cy="256032"/>
+          </a:xfrm>
+          <a:prstGeom prst="rect">
+            <a:avLst/>
+          </a:prstGeom>
+          <a:noFill/>
+        </p:spPr>
+        <p:txBody>
+          <a:bodyPr wrap="square">
+            <a:spAutoFit/>
+          </a:bodyPr>
+          <a:lstStyle/>
+          <a:p>
+            <a:pPr algn="ctr"/>
+            <a:r>
+              <a:rPr sz="800" b="1" i="0">
+                <a:solidFill>
+                  <a:srgbClr val="FFFFFF"/>
+                </a:solidFill>
+              </a:rPr>
+              <a:t>→ Target</a:t>
+            </a:r>
+          </a:p>
+        </p:txBody>
+      </p:sp>
+      <p:sp>
+        <p:nvSpPr>
+          <p:cNvPr id="39" name="TextBox 38"/>
+          <p:cNvSpPr txBox="1"/>
+          <p:nvPr/>
+        </p:nvSpPr>
+        <p:spPr>
+          <a:xfrm>
+            <a:off x="5134356" y="5833872"/>
+            <a:ext cx="2651760" cy="274320"/>
+          </a:xfrm>
+          <a:prstGeom prst="rect">
+            <a:avLst/>
+          </a:prstGeom>
+          <a:noFill/>
+        </p:spPr>
+        <p:txBody>
+          <a:bodyPr wrap="square">
+            <a:spAutoFit/>
+          </a:bodyPr>
+          <a:lstStyle/>
+          <a:p>
+            <a:pPr algn="l"/>
+            <a:r>
+              <a:rPr sz="1000" b="1" i="0">
+                <a:solidFill>
+                  <a:srgbClr val="FFD600"/>
+                </a:solidFill>
+              </a:rPr>
+              <a:t>FASE 2</a:t>
+            </a:r>
+          </a:p>
+        </p:txBody>
+      </p:sp>
+      <p:sp>
+        <p:nvSpPr>
+          <p:cNvPr id="40" name="TextBox 39"/>
+          <p:cNvSpPr txBox="1"/>
+          <p:nvPr/>
+        </p:nvSpPr>
+        <p:spPr>
+          <a:xfrm>
+            <a:off x="4357116" y="6144768"/>
+            <a:ext cx="3474720" cy="347472"/>
+          </a:xfrm>
+          <a:prstGeom prst="rect">
+            <a:avLst/>
+          </a:prstGeom>
+          <a:noFill/>
+        </p:spPr>
+        <p:txBody>
+          <a:bodyPr wrap="square">
+            <a:spAutoFit/>
+          </a:bodyPr>
+          <a:lstStyle/>
+          <a:p>
+            <a:pPr algn="l"/>
+            <a:r>
+              <a:rPr sz="1200" b="1" i="0">
+                <a:solidFill>
+                  <a:srgbClr val="FFFFFF"/>
+                </a:solidFill>
+              </a:rPr>
+              <a:t>Seluruh UP3 se-NTB</a:t>
+            </a:r>
+          </a:p>
+        </p:txBody>
+      </p:sp>
+      <p:sp>
+        <p:nvSpPr>
+          <p:cNvPr id="41" name="TextBox 40"/>
+          <p:cNvSpPr txBox="1"/>
+          <p:nvPr/>
+        </p:nvSpPr>
+        <p:spPr>
+          <a:xfrm>
+            <a:off x="4357116" y="6510528"/>
+            <a:ext cx="3474720" cy="73152"/>
+          </a:xfrm>
+          <a:prstGeom prst="rect">
+            <a:avLst/>
+          </a:prstGeom>
+          <a:noFill/>
+        </p:spPr>
+        <p:txBody>
+          <a:bodyPr wrap="square">
+            <a:spAutoFit/>
+          </a:bodyPr>
+          <a:lstStyle/>
+          <a:p>
+            <a:pPr algn="l"/>
+            <a:r>
+              <a:rPr sz="900" b="0" i="0">
+                <a:solidFill>
+                  <a:srgbClr val="B2DFDB"/>
+                </a:solidFill>
+              </a:rPr>
+              <a:t>PLN UID NTB — semua unit di Lombok &amp; Sumbawa</a:t>
+            </a:r>
+          </a:p>
+        </p:txBody>
+      </p:sp>
+      <p:sp>
+        <p:nvSpPr>
+          <p:cNvPr id="42" name="Rectangle 41"/>
+          <p:cNvSpPr/>
+          <p:nvPr/>
+        </p:nvSpPr>
+        <p:spPr>
+          <a:xfrm>
+            <a:off x="7923276" y="6153912"/>
+            <a:ext cx="274320" cy="109728"/>
+          </a:xfrm>
+          <a:prstGeom prst="rect">
+            <a:avLst/>
+          </a:prstGeom>
+          <a:solidFill>
+            <a:srgbClr val="00897B"/>
+          </a:solidFill>
+          <a:ln>
+            <a:noFill/>
+          </a:ln>
+        </p:spPr>
+        <p:style>
+          <a:lnRef idx="1">
+            <a:schemeClr val="accent1"/>
+          </a:lnRef>
+          <a:fillRef idx="3">
+            <a:schemeClr val="accent1"/>
+          </a:fillRef>
+          <a:effectRef idx="2">
+            <a:schemeClr val="accent1"/>
+          </a:effectRef>
+          <a:fontRef idx="minor">
+            <a:schemeClr val="lt1"/>
+          </a:fontRef>
+        </p:style>
+        <p:txBody>
+          <a:bodyPr rtlCol="0" anchor="ctr"/>
+          <a:lstStyle/>
+          <a:p>
+            <a:pPr algn="ctr"/>
+          </a:p>
+        </p:txBody>
+      </p:sp>
+      <p:sp>
+        <p:nvSpPr>
+          <p:cNvPr id="43" name="Rectangle 42"/>
+          <p:cNvSpPr/>
+          <p:nvPr/>
+        </p:nvSpPr>
+        <p:spPr>
+          <a:xfrm>
+            <a:off x="8124444" y="6080760"/>
+            <a:ext cx="73152" cy="256032"/>
+          </a:xfrm>
+          <a:prstGeom prst="rect">
+            <a:avLst/>
+          </a:prstGeom>
+          <a:solidFill>
+            <a:srgbClr val="00897B"/>
+          </a:solidFill>
+          <a:ln>
+            <a:noFill/>
+          </a:ln>
+        </p:spPr>
+        <p:style>
+          <a:lnRef idx="1">
+            <a:schemeClr val="accent1"/>
+          </a:lnRef>
+          <a:fillRef idx="3">
+            <a:schemeClr val="accent1"/>
+          </a:fillRef>
+          <a:effectRef idx="2">
+            <a:schemeClr val="accent1"/>
+          </a:effectRef>
+          <a:fontRef idx="minor">
+            <a:schemeClr val="lt1"/>
+          </a:fontRef>
+        </p:style>
+        <p:txBody>
+          <a:bodyPr rtlCol="0" anchor="ctr"/>
+          <a:lstStyle/>
+          <a:p>
+            <a:pPr algn="ctr"/>
+          </a:p>
+        </p:txBody>
+      </p:sp>
+      <p:sp>
+        <p:nvSpPr>
+          <p:cNvPr id="44" name="Rectangle 43"/>
+          <p:cNvSpPr/>
+          <p:nvPr/>
+        </p:nvSpPr>
+        <p:spPr>
+          <a:xfrm>
+            <a:off x="8197596" y="6135624"/>
+            <a:ext cx="54864" cy="146304"/>
+          </a:xfrm>
+          <a:prstGeom prst="rect">
+            <a:avLst/>
+          </a:prstGeom>
+          <a:solidFill>
+            <a:srgbClr val="00897B"/>
+          </a:solidFill>
+          <a:ln>
+            <a:noFill/>
+          </a:ln>
+        </p:spPr>
+        <p:style>
+          <a:lnRef idx="1">
+            <a:schemeClr val="accent1"/>
+          </a:lnRef>
+          <a:fillRef idx="3">
+            <a:schemeClr val="accent1"/>
+          </a:fillRef>
+          <a:effectRef idx="2">
+            <a:schemeClr val="accent1"/>
+          </a:effectRef>
+          <a:fontRef idx="minor">
+            <a:schemeClr val="lt1"/>
+          </a:fontRef>
+        </p:style>
+        <p:txBody>
+          <a:bodyPr rtlCol="0" anchor="ctr"/>
+          <a:lstStyle/>
+          <a:p>
+            <a:pPr algn="ctr"/>
+          </a:p>
+        </p:txBody>
+      </p:sp>
+      <p:sp>
+        <p:nvSpPr>
+          <p:cNvPr id="45" name="Rectangle 44"/>
+          <p:cNvSpPr/>
+          <p:nvPr/>
+        </p:nvSpPr>
+        <p:spPr>
+          <a:xfrm>
+            <a:off x="8252460" y="6172200"/>
+            <a:ext cx="36576" cy="73152"/>
+          </a:xfrm>
+          <a:prstGeom prst="rect">
+            <a:avLst/>
+          </a:prstGeom>
+          <a:solidFill>
+            <a:srgbClr val="00897B"/>
+          </a:solidFill>
+          <a:ln>
+            <a:noFill/>
+          </a:ln>
+        </p:spPr>
+        <p:style>
+          <a:lnRef idx="1">
+            <a:schemeClr val="accent1"/>
+          </a:lnRef>
+          <a:fillRef idx="3">
+            <a:schemeClr val="accent1"/>
+          </a:fillRef>
+          <a:effectRef idx="2">
+            <a:schemeClr val="accent1"/>
+          </a:effectRef>
+          <a:fontRef idx="minor">
+            <a:schemeClr val="lt1"/>
+          </a:fontRef>
+        </p:style>
+        <p:txBody>
+          <a:bodyPr rtlCol="0" anchor="ctr"/>
+          <a:lstStyle/>
+          <a:p>
+            <a:pPr algn="ctr"/>
+          </a:p>
+        </p:txBody>
+      </p:sp>
+      <p:sp>
+        <p:nvSpPr>
+          <p:cNvPr id="46" name="Rectangle 45"/>
+          <p:cNvSpPr/>
+          <p:nvPr/>
+        </p:nvSpPr>
+        <p:spPr>
+          <a:xfrm>
+            <a:off x="8289036" y="5760720"/>
+            <a:ext cx="3657600" cy="896112"/>
+          </a:xfrm>
+          <a:prstGeom prst="rect">
+            <a:avLst/>
+          </a:prstGeom>
+          <a:solidFill>
+            <a:srgbClr val="004D40"/>
+          </a:solidFill>
+          <a:ln w="12700">
+            <a:solidFill>
+              <a:srgbClr val="FFFFFF"/>
+            </a:solidFill>
+          </a:ln>
+        </p:spPr>
+        <p:style>
+          <a:lnRef idx="1">
+            <a:schemeClr val="accent1"/>
+          </a:lnRef>
+          <a:fillRef idx="3">
+            <a:schemeClr val="accent1"/>
+          </a:fillRef>
+          <a:effectRef idx="2">
+            <a:schemeClr val="accent1"/>
+          </a:effectRef>
+          <a:fontRef idx="minor">
+            <a:schemeClr val="lt1"/>
+          </a:fontRef>
+        </p:style>
+        <p:txBody>
+          <a:bodyPr rtlCol="0" anchor="ctr"/>
+          <a:lstStyle/>
+          <a:p>
+            <a:pPr algn="ctr"/>
+          </a:p>
+        </p:txBody>
+      </p:sp>
+      <p:sp>
+        <p:nvSpPr>
+          <p:cNvPr id="47" name="Rectangle 46"/>
+          <p:cNvSpPr/>
+          <p:nvPr/>
+        </p:nvSpPr>
+        <p:spPr>
+          <a:xfrm>
+            <a:off x="8380476" y="5833872"/>
+            <a:ext cx="731520" cy="256032"/>
+          </a:xfrm>
+          <a:prstGeom prst="rect">
+            <a:avLst/>
+          </a:prstGeom>
+          <a:solidFill>
+            <a:srgbClr val="F59E0E"/>
+          </a:solidFill>
+          <a:ln>
+            <a:noFill/>
+          </a:ln>
+        </p:spPr>
+        <p:style>
+          <a:lnRef idx="1">
+            <a:schemeClr val="accent1"/>
+          </a:lnRef>
+          <a:fillRef idx="3">
+            <a:schemeClr val="accent1"/>
+          </a:fillRef>
+          <a:effectRef idx="2">
+            <a:schemeClr val="accent1"/>
+          </a:effectRef>
+          <a:fontRef idx="minor">
+            <a:schemeClr val="lt1"/>
+          </a:fontRef>
+        </p:style>
+        <p:txBody>
+          <a:bodyPr rtlCol="0" anchor="ctr"/>
+          <a:lstStyle/>
+          <a:p>
+            <a:pPr algn="ctr"/>
+          </a:p>
+        </p:txBody>
+      </p:sp>
+      <p:sp>
+        <p:nvSpPr>
+          <p:cNvPr id="48" name="TextBox 47"/>
+          <p:cNvSpPr txBox="1"/>
+          <p:nvPr/>
+        </p:nvSpPr>
+        <p:spPr>
+          <a:xfrm>
+            <a:off x="8380476" y="5833872"/>
+            <a:ext cx="731520" cy="256032"/>
+          </a:xfrm>
+          <a:prstGeom prst="rect">
+            <a:avLst/>
+          </a:prstGeom>
+          <a:noFill/>
+        </p:spPr>
+        <p:txBody>
+          <a:bodyPr wrap="square">
+            <a:spAutoFit/>
+          </a:bodyPr>
+          <a:lstStyle/>
+          <a:p>
+            <a:pPr algn="ctr"/>
+            <a:r>
+              <a:rPr sz="800" b="1" i="0">
+                <a:solidFill>
+                  <a:srgbClr val="FFFFFF"/>
+                </a:solidFill>
+              </a:rPr>
+              <a:t>→ Target</a:t>
+            </a:r>
+          </a:p>
+        </p:txBody>
+      </p:sp>
+      <p:sp>
+        <p:nvSpPr>
+          <p:cNvPr id="49" name="TextBox 48"/>
+          <p:cNvSpPr txBox="1"/>
+          <p:nvPr/>
+        </p:nvSpPr>
+        <p:spPr>
+          <a:xfrm>
+            <a:off x="9157716" y="5833872"/>
+            <a:ext cx="2651760" cy="274320"/>
+          </a:xfrm>
+          <a:prstGeom prst="rect">
+            <a:avLst/>
+          </a:prstGeom>
+          <a:noFill/>
+        </p:spPr>
+        <p:txBody>
+          <a:bodyPr wrap="square">
+            <a:spAutoFit/>
+          </a:bodyPr>
+          <a:lstStyle/>
+          <a:p>
+            <a:pPr algn="l"/>
+            <a:r>
+              <a:rPr sz="1000" b="1" i="0">
+                <a:solidFill>
+                  <a:srgbClr val="FFD600"/>
+                </a:solidFill>
+              </a:rPr>
+              <a:t>FASE 3</a:t>
+            </a:r>
+          </a:p>
+        </p:txBody>
+      </p:sp>
+      <p:sp>
+        <p:nvSpPr>
+          <p:cNvPr id="50" name="TextBox 49"/>
+          <p:cNvSpPr txBox="1"/>
+          <p:nvPr/>
+        </p:nvSpPr>
+        <p:spPr>
+          <a:xfrm>
+            <a:off x="8380476" y="6144768"/>
+            <a:ext cx="3474720" cy="347472"/>
+          </a:xfrm>
+          <a:prstGeom prst="rect">
+            <a:avLst/>
+          </a:prstGeom>
+          <a:noFill/>
+        </p:spPr>
+        <p:txBody>
+          <a:bodyPr wrap="square">
+            <a:spAutoFit/>
+          </a:bodyPr>
+          <a:lstStyle/>
+          <a:p>
+            <a:pPr algn="l"/>
+            <a:r>
+              <a:rPr sz="1200" b="1" i="0">
+                <a:solidFill>
+                  <a:srgbClr val="FFFFFF"/>
+                </a:solidFill>
+              </a:rPr>
+              <a:t>Replikasi Nasional</a:t>
+            </a:r>
+          </a:p>
+        </p:txBody>
+      </p:sp>
+      <p:sp>
+        <p:nvSpPr>
+          <p:cNvPr id="51" name="TextBox 50"/>
+          <p:cNvSpPr txBox="1"/>
+          <p:nvPr/>
+        </p:nvSpPr>
+        <p:spPr>
+          <a:xfrm>
+            <a:off x="8380476" y="6510528"/>
+            <a:ext cx="3474720" cy="73152"/>
+          </a:xfrm>
+          <a:prstGeom prst="rect">
+            <a:avLst/>
+          </a:prstGeom>
+          <a:noFill/>
+        </p:spPr>
+        <p:txBody>
+          <a:bodyPr wrap="square">
+            <a:spAutoFit/>
+          </a:bodyPr>
+          <a:lstStyle/>
+          <a:p>
+            <a:pPr algn="l"/>
+            <a:r>
+              <a:rPr sz="900" b="0" i="0">
+                <a:solidFill>
+                  <a:srgbClr val="B2DFDB"/>
+                </a:solidFill>
+              </a:rPr>
+              <a:t>PLN Nusantara — semua UP3 di seluruh Indonesia</a:t>
             </a:r>
           </a:p>
         </p:txBody>
